--- a/Mapped Curriculum Lessons/Grade 6/Lesson 07 - Nested Decisions/Nested Decisions - Slides.pptx
+++ b/Mapped Curriculum Lessons/Grade 6/Lesson 07 - Nested Decisions/Nested Decisions - Slides.pptx
@@ -2,28 +2,28 @@
 <file path=ppt/presentation.xml><?xml version="1.0" encoding="utf-8"?>
 <p:presentation xmlns:p="http://schemas.openxmlformats.org/presentationml/2006/main" embedTrueTypeFonts="1" saveSubsetFonts="0">
   <p:sldMasterIdLst>
-    <p:sldMasterId xmlns:r="http://schemas.openxmlformats.org/officeDocument/2006/relationships" id="2147483648" r:id="R2b3f393c24a34ea3"/>
+    <p:sldMasterId xmlns:r="http://schemas.openxmlformats.org/officeDocument/2006/relationships" id="2147483648" r:id="R6f2608a4e2834c1c"/>
   </p:sldMasterIdLst>
   <p:notesMasterIdLst>
-    <p:notesMasterId xmlns:r="http://schemas.openxmlformats.org/officeDocument/2006/relationships" r:id="R7020f2982e204160"/>
+    <p:notesMasterId xmlns:r="http://schemas.openxmlformats.org/officeDocument/2006/relationships" r:id="R5c8036ec00ad4431"/>
   </p:notesMasterIdLst>
   <p:sldIdLst>
-    <p:sldId xmlns:r="http://schemas.openxmlformats.org/officeDocument/2006/relationships" id="256" r:id="Rb746252c1f1d4a18"/>
-    <p:sldId xmlns:r="http://schemas.openxmlformats.org/officeDocument/2006/relationships" id="257" r:id="Re1348932080e4856"/>
-    <p:sldId xmlns:r="http://schemas.openxmlformats.org/officeDocument/2006/relationships" id="258" r:id="Rd591e8b82bb3412b"/>
-    <p:sldId xmlns:r="http://schemas.openxmlformats.org/officeDocument/2006/relationships" id="259" r:id="R90ba553ac5c8481d"/>
-    <p:sldId xmlns:r="http://schemas.openxmlformats.org/officeDocument/2006/relationships" id="260" r:id="R33365bf170c54fa2"/>
-    <p:sldId xmlns:r="http://schemas.openxmlformats.org/officeDocument/2006/relationships" id="261" r:id="R30775a66589d4209"/>
-    <p:sldId xmlns:r="http://schemas.openxmlformats.org/officeDocument/2006/relationships" id="262" r:id="Rc617576814f64aa3"/>
-    <p:sldId xmlns:r="http://schemas.openxmlformats.org/officeDocument/2006/relationships" id="263" r:id="Rcf7c569686e042da"/>
-    <p:sldId xmlns:r="http://schemas.openxmlformats.org/officeDocument/2006/relationships" id="264" r:id="Rffe2fd328506480e"/>
+    <p:sldId xmlns:r="http://schemas.openxmlformats.org/officeDocument/2006/relationships" id="256" r:id="R8e4e7879dc5a4513"/>
+    <p:sldId xmlns:r="http://schemas.openxmlformats.org/officeDocument/2006/relationships" id="257" r:id="R6c7b8ba4fdec4c08"/>
+    <p:sldId xmlns:r="http://schemas.openxmlformats.org/officeDocument/2006/relationships" id="258" r:id="R4c56a3f0e3714f52"/>
+    <p:sldId xmlns:r="http://schemas.openxmlformats.org/officeDocument/2006/relationships" id="259" r:id="R0ddd49bbcd324112"/>
+    <p:sldId xmlns:r="http://schemas.openxmlformats.org/officeDocument/2006/relationships" id="260" r:id="Rb8e25121a3404c41"/>
+    <p:sldId xmlns:r="http://schemas.openxmlformats.org/officeDocument/2006/relationships" id="261" r:id="Ra7584585927d44bf"/>
+    <p:sldId xmlns:r="http://schemas.openxmlformats.org/officeDocument/2006/relationships" id="262" r:id="Rb482bc5ea8ad4bbe"/>
+    <p:sldId xmlns:r="http://schemas.openxmlformats.org/officeDocument/2006/relationships" id="263" r:id="R8ed7146f5e8d4b9d"/>
+    <p:sldId xmlns:r="http://schemas.openxmlformats.org/officeDocument/2006/relationships" id="264" r:id="R830b895ef3e64ac8"/>
   </p:sldIdLst>
   <p:sldSz cx="12192000" cy="6858000"/>
   <p:notesSz cx="6858000" cy="9144000"/>
   <p:embeddedFontLst>
     <p:embeddedFont>
       <p:font typeface="JetBrains Mono"/>
-      <p:regular xmlns:r="http://schemas.openxmlformats.org/officeDocument/2006/relationships" r:id="R9de8c186e7364ba6"/>
+      <p:regular xmlns:r="http://schemas.openxmlformats.org/officeDocument/2006/relationships" r:id="Rf583e21adfb14c7e"/>
     </p:embeddedFont>
   </p:embeddedFontLst>
 </p:presentation>
@@ -1071,7 +1071,7 @@
           <p:nvPr/>
         </p:nvPicPr>
         <p:blipFill rotWithShape="1">
-          <a:blip xmlns:r="http://schemas.openxmlformats.org/officeDocument/2006/relationships" xmlns:a="http://schemas.openxmlformats.org/drawingml/2006/main" r:embed="R8d514dde46484bb8"/>
+          <a:blip xmlns:r="http://schemas.openxmlformats.org/officeDocument/2006/relationships" xmlns:a="http://schemas.openxmlformats.org/drawingml/2006/main" r:embed="R81cf91867d9a4114"/>
           <a:stretch xmlns:a="http://schemas.openxmlformats.org/drawingml/2006/main"/>
         </p:blipFill>
         <p:spPr>
@@ -1451,7 +1451,7 @@
           <p:nvPr/>
         </p:nvPicPr>
         <p:blipFill rotWithShape="1">
-          <a:blip xmlns:r="http://schemas.openxmlformats.org/officeDocument/2006/relationships" xmlns:a="http://schemas.openxmlformats.org/drawingml/2006/main" r:embed="R09df80fa925243f9">
+          <a:blip xmlns:r="http://schemas.openxmlformats.org/officeDocument/2006/relationships" xmlns:a="http://schemas.openxmlformats.org/drawingml/2006/main" r:embed="Rcf9ced17c9d94057">
             <a:alphaModFix amt="28000"/>
           </a:blip>
           <a:stretch xmlns:a="http://schemas.openxmlformats.org/drawingml/2006/main"/>
@@ -1664,7 +1664,7 @@
           <p:nvPr/>
         </p:nvPicPr>
         <p:blipFill rotWithShape="1">
-          <a:blip xmlns:r="http://schemas.openxmlformats.org/officeDocument/2006/relationships" xmlns:a="http://schemas.openxmlformats.org/drawingml/2006/main" r:embed="R3fbbd09c8a06494b">
+          <a:blip xmlns:r="http://schemas.openxmlformats.org/officeDocument/2006/relationships" xmlns:a="http://schemas.openxmlformats.org/drawingml/2006/main" r:embed="R342822b6a22d421c">
             <a:alphaModFix amt="28000"/>
           </a:blip>
           <a:stretch xmlns:a="http://schemas.openxmlformats.org/drawingml/2006/main"/>
@@ -1899,7 +1899,7 @@
           <p:nvPr/>
         </p:nvPicPr>
         <p:blipFill rotWithShape="1">
-          <a:blip xmlns:r="http://schemas.openxmlformats.org/officeDocument/2006/relationships" xmlns:a="http://schemas.openxmlformats.org/drawingml/2006/main" r:embed="Rdb1f645650cf4ac8">
+          <a:blip xmlns:r="http://schemas.openxmlformats.org/officeDocument/2006/relationships" xmlns:a="http://schemas.openxmlformats.org/drawingml/2006/main" r:embed="R91e370d0afbd47c6">
             <a:alphaModFix amt="28000"/>
           </a:blip>
           <a:stretch xmlns:a="http://schemas.openxmlformats.org/drawingml/2006/main"/>
@@ -2176,7 +2176,7 @@
           <p:nvPr/>
         </p:nvPicPr>
         <p:blipFill rotWithShape="1">
-          <a:blip xmlns:r="http://schemas.openxmlformats.org/officeDocument/2006/relationships" xmlns:a="http://schemas.openxmlformats.org/drawingml/2006/main" r:embed="Rd773a0c6f40541bc">
+          <a:blip xmlns:r="http://schemas.openxmlformats.org/officeDocument/2006/relationships" xmlns:a="http://schemas.openxmlformats.org/drawingml/2006/main" r:embed="R3abc6fbc64644229">
             <a:alphaModFix amt="28000"/>
           </a:blip>
           <a:stretch xmlns:a="http://schemas.openxmlformats.org/drawingml/2006/main"/>
@@ -2451,7 +2451,7 @@
           <p:nvPr/>
         </p:nvPicPr>
         <p:blipFill rotWithShape="1">
-          <a:blip xmlns:r="http://schemas.openxmlformats.org/officeDocument/2006/relationships" xmlns:a="http://schemas.openxmlformats.org/drawingml/2006/main" r:embed="Rfc966276c7814105">
+          <a:blip xmlns:r="http://schemas.openxmlformats.org/officeDocument/2006/relationships" xmlns:a="http://schemas.openxmlformats.org/drawingml/2006/main" r:embed="R5671f5d37aa84b1b">
             <a:alphaModFix amt="28000"/>
           </a:blip>
           <a:stretch xmlns:a="http://schemas.openxmlformats.org/drawingml/2006/main"/>
@@ -2875,7 +2875,7 @@
           <p:nvPr/>
         </p:nvPicPr>
         <p:blipFill rotWithShape="1">
-          <a:blip xmlns:r="http://schemas.openxmlformats.org/officeDocument/2006/relationships" xmlns:a="http://schemas.openxmlformats.org/drawingml/2006/main" r:embed="R21a91747d9a6420e">
+          <a:blip xmlns:r="http://schemas.openxmlformats.org/officeDocument/2006/relationships" xmlns:a="http://schemas.openxmlformats.org/drawingml/2006/main" r:embed="R32d0c1ef24624a26">
             <a:alphaModFix amt="28000"/>
           </a:blip>
           <a:stretch xmlns:a="http://schemas.openxmlformats.org/drawingml/2006/main"/>
@@ -3016,7 +3016,7 @@
           <p:nvPr/>
         </p:nvPicPr>
         <p:blipFill rotWithShape="1">
-          <a:blip xmlns:r="http://schemas.openxmlformats.org/officeDocument/2006/relationships" xmlns:a="http://schemas.openxmlformats.org/drawingml/2006/main" r:embed="Rc04d75d26e204639">
+          <a:blip xmlns:r="http://schemas.openxmlformats.org/officeDocument/2006/relationships" xmlns:a="http://schemas.openxmlformats.org/drawingml/2006/main" r:embed="R167f14a8bbb942f0">
             <a:alphaModFix amt="28000"/>
           </a:blip>
           <a:stretch xmlns:a="http://schemas.openxmlformats.org/drawingml/2006/main"/>
@@ -3130,7 +3130,7 @@
           <p:nvPr/>
         </p:nvPicPr>
         <p:blipFill rotWithShape="1">
-          <a:blip xmlns:r="http://schemas.openxmlformats.org/officeDocument/2006/relationships" xmlns:a="http://schemas.openxmlformats.org/drawingml/2006/main" r:embed="Ra6508403b9004cc8">
+          <a:blip xmlns:r="http://schemas.openxmlformats.org/officeDocument/2006/relationships" xmlns:a="http://schemas.openxmlformats.org/drawingml/2006/main" r:embed="R29ccc13e2b774936">
             <a:alphaModFix amt="28000"/>
           </a:blip>
           <a:stretch xmlns:a="http://schemas.openxmlformats.org/drawingml/2006/main"/>
@@ -3457,7 +3457,7 @@
           <p:nvPr/>
         </p:nvPicPr>
         <p:blipFill rotWithShape="1">
-          <a:blip xmlns:r="http://schemas.openxmlformats.org/officeDocument/2006/relationships" xmlns:a="http://schemas.openxmlformats.org/drawingml/2006/main" r:embed="Ra26eb892cb7643dd">
+          <a:blip xmlns:r="http://schemas.openxmlformats.org/officeDocument/2006/relationships" xmlns:a="http://schemas.openxmlformats.org/drawingml/2006/main" r:embed="R9748f8f41bc044fc">
             <a:alphaModFix amt="28000"/>
           </a:blip>
           <a:stretch xmlns:a="http://schemas.openxmlformats.org/drawingml/2006/main"/>
@@ -3745,7 +3745,7 @@
           <p:nvPr/>
         </p:nvPicPr>
         <p:blipFill rotWithShape="1">
-          <a:blip xmlns:r="http://schemas.openxmlformats.org/officeDocument/2006/relationships" xmlns:a="http://schemas.openxmlformats.org/drawingml/2006/main" r:embed="Re79c68002d384ecb">
+          <a:blip xmlns:r="http://schemas.openxmlformats.org/officeDocument/2006/relationships" xmlns:a="http://schemas.openxmlformats.org/drawingml/2006/main" r:embed="Ra588816422d94143">
             <a:alphaModFix amt="28000"/>
           </a:blip>
           <a:stretch xmlns:a="http://schemas.openxmlformats.org/drawingml/2006/main"/>
@@ -3982,17 +3982,17 @@
   </p:cSld>
   <p:clrMap bg1="lt1" tx1="dk1" bg2="lt2" tx2="dk2" accent1="accent1" accent2="accent2" accent3="accent3" accent4="accent4" accent5="accent5" accent6="accent6" hlink="hlink" folHlink="folHlink"/>
   <p:sldLayoutIdLst>
-    <p:sldLayoutId xmlns:r="http://schemas.openxmlformats.org/officeDocument/2006/relationships" id="2147483649" r:id="R4b89ed28bf084c6e"/>
-    <p:sldLayoutId xmlns:r="http://schemas.openxmlformats.org/officeDocument/2006/relationships" id="2147483650" r:id="Raae5f759c05a46d4"/>
-    <p:sldLayoutId xmlns:r="http://schemas.openxmlformats.org/officeDocument/2006/relationships" id="2147483651" r:id="R1ed60ae220d6428b"/>
-    <p:sldLayoutId xmlns:r="http://schemas.openxmlformats.org/officeDocument/2006/relationships" id="2147483652" r:id="Re41747ceab424c6b"/>
-    <p:sldLayoutId xmlns:r="http://schemas.openxmlformats.org/officeDocument/2006/relationships" id="2147483653" r:id="R6ec46a0728304410"/>
-    <p:sldLayoutId xmlns:r="http://schemas.openxmlformats.org/officeDocument/2006/relationships" id="2147483654" r:id="R7fd4bb526cd84a66"/>
-    <p:sldLayoutId xmlns:r="http://schemas.openxmlformats.org/officeDocument/2006/relationships" id="2147483655" r:id="R8a25f0e490bd402f"/>
-    <p:sldLayoutId xmlns:r="http://schemas.openxmlformats.org/officeDocument/2006/relationships" id="2147483656" r:id="Re5146c36945f46a7"/>
-    <p:sldLayoutId xmlns:r="http://schemas.openxmlformats.org/officeDocument/2006/relationships" id="2147483657" r:id="R10da4c9d7ac64eef"/>
-    <p:sldLayoutId xmlns:r="http://schemas.openxmlformats.org/officeDocument/2006/relationships" id="2147483658" r:id="R87f5366854ea4d54"/>
-    <p:sldLayoutId xmlns:r="http://schemas.openxmlformats.org/officeDocument/2006/relationships" id="2147483659" r:id="R7dc88341ee614dfd"/>
+    <p:sldLayoutId xmlns:r="http://schemas.openxmlformats.org/officeDocument/2006/relationships" id="2147483649" r:id="R4cf5e6c139a44afa"/>
+    <p:sldLayoutId xmlns:r="http://schemas.openxmlformats.org/officeDocument/2006/relationships" id="2147483650" r:id="R3e689194c27242d6"/>
+    <p:sldLayoutId xmlns:r="http://schemas.openxmlformats.org/officeDocument/2006/relationships" id="2147483651" r:id="R8a0e45f415a64f4b"/>
+    <p:sldLayoutId xmlns:r="http://schemas.openxmlformats.org/officeDocument/2006/relationships" id="2147483652" r:id="R23601b550ad64851"/>
+    <p:sldLayoutId xmlns:r="http://schemas.openxmlformats.org/officeDocument/2006/relationships" id="2147483653" r:id="R9c61398c6f7446d6"/>
+    <p:sldLayoutId xmlns:r="http://schemas.openxmlformats.org/officeDocument/2006/relationships" id="2147483654" r:id="Rf234b18db3ff41bd"/>
+    <p:sldLayoutId xmlns:r="http://schemas.openxmlformats.org/officeDocument/2006/relationships" id="2147483655" r:id="R238877131d1a439c"/>
+    <p:sldLayoutId xmlns:r="http://schemas.openxmlformats.org/officeDocument/2006/relationships" id="2147483656" r:id="R7ad92f502eb14700"/>
+    <p:sldLayoutId xmlns:r="http://schemas.openxmlformats.org/officeDocument/2006/relationships" id="2147483657" r:id="R503e329e493c4d48"/>
+    <p:sldLayoutId xmlns:r="http://schemas.openxmlformats.org/officeDocument/2006/relationships" id="2147483658" r:id="R4b10367bb6154acf"/>
+    <p:sldLayoutId xmlns:r="http://schemas.openxmlformats.org/officeDocument/2006/relationships" id="2147483659" r:id="R45af0767434a4fd9"/>
   </p:sldLayoutIdLst>
   <p:hf hdr="0" ftr="0" dt="0"/>
   <p:txStyles>
@@ -8267,7 +8267,7 @@
                 <a:ea typeface="Calibri"/>
                 <a:cs typeface="Calibri"/>
               </a:rPr>
-              <a:t>When it is raining, ask whether the wind is </a:t>
+              <a:t>When it is raining, ask whether the wind is strong or light. Display </a:t>
             </a:r>
             <a:r>
               <a:rPr sz="2400" b="0">
@@ -8278,7 +8278,7 @@
                 <a:ea typeface="JetBrains Mono"/>
                 <a:cs typeface="JetBrains Mono"/>
               </a:rPr>
-              <a:t>"strong"</a:t>
+              <a:t>"Wear a coat."</a:t>
             </a:r>
             <a:r>
               <a:rPr sz="2400" b="0">
@@ -8289,51 +8289,7 @@
                 <a:ea typeface="Calibri"/>
                 <a:cs typeface="Calibri"/>
               </a:rPr>
-              <a:t> or light. Display </a:t>
-            </a:r>
-            <a:r>
-              <a:rPr sz="2400" b="0">
-                <a:solidFill>
-                  <a:srgbClr val="067D17"/>
-                </a:solidFill>
-                <a:latin typeface="JetBrains Mono"/>
-                <a:ea typeface="JetBrains Mono"/>
-                <a:cs typeface="JetBrains Mono"/>
-              </a:rPr>
-              <a:t>"Wear a coat."</a:t>
-            </a:r>
-            <a:r>
-              <a:rPr sz="2400" b="0">
-                <a:solidFill>
-                  <a:srgbClr val="080808"/>
-                </a:solidFill>
-                <a:latin typeface="Calibri"/>
-                <a:ea typeface="Calibri"/>
-                <a:cs typeface="Calibri"/>
-              </a:rPr>
-              <a:t> for </a:t>
-            </a:r>
-            <a:r>
-              <a:rPr sz="2400" b="0">
-                <a:solidFill>
-                  <a:srgbClr val="067D17"/>
-                </a:solidFill>
-                <a:latin typeface="JetBrains Mono"/>
-                <a:ea typeface="JetBrains Mono"/>
-                <a:cs typeface="JetBrains Mono"/>
-              </a:rPr>
-              <a:t>"strong"</a:t>
-            </a:r>
-            <a:r>
-              <a:rPr sz="2400" b="0">
-                <a:solidFill>
-                  <a:srgbClr val="080808"/>
-                </a:solidFill>
-                <a:latin typeface="Calibri"/>
-                <a:ea typeface="Calibri"/>
-                <a:cs typeface="Calibri"/>
-              </a:rPr>
-              <a:t> wind and </a:t>
+              <a:t> for strong wind and </a:t>
             </a:r>
             <a:r>
               <a:rPr sz="2400" b="0">
@@ -9305,29 +9261,7 @@
                 <a:ea typeface="Calibri"/>
                 <a:cs typeface="Calibri"/>
               </a:rPr>
-              <a:t> for </a:t>
-            </a:r>
-            <a:r>
-              <a:rPr sz="2400" b="0">
-                <a:solidFill>
-                  <a:srgbClr val="067D17"/>
-                </a:solidFill>
-                <a:latin typeface="JetBrains Mono"/>
-                <a:ea typeface="JetBrains Mono"/>
-                <a:cs typeface="JetBrains Mono"/>
-              </a:rPr>
-              <a:t>"yes"</a:t>
-            </a:r>
-            <a:r>
-              <a:rPr sz="2400" b="0">
-                <a:solidFill>
-                  <a:srgbClr val="080808"/>
-                </a:solidFill>
-                <a:latin typeface="Calibri"/>
-                <a:ea typeface="Calibri"/>
-                <a:cs typeface="Calibri"/>
-              </a:rPr>
-              <a:t> and </a:t>
+              <a:t> for yes and </a:t>
             </a:r>
             <a:r>
               <a:rPr sz="2400" b="0">

--- a/Mapped Curriculum Lessons/Grade 6/Lesson 07 - Nested Decisions/Nested Decisions - Slides.pptx
+++ b/Mapped Curriculum Lessons/Grade 6/Lesson 07 - Nested Decisions/Nested Decisions - Slides.pptx
@@ -2,28 +2,28 @@
 <file path=ppt/presentation.xml><?xml version="1.0" encoding="utf-8"?>
 <p:presentation xmlns:p="http://schemas.openxmlformats.org/presentationml/2006/main" embedTrueTypeFonts="1" saveSubsetFonts="0">
   <p:sldMasterIdLst>
-    <p:sldMasterId xmlns:r="http://schemas.openxmlformats.org/officeDocument/2006/relationships" id="2147483648" r:id="R6f2608a4e2834c1c"/>
+    <p:sldMasterId xmlns:r="http://schemas.openxmlformats.org/officeDocument/2006/relationships" id="2147483648" r:id="R50183dd5db7b4103"/>
   </p:sldMasterIdLst>
   <p:notesMasterIdLst>
-    <p:notesMasterId xmlns:r="http://schemas.openxmlformats.org/officeDocument/2006/relationships" r:id="R5c8036ec00ad4431"/>
+    <p:notesMasterId xmlns:r="http://schemas.openxmlformats.org/officeDocument/2006/relationships" r:id="Red33db1fabcb4aa8"/>
   </p:notesMasterIdLst>
   <p:sldIdLst>
-    <p:sldId xmlns:r="http://schemas.openxmlformats.org/officeDocument/2006/relationships" id="256" r:id="R8e4e7879dc5a4513"/>
-    <p:sldId xmlns:r="http://schemas.openxmlformats.org/officeDocument/2006/relationships" id="257" r:id="R6c7b8ba4fdec4c08"/>
-    <p:sldId xmlns:r="http://schemas.openxmlformats.org/officeDocument/2006/relationships" id="258" r:id="R4c56a3f0e3714f52"/>
-    <p:sldId xmlns:r="http://schemas.openxmlformats.org/officeDocument/2006/relationships" id="259" r:id="R0ddd49bbcd324112"/>
-    <p:sldId xmlns:r="http://schemas.openxmlformats.org/officeDocument/2006/relationships" id="260" r:id="Rb8e25121a3404c41"/>
-    <p:sldId xmlns:r="http://schemas.openxmlformats.org/officeDocument/2006/relationships" id="261" r:id="Ra7584585927d44bf"/>
-    <p:sldId xmlns:r="http://schemas.openxmlformats.org/officeDocument/2006/relationships" id="262" r:id="Rb482bc5ea8ad4bbe"/>
-    <p:sldId xmlns:r="http://schemas.openxmlformats.org/officeDocument/2006/relationships" id="263" r:id="R8ed7146f5e8d4b9d"/>
-    <p:sldId xmlns:r="http://schemas.openxmlformats.org/officeDocument/2006/relationships" id="264" r:id="R830b895ef3e64ac8"/>
+    <p:sldId xmlns:r="http://schemas.openxmlformats.org/officeDocument/2006/relationships" id="256" r:id="R41f188e4a54644d7"/>
+    <p:sldId xmlns:r="http://schemas.openxmlformats.org/officeDocument/2006/relationships" id="257" r:id="Rabd0bb9af5f241b5"/>
+    <p:sldId xmlns:r="http://schemas.openxmlformats.org/officeDocument/2006/relationships" id="258" r:id="R3562e1d7b9dc4a47"/>
+    <p:sldId xmlns:r="http://schemas.openxmlformats.org/officeDocument/2006/relationships" id="259" r:id="R6ec8ad5c74224dfe"/>
+    <p:sldId xmlns:r="http://schemas.openxmlformats.org/officeDocument/2006/relationships" id="260" r:id="R372ff9b24b8545ea"/>
+    <p:sldId xmlns:r="http://schemas.openxmlformats.org/officeDocument/2006/relationships" id="261" r:id="Rd084f0c32bf5435e"/>
+    <p:sldId xmlns:r="http://schemas.openxmlformats.org/officeDocument/2006/relationships" id="262" r:id="R9efe2f9eb64f400d"/>
+    <p:sldId xmlns:r="http://schemas.openxmlformats.org/officeDocument/2006/relationships" id="263" r:id="R60b10becc8594407"/>
+    <p:sldId xmlns:r="http://schemas.openxmlformats.org/officeDocument/2006/relationships" id="264" r:id="Re6a0066fef0d4705"/>
   </p:sldIdLst>
   <p:sldSz cx="12192000" cy="6858000"/>
   <p:notesSz cx="6858000" cy="9144000"/>
   <p:embeddedFontLst>
     <p:embeddedFont>
       <p:font typeface="JetBrains Mono"/>
-      <p:regular xmlns:r="http://schemas.openxmlformats.org/officeDocument/2006/relationships" r:id="Rf583e21adfb14c7e"/>
+      <p:regular xmlns:r="http://schemas.openxmlformats.org/officeDocument/2006/relationships" r:id="R721753f6ca7a4e87"/>
     </p:embeddedFont>
   </p:embeddedFontLst>
 </p:presentation>
@@ -1071,7 +1071,7 @@
           <p:nvPr/>
         </p:nvPicPr>
         <p:blipFill rotWithShape="1">
-          <a:blip xmlns:r="http://schemas.openxmlformats.org/officeDocument/2006/relationships" xmlns:a="http://schemas.openxmlformats.org/drawingml/2006/main" r:embed="R81cf91867d9a4114"/>
+          <a:blip xmlns:r="http://schemas.openxmlformats.org/officeDocument/2006/relationships" xmlns:a="http://schemas.openxmlformats.org/drawingml/2006/main" r:embed="R15f55433aa1c4802"/>
           <a:stretch xmlns:a="http://schemas.openxmlformats.org/drawingml/2006/main"/>
         </p:blipFill>
         <p:spPr>
@@ -1451,7 +1451,7 @@
           <p:nvPr/>
         </p:nvPicPr>
         <p:blipFill rotWithShape="1">
-          <a:blip xmlns:r="http://schemas.openxmlformats.org/officeDocument/2006/relationships" xmlns:a="http://schemas.openxmlformats.org/drawingml/2006/main" r:embed="Rcf9ced17c9d94057">
+          <a:blip xmlns:r="http://schemas.openxmlformats.org/officeDocument/2006/relationships" xmlns:a="http://schemas.openxmlformats.org/drawingml/2006/main" r:embed="Rdbd9670c67ce46eb">
             <a:alphaModFix amt="28000"/>
           </a:blip>
           <a:stretch xmlns:a="http://schemas.openxmlformats.org/drawingml/2006/main"/>
@@ -1664,7 +1664,7 @@
           <p:nvPr/>
         </p:nvPicPr>
         <p:blipFill rotWithShape="1">
-          <a:blip xmlns:r="http://schemas.openxmlformats.org/officeDocument/2006/relationships" xmlns:a="http://schemas.openxmlformats.org/drawingml/2006/main" r:embed="R342822b6a22d421c">
+          <a:blip xmlns:r="http://schemas.openxmlformats.org/officeDocument/2006/relationships" xmlns:a="http://schemas.openxmlformats.org/drawingml/2006/main" r:embed="Rd6ef514f48434b3a">
             <a:alphaModFix amt="28000"/>
           </a:blip>
           <a:stretch xmlns:a="http://schemas.openxmlformats.org/drawingml/2006/main"/>
@@ -1899,7 +1899,7 @@
           <p:nvPr/>
         </p:nvPicPr>
         <p:blipFill rotWithShape="1">
-          <a:blip xmlns:r="http://schemas.openxmlformats.org/officeDocument/2006/relationships" xmlns:a="http://schemas.openxmlformats.org/drawingml/2006/main" r:embed="R91e370d0afbd47c6">
+          <a:blip xmlns:r="http://schemas.openxmlformats.org/officeDocument/2006/relationships" xmlns:a="http://schemas.openxmlformats.org/drawingml/2006/main" r:embed="Radefd0311f4e48b8">
             <a:alphaModFix amt="28000"/>
           </a:blip>
           <a:stretch xmlns:a="http://schemas.openxmlformats.org/drawingml/2006/main"/>
@@ -2176,7 +2176,7 @@
           <p:nvPr/>
         </p:nvPicPr>
         <p:blipFill rotWithShape="1">
-          <a:blip xmlns:r="http://schemas.openxmlformats.org/officeDocument/2006/relationships" xmlns:a="http://schemas.openxmlformats.org/drawingml/2006/main" r:embed="R3abc6fbc64644229">
+          <a:blip xmlns:r="http://schemas.openxmlformats.org/officeDocument/2006/relationships" xmlns:a="http://schemas.openxmlformats.org/drawingml/2006/main" r:embed="R0e046b69e0fc473b">
             <a:alphaModFix amt="28000"/>
           </a:blip>
           <a:stretch xmlns:a="http://schemas.openxmlformats.org/drawingml/2006/main"/>
@@ -2451,7 +2451,7 @@
           <p:nvPr/>
         </p:nvPicPr>
         <p:blipFill rotWithShape="1">
-          <a:blip xmlns:r="http://schemas.openxmlformats.org/officeDocument/2006/relationships" xmlns:a="http://schemas.openxmlformats.org/drawingml/2006/main" r:embed="R5671f5d37aa84b1b">
+          <a:blip xmlns:r="http://schemas.openxmlformats.org/officeDocument/2006/relationships" xmlns:a="http://schemas.openxmlformats.org/drawingml/2006/main" r:embed="Re386b16393cf4f2d">
             <a:alphaModFix amt="28000"/>
           </a:blip>
           <a:stretch xmlns:a="http://schemas.openxmlformats.org/drawingml/2006/main"/>
@@ -2875,7 +2875,7 @@
           <p:nvPr/>
         </p:nvPicPr>
         <p:blipFill rotWithShape="1">
-          <a:blip xmlns:r="http://schemas.openxmlformats.org/officeDocument/2006/relationships" xmlns:a="http://schemas.openxmlformats.org/drawingml/2006/main" r:embed="R32d0c1ef24624a26">
+          <a:blip xmlns:r="http://schemas.openxmlformats.org/officeDocument/2006/relationships" xmlns:a="http://schemas.openxmlformats.org/drawingml/2006/main" r:embed="Rae5714e9ed924897">
             <a:alphaModFix amt="28000"/>
           </a:blip>
           <a:stretch xmlns:a="http://schemas.openxmlformats.org/drawingml/2006/main"/>
@@ -3016,7 +3016,7 @@
           <p:nvPr/>
         </p:nvPicPr>
         <p:blipFill rotWithShape="1">
-          <a:blip xmlns:r="http://schemas.openxmlformats.org/officeDocument/2006/relationships" xmlns:a="http://schemas.openxmlformats.org/drawingml/2006/main" r:embed="R167f14a8bbb942f0">
+          <a:blip xmlns:r="http://schemas.openxmlformats.org/officeDocument/2006/relationships" xmlns:a="http://schemas.openxmlformats.org/drawingml/2006/main" r:embed="Ra9e6062241b84453">
             <a:alphaModFix amt="28000"/>
           </a:blip>
           <a:stretch xmlns:a="http://schemas.openxmlformats.org/drawingml/2006/main"/>
@@ -3130,7 +3130,7 @@
           <p:nvPr/>
         </p:nvPicPr>
         <p:blipFill rotWithShape="1">
-          <a:blip xmlns:r="http://schemas.openxmlformats.org/officeDocument/2006/relationships" xmlns:a="http://schemas.openxmlformats.org/drawingml/2006/main" r:embed="R29ccc13e2b774936">
+          <a:blip xmlns:r="http://schemas.openxmlformats.org/officeDocument/2006/relationships" xmlns:a="http://schemas.openxmlformats.org/drawingml/2006/main" r:embed="Ra01b7054ad874638">
             <a:alphaModFix amt="28000"/>
           </a:blip>
           <a:stretch xmlns:a="http://schemas.openxmlformats.org/drawingml/2006/main"/>
@@ -3457,7 +3457,7 @@
           <p:nvPr/>
         </p:nvPicPr>
         <p:blipFill rotWithShape="1">
-          <a:blip xmlns:r="http://schemas.openxmlformats.org/officeDocument/2006/relationships" xmlns:a="http://schemas.openxmlformats.org/drawingml/2006/main" r:embed="R9748f8f41bc044fc">
+          <a:blip xmlns:r="http://schemas.openxmlformats.org/officeDocument/2006/relationships" xmlns:a="http://schemas.openxmlformats.org/drawingml/2006/main" r:embed="R7310de7457864610">
             <a:alphaModFix amt="28000"/>
           </a:blip>
           <a:stretch xmlns:a="http://schemas.openxmlformats.org/drawingml/2006/main"/>
@@ -3745,7 +3745,7 @@
           <p:nvPr/>
         </p:nvPicPr>
         <p:blipFill rotWithShape="1">
-          <a:blip xmlns:r="http://schemas.openxmlformats.org/officeDocument/2006/relationships" xmlns:a="http://schemas.openxmlformats.org/drawingml/2006/main" r:embed="Ra588816422d94143">
+          <a:blip xmlns:r="http://schemas.openxmlformats.org/officeDocument/2006/relationships" xmlns:a="http://schemas.openxmlformats.org/drawingml/2006/main" r:embed="Rc09f59acb9fd4f49">
             <a:alphaModFix amt="28000"/>
           </a:blip>
           <a:stretch xmlns:a="http://schemas.openxmlformats.org/drawingml/2006/main"/>
@@ -3982,17 +3982,17 @@
   </p:cSld>
   <p:clrMap bg1="lt1" tx1="dk1" bg2="lt2" tx2="dk2" accent1="accent1" accent2="accent2" accent3="accent3" accent4="accent4" accent5="accent5" accent6="accent6" hlink="hlink" folHlink="folHlink"/>
   <p:sldLayoutIdLst>
-    <p:sldLayoutId xmlns:r="http://schemas.openxmlformats.org/officeDocument/2006/relationships" id="2147483649" r:id="R4cf5e6c139a44afa"/>
-    <p:sldLayoutId xmlns:r="http://schemas.openxmlformats.org/officeDocument/2006/relationships" id="2147483650" r:id="R3e689194c27242d6"/>
-    <p:sldLayoutId xmlns:r="http://schemas.openxmlformats.org/officeDocument/2006/relationships" id="2147483651" r:id="R8a0e45f415a64f4b"/>
-    <p:sldLayoutId xmlns:r="http://schemas.openxmlformats.org/officeDocument/2006/relationships" id="2147483652" r:id="R23601b550ad64851"/>
-    <p:sldLayoutId xmlns:r="http://schemas.openxmlformats.org/officeDocument/2006/relationships" id="2147483653" r:id="R9c61398c6f7446d6"/>
-    <p:sldLayoutId xmlns:r="http://schemas.openxmlformats.org/officeDocument/2006/relationships" id="2147483654" r:id="Rf234b18db3ff41bd"/>
-    <p:sldLayoutId xmlns:r="http://schemas.openxmlformats.org/officeDocument/2006/relationships" id="2147483655" r:id="R238877131d1a439c"/>
-    <p:sldLayoutId xmlns:r="http://schemas.openxmlformats.org/officeDocument/2006/relationships" id="2147483656" r:id="R7ad92f502eb14700"/>
-    <p:sldLayoutId xmlns:r="http://schemas.openxmlformats.org/officeDocument/2006/relationships" id="2147483657" r:id="R503e329e493c4d48"/>
-    <p:sldLayoutId xmlns:r="http://schemas.openxmlformats.org/officeDocument/2006/relationships" id="2147483658" r:id="R4b10367bb6154acf"/>
-    <p:sldLayoutId xmlns:r="http://schemas.openxmlformats.org/officeDocument/2006/relationships" id="2147483659" r:id="R45af0767434a4fd9"/>
+    <p:sldLayoutId xmlns:r="http://schemas.openxmlformats.org/officeDocument/2006/relationships" id="2147483649" r:id="R723e8c3e6e5c489a"/>
+    <p:sldLayoutId xmlns:r="http://schemas.openxmlformats.org/officeDocument/2006/relationships" id="2147483650" r:id="Rb6c89d93138540c9"/>
+    <p:sldLayoutId xmlns:r="http://schemas.openxmlformats.org/officeDocument/2006/relationships" id="2147483651" r:id="Ra63a41624e2d474e"/>
+    <p:sldLayoutId xmlns:r="http://schemas.openxmlformats.org/officeDocument/2006/relationships" id="2147483652" r:id="R482d33d58d8440ae"/>
+    <p:sldLayoutId xmlns:r="http://schemas.openxmlformats.org/officeDocument/2006/relationships" id="2147483653" r:id="R7566f02b5d7e4339"/>
+    <p:sldLayoutId xmlns:r="http://schemas.openxmlformats.org/officeDocument/2006/relationships" id="2147483654" r:id="Racb6b2ff0bdb4b07"/>
+    <p:sldLayoutId xmlns:r="http://schemas.openxmlformats.org/officeDocument/2006/relationships" id="2147483655" r:id="R0ba3468ebabe4f65"/>
+    <p:sldLayoutId xmlns:r="http://schemas.openxmlformats.org/officeDocument/2006/relationships" id="2147483656" r:id="R6b6e463be95f46ff"/>
+    <p:sldLayoutId xmlns:r="http://schemas.openxmlformats.org/officeDocument/2006/relationships" id="2147483657" r:id="R22925c2a9c3e4f30"/>
+    <p:sldLayoutId xmlns:r="http://schemas.openxmlformats.org/officeDocument/2006/relationships" id="2147483658" r:id="R456107c399694239"/>
+    <p:sldLayoutId xmlns:r="http://schemas.openxmlformats.org/officeDocument/2006/relationships" id="2147483659" r:id="R88560ef2db094971"/>
   </p:sldLayoutIdLst>
   <p:hf hdr="0" ftr="0" dt="0"/>
   <p:txStyles>
@@ -8248,7 +8248,7 @@
         </p:spPr>
         <p:txBody>
           <a:bodyPr xmlns:a="http://schemas.openxmlformats.org/drawingml/2006/main">
-            <a:normAutofit fontScale="100000"/>
+            <a:normAutofit fontScale="88242"/>
           </a:bodyPr>
           <a:lstStyle xmlns:a="http://schemas.openxmlformats.org/drawingml/2006/main"/>
           <a:p xmlns:a="http://schemas.openxmlformats.org/drawingml/2006/main">
@@ -8267,7 +8267,7 @@
                 <a:ea typeface="Calibri"/>
                 <a:cs typeface="Calibri"/>
               </a:rPr>
-              <a:t>When it is raining, ask whether the wind is strong or light. Display </a:t>
+              <a:t>When [raining] is </a:t>
             </a:r>
             <a:r>
               <a:rPr sz="2400" b="0">
@@ -8278,7 +8278,7 @@
                 <a:ea typeface="JetBrains Mono"/>
                 <a:cs typeface="JetBrains Mono"/>
               </a:rPr>
-              <a:t>"Wear a coat."</a:t>
+              <a:t>"yes"</a:t>
             </a:r>
             <a:r>
               <a:rPr sz="2400" b="0">
@@ -8289,7 +8289,7 @@
                 <a:ea typeface="Calibri"/>
                 <a:cs typeface="Calibri"/>
               </a:rPr>
-              <a:t> for strong wind and </a:t>
+              <a:t>, ask whether the wind is strong or light and store the answer in [wind_strength]. Display </a:t>
             </a:r>
             <a:r>
               <a:rPr sz="2400" b="0">
@@ -8300,7 +8300,7 @@
                 <a:ea typeface="JetBrains Mono"/>
                 <a:cs typeface="JetBrains Mono"/>
               </a:rPr>
-              <a:t>"Take an umbrella."</a:t>
+              <a:t>"Wear a coat."</a:t>
             </a:r>
             <a:r>
               <a:rPr sz="2400" b="0">
@@ -8311,7 +8311,216 @@
                 <a:ea typeface="Calibri"/>
                 <a:cs typeface="Calibri"/>
               </a:rPr>
-              <a:t> for light wind. Keep the dry-weather route unchanged.</a:t>
+              <a:t> for </a:t>
+            </a:r>
+            <a:r>
+              <a:rPr sz="2400" b="0">
+                <a:solidFill>
+                  <a:srgbClr val="067D17"/>
+                </a:solidFill>
+                <a:latin typeface="JetBrains Mono"/>
+                <a:ea typeface="JetBrains Mono"/>
+                <a:cs typeface="JetBrains Mono"/>
+              </a:rPr>
+              <a:t>"strong"</a:t>
+            </a:r>
+            <a:r>
+              <a:rPr sz="2400" b="0">
+                <a:solidFill>
+                  <a:srgbClr val="080808"/>
+                </a:solidFill>
+                <a:latin typeface="Calibri"/>
+                <a:ea typeface="Calibri"/>
+                <a:cs typeface="Calibri"/>
+              </a:rPr>
+              <a:t> and </a:t>
+            </a:r>
+            <a:r>
+              <a:rPr sz="2400" b="0">
+                <a:solidFill>
+                  <a:srgbClr val="067D17"/>
+                </a:solidFill>
+                <a:latin typeface="JetBrains Mono"/>
+                <a:ea typeface="JetBrains Mono"/>
+                <a:cs typeface="JetBrains Mono"/>
+              </a:rPr>
+              <a:t>"Take an umbrella."</a:t>
+            </a:r>
+            <a:r>
+              <a:rPr sz="2400" b="0">
+                <a:solidFill>
+                  <a:srgbClr val="080808"/>
+                </a:solidFill>
+                <a:latin typeface="Calibri"/>
+                <a:ea typeface="Calibri"/>
+                <a:cs typeface="Calibri"/>
+              </a:rPr>
+              <a:t> for </a:t>
+            </a:r>
+            <a:r>
+              <a:rPr sz="2400" b="0">
+                <a:solidFill>
+                  <a:srgbClr val="067D17"/>
+                </a:solidFill>
+                <a:latin typeface="JetBrains Mono"/>
+                <a:ea typeface="JetBrains Mono"/>
+                <a:cs typeface="JetBrains Mono"/>
+              </a:rPr>
+              <a:t>"light"</a:t>
+            </a:r>
+            <a:r>
+              <a:rPr sz="2400" b="0">
+                <a:solidFill>
+                  <a:srgbClr val="080808"/>
+                </a:solidFill>
+                <a:latin typeface="Calibri"/>
+                <a:ea typeface="Calibri"/>
+                <a:cs typeface="Calibri"/>
+              </a:rPr>
+              <a:t>. Keep </a:t>
+            </a:r>
+            <a:r>
+              <a:rPr sz="2400" b="0">
+                <a:solidFill>
+                  <a:srgbClr val="067D17"/>
+                </a:solidFill>
+                <a:latin typeface="JetBrains Mono"/>
+                <a:ea typeface="JetBrains Mono"/>
+                <a:cs typeface="JetBrains Mono"/>
+              </a:rPr>
+              <a:t>"No rain gear needed."</a:t>
+            </a:r>
+            <a:r>
+              <a:rPr sz="2400" b="0">
+                <a:solidFill>
+                  <a:srgbClr val="080808"/>
+                </a:solidFill>
+                <a:latin typeface="Calibri"/>
+                <a:ea typeface="Calibri"/>
+                <a:cs typeface="Calibri"/>
+              </a:rPr>
+              <a:t> when [raining] is </a:t>
+            </a:r>
+            <a:r>
+              <a:rPr sz="2400" b="0">
+                <a:solidFill>
+                  <a:srgbClr val="067D17"/>
+                </a:solidFill>
+                <a:latin typeface="JetBrains Mono"/>
+                <a:ea typeface="JetBrains Mono"/>
+                <a:cs typeface="JetBrains Mono"/>
+              </a:rPr>
+              <a:t>"no"</a:t>
+            </a:r>
+            <a:r>
+              <a:rPr sz="2400" b="0">
+                <a:solidFill>
+                  <a:srgbClr val="080808"/>
+                </a:solidFill>
+                <a:latin typeface="Calibri"/>
+                <a:ea typeface="Calibri"/>
+                <a:cs typeface="Calibri"/>
+              </a:rPr>
+              <a:t>. Test </a:t>
+            </a:r>
+            <a:r>
+              <a:rPr sz="2400" b="0">
+                <a:solidFill>
+                  <a:srgbClr val="067D17"/>
+                </a:solidFill>
+                <a:latin typeface="JetBrains Mono"/>
+                <a:ea typeface="JetBrains Mono"/>
+                <a:cs typeface="JetBrains Mono"/>
+              </a:rPr>
+              <a:t>"yes"</a:t>
+            </a:r>
+            <a:r>
+              <a:rPr sz="2400" b="0">
+                <a:solidFill>
+                  <a:srgbClr val="080808"/>
+                </a:solidFill>
+                <a:latin typeface="Calibri"/>
+                <a:ea typeface="Calibri"/>
+                <a:cs typeface="Calibri"/>
+              </a:rPr>
+              <a:t> and </a:t>
+            </a:r>
+            <a:r>
+              <a:rPr sz="2400" b="0">
+                <a:solidFill>
+                  <a:srgbClr val="067D17"/>
+                </a:solidFill>
+                <a:latin typeface="JetBrains Mono"/>
+                <a:ea typeface="JetBrains Mono"/>
+                <a:cs typeface="JetBrains Mono"/>
+              </a:rPr>
+              <a:t>"strong"</a:t>
+            </a:r>
+            <a:r>
+              <a:rPr sz="2400" b="0">
+                <a:solidFill>
+                  <a:srgbClr val="080808"/>
+                </a:solidFill>
+                <a:latin typeface="Calibri"/>
+                <a:ea typeface="Calibri"/>
+                <a:cs typeface="Calibri"/>
+              </a:rPr>
+              <a:t>; display </a:t>
+            </a:r>
+            <a:r>
+              <a:rPr sz="2400" b="0">
+                <a:solidFill>
+                  <a:srgbClr val="067D17"/>
+                </a:solidFill>
+                <a:latin typeface="JetBrains Mono"/>
+                <a:ea typeface="JetBrains Mono"/>
+                <a:cs typeface="JetBrains Mono"/>
+              </a:rPr>
+              <a:t>"Wear a coat."</a:t>
+            </a:r>
+            <a:r>
+              <a:rPr sz="2400" b="0">
+                <a:solidFill>
+                  <a:srgbClr val="080808"/>
+                </a:solidFill>
+                <a:latin typeface="Calibri"/>
+                <a:ea typeface="Calibri"/>
+                <a:cs typeface="Calibri"/>
+              </a:rPr>
+              <a:t> Test </a:t>
+            </a:r>
+            <a:r>
+              <a:rPr sz="2400" b="0">
+                <a:solidFill>
+                  <a:srgbClr val="067D17"/>
+                </a:solidFill>
+                <a:latin typeface="JetBrains Mono"/>
+                <a:ea typeface="JetBrains Mono"/>
+                <a:cs typeface="JetBrains Mono"/>
+              </a:rPr>
+              <a:t>"no"</a:t>
+            </a:r>
+            <a:r>
+              <a:rPr sz="2400" b="0">
+                <a:solidFill>
+                  <a:srgbClr val="080808"/>
+                </a:solidFill>
+                <a:latin typeface="Calibri"/>
+                <a:ea typeface="Calibri"/>
+                <a:cs typeface="Calibri"/>
+              </a:rPr>
+              <a:t>; display </a:t>
+            </a:r>
+            <a:r>
+              <a:rPr sz="2400" b="0">
+                <a:solidFill>
+                  <a:srgbClr val="067D17"/>
+                </a:solidFill>
+                <a:latin typeface="JetBrains Mono"/>
+                <a:ea typeface="JetBrains Mono"/>
+                <a:cs typeface="JetBrains Mono"/>
+              </a:rPr>
+              <a:t>"No rain gear needed."</a:t>
             </a:r>
           </a:p>
         </p:txBody>
@@ -9220,7 +9429,7 @@
         </p:spPr>
         <p:txBody>
           <a:bodyPr xmlns:a="http://schemas.openxmlformats.org/drawingml/2006/main">
-            <a:normAutofit fontScale="100000"/>
+            <a:normAutofit fontScale="87835"/>
           </a:bodyPr>
           <a:lstStyle xmlns:a="http://schemas.openxmlformats.org/drawingml/2006/main"/>
           <a:p xmlns:a="http://schemas.openxmlformats.org/drawingml/2006/main">
@@ -9239,7 +9448,7 @@
                 <a:ea typeface="Calibri"/>
                 <a:cs typeface="Calibri"/>
               </a:rPr>
-              <a:t>Extend the dry-weather route. If raining is no, ask whether it is sunny; display </a:t>
+              <a:t>Change the decision for when [raining] is </a:t>
             </a:r>
             <a:r>
               <a:rPr sz="2400" b="0">
@@ -9250,7 +9459,7 @@
                 <a:ea typeface="JetBrains Mono"/>
                 <a:cs typeface="JetBrains Mono"/>
               </a:rPr>
-              <a:t>"Take sunglasses."</a:t>
+              <a:t>"no"</a:t>
             </a:r>
             <a:r>
               <a:rPr sz="2400" b="0">
@@ -9261,7 +9470,7 @@
                 <a:ea typeface="Calibri"/>
                 <a:cs typeface="Calibri"/>
               </a:rPr>
-              <a:t> for yes and </a:t>
+              <a:t>. Ask whether it is sunny and store the answer in [sunny]. Display </a:t>
             </a:r>
             <a:r>
               <a:rPr sz="2400" b="0">
@@ -9272,7 +9481,7 @@
                 <a:ea typeface="JetBrains Mono"/>
                 <a:cs typeface="JetBrains Mono"/>
               </a:rPr>
-              <a:t>"No weather gear needed."</a:t>
+              <a:t>"Take sunglasses."</a:t>
             </a:r>
             <a:r>
               <a:rPr sz="2400" b="0">
@@ -9283,7 +9492,172 @@
                 <a:ea typeface="Calibri"/>
                 <a:cs typeface="Calibri"/>
               </a:rPr>
-              <a:t> for no.</a:t>
+              <a:t> when [sunny] is </a:t>
+            </a:r>
+            <a:r>
+              <a:rPr sz="2400" b="0">
+                <a:solidFill>
+                  <a:srgbClr val="067D17"/>
+                </a:solidFill>
+                <a:latin typeface="JetBrains Mono"/>
+                <a:ea typeface="JetBrains Mono"/>
+                <a:cs typeface="JetBrains Mono"/>
+              </a:rPr>
+              <a:t>"yes"</a:t>
+            </a:r>
+            <a:r>
+              <a:rPr sz="2400" b="0">
+                <a:solidFill>
+                  <a:srgbClr val="080808"/>
+                </a:solidFill>
+                <a:latin typeface="Calibri"/>
+                <a:ea typeface="Calibri"/>
+                <a:cs typeface="Calibri"/>
+              </a:rPr>
+              <a:t>; otherwise display </a:t>
+            </a:r>
+            <a:r>
+              <a:rPr sz="2400" b="0">
+                <a:solidFill>
+                  <a:srgbClr val="067D17"/>
+                </a:solidFill>
+                <a:latin typeface="JetBrains Mono"/>
+                <a:ea typeface="JetBrains Mono"/>
+                <a:cs typeface="JetBrains Mono"/>
+              </a:rPr>
+              <a:t>"No weather gear needed."</a:t>
+            </a:r>
+            <a:r>
+              <a:rPr sz="2400" b="0">
+                <a:solidFill>
+                  <a:srgbClr val="080808"/>
+                </a:solidFill>
+                <a:latin typeface="Calibri"/>
+                <a:ea typeface="Calibri"/>
+                <a:cs typeface="Calibri"/>
+              </a:rPr>
+              <a:t> Keep the two rain outputs unchanged. Test </a:t>
+            </a:r>
+            <a:r>
+              <a:rPr sz="2400" b="0">
+                <a:solidFill>
+                  <a:srgbClr val="067D17"/>
+                </a:solidFill>
+                <a:latin typeface="JetBrains Mono"/>
+                <a:ea typeface="JetBrains Mono"/>
+                <a:cs typeface="JetBrains Mono"/>
+              </a:rPr>
+              <a:t>"no"</a:t>
+            </a:r>
+            <a:r>
+              <a:rPr sz="2400" b="0">
+                <a:solidFill>
+                  <a:srgbClr val="080808"/>
+                </a:solidFill>
+                <a:latin typeface="Calibri"/>
+                <a:ea typeface="Calibri"/>
+                <a:cs typeface="Calibri"/>
+              </a:rPr>
+              <a:t> and </a:t>
+            </a:r>
+            <a:r>
+              <a:rPr sz="2400" b="0">
+                <a:solidFill>
+                  <a:srgbClr val="067D17"/>
+                </a:solidFill>
+                <a:latin typeface="JetBrains Mono"/>
+                <a:ea typeface="JetBrains Mono"/>
+                <a:cs typeface="JetBrains Mono"/>
+              </a:rPr>
+              <a:t>"yes"</a:t>
+            </a:r>
+            <a:r>
+              <a:rPr sz="2400" b="0">
+                <a:solidFill>
+                  <a:srgbClr val="080808"/>
+                </a:solidFill>
+                <a:latin typeface="Calibri"/>
+                <a:ea typeface="Calibri"/>
+                <a:cs typeface="Calibri"/>
+              </a:rPr>
+              <a:t>; display </a:t>
+            </a:r>
+            <a:r>
+              <a:rPr sz="2400" b="0">
+                <a:solidFill>
+                  <a:srgbClr val="067D17"/>
+                </a:solidFill>
+                <a:latin typeface="JetBrains Mono"/>
+                <a:ea typeface="JetBrains Mono"/>
+                <a:cs typeface="JetBrains Mono"/>
+              </a:rPr>
+              <a:t>"Take sunglasses."</a:t>
+            </a:r>
+            <a:r>
+              <a:rPr sz="2400" b="0">
+                <a:solidFill>
+                  <a:srgbClr val="080808"/>
+                </a:solidFill>
+                <a:latin typeface="Calibri"/>
+                <a:ea typeface="Calibri"/>
+                <a:cs typeface="Calibri"/>
+              </a:rPr>
+              <a:t> Test </a:t>
+            </a:r>
+            <a:r>
+              <a:rPr sz="2400" b="0">
+                <a:solidFill>
+                  <a:srgbClr val="067D17"/>
+                </a:solidFill>
+                <a:latin typeface="JetBrains Mono"/>
+                <a:ea typeface="JetBrains Mono"/>
+                <a:cs typeface="JetBrains Mono"/>
+              </a:rPr>
+              <a:t>"no"</a:t>
+            </a:r>
+            <a:r>
+              <a:rPr sz="2400" b="0">
+                <a:solidFill>
+                  <a:srgbClr val="080808"/>
+                </a:solidFill>
+                <a:latin typeface="Calibri"/>
+                <a:ea typeface="Calibri"/>
+                <a:cs typeface="Calibri"/>
+              </a:rPr>
+              <a:t> and </a:t>
+            </a:r>
+            <a:r>
+              <a:rPr sz="2400" b="0">
+                <a:solidFill>
+                  <a:srgbClr val="067D17"/>
+                </a:solidFill>
+                <a:latin typeface="JetBrains Mono"/>
+                <a:ea typeface="JetBrains Mono"/>
+                <a:cs typeface="JetBrains Mono"/>
+              </a:rPr>
+              <a:t>"no"</a:t>
+            </a:r>
+            <a:r>
+              <a:rPr sz="2400" b="0">
+                <a:solidFill>
+                  <a:srgbClr val="080808"/>
+                </a:solidFill>
+                <a:latin typeface="Calibri"/>
+                <a:ea typeface="Calibri"/>
+                <a:cs typeface="Calibri"/>
+              </a:rPr>
+              <a:t>; display </a:t>
+            </a:r>
+            <a:r>
+              <a:rPr sz="2400" b="0">
+                <a:solidFill>
+                  <a:srgbClr val="067D17"/>
+                </a:solidFill>
+                <a:latin typeface="JetBrains Mono"/>
+                <a:ea typeface="JetBrains Mono"/>
+                <a:cs typeface="JetBrains Mono"/>
+              </a:rPr>
+              <a:t>"No weather gear needed."</a:t>
             </a:r>
           </a:p>
         </p:txBody>
@@ -10192,7 +10566,7 @@
         </p:spPr>
         <p:txBody>
           <a:bodyPr xmlns:a="http://schemas.openxmlformats.org/drawingml/2006/main">
-            <a:normAutofit fontScale="100000"/>
+            <a:normAutofit fontScale="76855"/>
           </a:bodyPr>
           <a:lstStyle xmlns:a="http://schemas.openxmlformats.org/drawingml/2006/main"/>
           <a:p xmlns:a="http://schemas.openxmlformats.org/drawingml/2006/main">
@@ -10211,7 +10585,271 @@
                 <a:ea typeface="Calibri"/>
                 <a:cs typeface="Calibri"/>
               </a:rPr>
-              <a:t>Build a library-access checker. Ask whether the visitor has a card. Only card holders are asked whether a book is overdue. Display one clear message for all three possible routes.</a:t>
+              <a:t>Ask whether the visitor has a library card and store the answer in [has_card]. Use a nested </a:t>
+            </a:r>
+            <a:r>
+              <a:rPr sz="2400" b="0">
+                <a:solidFill>
+                  <a:srgbClr val="1750EB"/>
+                </a:solidFill>
+                <a:latin typeface="JetBrains Mono"/>
+                <a:ea typeface="JetBrains Mono"/>
+                <a:cs typeface="JetBrains Mono"/>
+              </a:rPr>
+              <a:t>if</a:t>
+            </a:r>
+            <a:r>
+              <a:rPr sz="2400" b="0">
+                <a:solidFill>
+                  <a:srgbClr val="080808"/>
+                </a:solidFill>
+                <a:latin typeface="Calibri"/>
+                <a:ea typeface="Calibri"/>
+                <a:cs typeface="Calibri"/>
+              </a:rPr>
+              <a:t> statement. When [has_card] is </a:t>
+            </a:r>
+            <a:r>
+              <a:rPr sz="2400" b="0">
+                <a:solidFill>
+                  <a:srgbClr val="067D17"/>
+                </a:solidFill>
+                <a:latin typeface="JetBrains Mono"/>
+                <a:ea typeface="JetBrains Mono"/>
+                <a:cs typeface="JetBrains Mono"/>
+              </a:rPr>
+              <a:t>"yes"</a:t>
+            </a:r>
+            <a:r>
+              <a:rPr sz="2400" b="0">
+                <a:solidFill>
+                  <a:srgbClr val="080808"/>
+                </a:solidFill>
+                <a:latin typeface="Calibri"/>
+                <a:ea typeface="Calibri"/>
+                <a:cs typeface="Calibri"/>
+              </a:rPr>
+              <a:t>, ask whether a book is overdue and store the answer in [overdue]. Display </a:t>
+            </a:r>
+            <a:r>
+              <a:rPr sz="2400" b="0">
+                <a:solidFill>
+                  <a:srgbClr val="067D17"/>
+                </a:solidFill>
+                <a:latin typeface="JetBrains Mono"/>
+                <a:ea typeface="JetBrains Mono"/>
+                <a:cs typeface="JetBrains Mono"/>
+              </a:rPr>
+              <a:t>"Return the overdue book first."</a:t>
+            </a:r>
+            <a:r>
+              <a:rPr sz="2400" b="0">
+                <a:solidFill>
+                  <a:srgbClr val="080808"/>
+                </a:solidFill>
+                <a:latin typeface="Calibri"/>
+                <a:ea typeface="Calibri"/>
+                <a:cs typeface="Calibri"/>
+              </a:rPr>
+              <a:t> when [overdue] is </a:t>
+            </a:r>
+            <a:r>
+              <a:rPr sz="2400" b="0">
+                <a:solidFill>
+                  <a:srgbClr val="067D17"/>
+                </a:solidFill>
+                <a:latin typeface="JetBrains Mono"/>
+                <a:ea typeface="JetBrains Mono"/>
+                <a:cs typeface="JetBrains Mono"/>
+              </a:rPr>
+              <a:t>"yes"</a:t>
+            </a:r>
+            <a:r>
+              <a:rPr sz="2400" b="0">
+                <a:solidFill>
+                  <a:srgbClr val="080808"/>
+                </a:solidFill>
+                <a:latin typeface="Calibri"/>
+                <a:ea typeface="Calibri"/>
+                <a:cs typeface="Calibri"/>
+              </a:rPr>
+              <a:t>; otherwise display </a:t>
+            </a:r>
+            <a:r>
+              <a:rPr sz="2400" b="0">
+                <a:solidFill>
+                  <a:srgbClr val="067D17"/>
+                </a:solidFill>
+                <a:latin typeface="JetBrains Mono"/>
+                <a:ea typeface="JetBrains Mono"/>
+                <a:cs typeface="JetBrains Mono"/>
+              </a:rPr>
+              <a:t>"You may borrow a book."</a:t>
+            </a:r>
+            <a:r>
+              <a:rPr sz="2400" b="0">
+                <a:solidFill>
+                  <a:srgbClr val="080808"/>
+                </a:solidFill>
+                <a:latin typeface="Calibri"/>
+                <a:ea typeface="Calibri"/>
+                <a:cs typeface="Calibri"/>
+              </a:rPr>
+              <a:t> When [has_card] is </a:t>
+            </a:r>
+            <a:r>
+              <a:rPr sz="2400" b="0">
+                <a:solidFill>
+                  <a:srgbClr val="067D17"/>
+                </a:solidFill>
+                <a:latin typeface="JetBrains Mono"/>
+                <a:ea typeface="JetBrains Mono"/>
+                <a:cs typeface="JetBrains Mono"/>
+              </a:rPr>
+              <a:t>"no"</a:t>
+            </a:r>
+            <a:r>
+              <a:rPr sz="2400" b="0">
+                <a:solidFill>
+                  <a:srgbClr val="080808"/>
+                </a:solidFill>
+                <a:latin typeface="Calibri"/>
+                <a:ea typeface="Calibri"/>
+                <a:cs typeface="Calibri"/>
+              </a:rPr>
+              <a:t>, display </a:t>
+            </a:r>
+            <a:r>
+              <a:rPr sz="2400" b="0">
+                <a:solidFill>
+                  <a:srgbClr val="067D17"/>
+                </a:solidFill>
+                <a:latin typeface="JetBrains Mono"/>
+                <a:ea typeface="JetBrains Mono"/>
+                <a:cs typeface="JetBrains Mono"/>
+              </a:rPr>
+              <a:t>"Apply for a library card."</a:t>
+            </a:r>
+            <a:r>
+              <a:rPr sz="2400" b="0">
+                <a:solidFill>
+                  <a:srgbClr val="080808"/>
+                </a:solidFill>
+                <a:latin typeface="Calibri"/>
+                <a:ea typeface="Calibri"/>
+                <a:cs typeface="Calibri"/>
+              </a:rPr>
+              <a:t> Test </a:t>
+            </a:r>
+            <a:r>
+              <a:rPr sz="2400" b="0">
+                <a:solidFill>
+                  <a:srgbClr val="067D17"/>
+                </a:solidFill>
+                <a:latin typeface="JetBrains Mono"/>
+                <a:ea typeface="JetBrains Mono"/>
+                <a:cs typeface="JetBrains Mono"/>
+              </a:rPr>
+              <a:t>"yes"</a:t>
+            </a:r>
+            <a:r>
+              <a:rPr sz="2400" b="0">
+                <a:solidFill>
+                  <a:srgbClr val="080808"/>
+                </a:solidFill>
+                <a:latin typeface="Calibri"/>
+                <a:ea typeface="Calibri"/>
+                <a:cs typeface="Calibri"/>
+              </a:rPr>
+              <a:t> and </a:t>
+            </a:r>
+            <a:r>
+              <a:rPr sz="2400" b="0">
+                <a:solidFill>
+                  <a:srgbClr val="067D17"/>
+                </a:solidFill>
+                <a:latin typeface="JetBrains Mono"/>
+                <a:ea typeface="JetBrains Mono"/>
+                <a:cs typeface="JetBrains Mono"/>
+              </a:rPr>
+              <a:t>"yes"</a:t>
+            </a:r>
+            <a:r>
+              <a:rPr sz="2400" b="0">
+                <a:solidFill>
+                  <a:srgbClr val="080808"/>
+                </a:solidFill>
+                <a:latin typeface="Calibri"/>
+                <a:ea typeface="Calibri"/>
+                <a:cs typeface="Calibri"/>
+              </a:rPr>
+              <a:t>, </a:t>
+            </a:r>
+            <a:r>
+              <a:rPr sz="2400" b="0">
+                <a:solidFill>
+                  <a:srgbClr val="067D17"/>
+                </a:solidFill>
+                <a:latin typeface="JetBrains Mono"/>
+                <a:ea typeface="JetBrains Mono"/>
+                <a:cs typeface="JetBrains Mono"/>
+              </a:rPr>
+              <a:t>"yes"</a:t>
+            </a:r>
+            <a:r>
+              <a:rPr sz="2400" b="0">
+                <a:solidFill>
+                  <a:srgbClr val="080808"/>
+                </a:solidFill>
+                <a:latin typeface="Calibri"/>
+                <a:ea typeface="Calibri"/>
+                <a:cs typeface="Calibri"/>
+              </a:rPr>
+              <a:t> and </a:t>
+            </a:r>
+            <a:r>
+              <a:rPr sz="2400" b="0">
+                <a:solidFill>
+                  <a:srgbClr val="067D17"/>
+                </a:solidFill>
+                <a:latin typeface="JetBrains Mono"/>
+                <a:ea typeface="JetBrains Mono"/>
+                <a:cs typeface="JetBrains Mono"/>
+              </a:rPr>
+              <a:t>"no"</a:t>
+            </a:r>
+            <a:r>
+              <a:rPr sz="2400" b="0">
+                <a:solidFill>
+                  <a:srgbClr val="080808"/>
+                </a:solidFill>
+                <a:latin typeface="Calibri"/>
+                <a:ea typeface="Calibri"/>
+                <a:cs typeface="Calibri"/>
+              </a:rPr>
+              <a:t>, then </a:t>
+            </a:r>
+            <a:r>
+              <a:rPr sz="2400" b="0">
+                <a:solidFill>
+                  <a:srgbClr val="067D17"/>
+                </a:solidFill>
+                <a:latin typeface="JetBrains Mono"/>
+                <a:ea typeface="JetBrains Mono"/>
+                <a:cs typeface="JetBrains Mono"/>
+              </a:rPr>
+              <a:t>"no"</a:t>
+            </a:r>
+            <a:r>
+              <a:rPr sz="2400" b="0">
+                <a:solidFill>
+                  <a:srgbClr val="080808"/>
+                </a:solidFill>
+                <a:latin typeface="Calibri"/>
+                <a:ea typeface="Calibri"/>
+                <a:cs typeface="Calibri"/>
+              </a:rPr>
+              <a:t>; verify all three outputs.</a:t>
             </a:r>
           </a:p>
         </p:txBody>

--- a/Mapped Curriculum Lessons/Grade 6/Lesson 07 - Nested Decisions/Nested Decisions - Slides.pptx
+++ b/Mapped Curriculum Lessons/Grade 6/Lesson 07 - Nested Decisions/Nested Decisions - Slides.pptx
@@ -2,28 +2,28 @@
 <file path=ppt/presentation.xml><?xml version="1.0" encoding="utf-8"?>
 <p:presentation xmlns:p="http://schemas.openxmlformats.org/presentationml/2006/main" embedTrueTypeFonts="1" saveSubsetFonts="0">
   <p:sldMasterIdLst>
-    <p:sldMasterId xmlns:r="http://schemas.openxmlformats.org/officeDocument/2006/relationships" id="2147483648" r:id="R50183dd5db7b4103"/>
+    <p:sldMasterId xmlns:r="http://schemas.openxmlformats.org/officeDocument/2006/relationships" id="2147483648" r:id="R2c8d19d8ca2043d3"/>
   </p:sldMasterIdLst>
   <p:notesMasterIdLst>
-    <p:notesMasterId xmlns:r="http://schemas.openxmlformats.org/officeDocument/2006/relationships" r:id="Red33db1fabcb4aa8"/>
+    <p:notesMasterId xmlns:r="http://schemas.openxmlformats.org/officeDocument/2006/relationships" r:id="R8619ebb23d4f4777"/>
   </p:notesMasterIdLst>
   <p:sldIdLst>
-    <p:sldId xmlns:r="http://schemas.openxmlformats.org/officeDocument/2006/relationships" id="256" r:id="R41f188e4a54644d7"/>
-    <p:sldId xmlns:r="http://schemas.openxmlformats.org/officeDocument/2006/relationships" id="257" r:id="Rabd0bb9af5f241b5"/>
-    <p:sldId xmlns:r="http://schemas.openxmlformats.org/officeDocument/2006/relationships" id="258" r:id="R3562e1d7b9dc4a47"/>
-    <p:sldId xmlns:r="http://schemas.openxmlformats.org/officeDocument/2006/relationships" id="259" r:id="R6ec8ad5c74224dfe"/>
-    <p:sldId xmlns:r="http://schemas.openxmlformats.org/officeDocument/2006/relationships" id="260" r:id="R372ff9b24b8545ea"/>
-    <p:sldId xmlns:r="http://schemas.openxmlformats.org/officeDocument/2006/relationships" id="261" r:id="Rd084f0c32bf5435e"/>
-    <p:sldId xmlns:r="http://schemas.openxmlformats.org/officeDocument/2006/relationships" id="262" r:id="R9efe2f9eb64f400d"/>
-    <p:sldId xmlns:r="http://schemas.openxmlformats.org/officeDocument/2006/relationships" id="263" r:id="R60b10becc8594407"/>
-    <p:sldId xmlns:r="http://schemas.openxmlformats.org/officeDocument/2006/relationships" id="264" r:id="Re6a0066fef0d4705"/>
+    <p:sldId xmlns:r="http://schemas.openxmlformats.org/officeDocument/2006/relationships" id="256" r:id="R496f27693c47430d"/>
+    <p:sldId xmlns:r="http://schemas.openxmlformats.org/officeDocument/2006/relationships" id="257" r:id="R658c8d7262284624"/>
+    <p:sldId xmlns:r="http://schemas.openxmlformats.org/officeDocument/2006/relationships" id="258" r:id="R8f4d4d2451bf4810"/>
+    <p:sldId xmlns:r="http://schemas.openxmlformats.org/officeDocument/2006/relationships" id="259" r:id="R75babe3c7525499d"/>
+    <p:sldId xmlns:r="http://schemas.openxmlformats.org/officeDocument/2006/relationships" id="260" r:id="Ra305e9fd48df4028"/>
+    <p:sldId xmlns:r="http://schemas.openxmlformats.org/officeDocument/2006/relationships" id="261" r:id="R1cfe1190011e4260"/>
+    <p:sldId xmlns:r="http://schemas.openxmlformats.org/officeDocument/2006/relationships" id="262" r:id="R1a93871d960a4b5e"/>
+    <p:sldId xmlns:r="http://schemas.openxmlformats.org/officeDocument/2006/relationships" id="263" r:id="Rc67cbb12675c4c11"/>
+    <p:sldId xmlns:r="http://schemas.openxmlformats.org/officeDocument/2006/relationships" id="264" r:id="Rccf1db8607684cb3"/>
   </p:sldIdLst>
   <p:sldSz cx="12192000" cy="6858000"/>
   <p:notesSz cx="6858000" cy="9144000"/>
   <p:embeddedFontLst>
     <p:embeddedFont>
       <p:font typeface="JetBrains Mono"/>
-      <p:regular xmlns:r="http://schemas.openxmlformats.org/officeDocument/2006/relationships" r:id="R721753f6ca7a4e87"/>
+      <p:regular xmlns:r="http://schemas.openxmlformats.org/officeDocument/2006/relationships" r:id="R2878fb77ad444652"/>
     </p:embeddedFont>
   </p:embeddedFontLst>
 </p:presentation>
@@ -1071,7 +1071,7 @@
           <p:nvPr/>
         </p:nvPicPr>
         <p:blipFill rotWithShape="1">
-          <a:blip xmlns:r="http://schemas.openxmlformats.org/officeDocument/2006/relationships" xmlns:a="http://schemas.openxmlformats.org/drawingml/2006/main" r:embed="R15f55433aa1c4802"/>
+          <a:blip xmlns:r="http://schemas.openxmlformats.org/officeDocument/2006/relationships" xmlns:a="http://schemas.openxmlformats.org/drawingml/2006/main" r:embed="Rd16b74fdb83e40ea"/>
           <a:stretch xmlns:a="http://schemas.openxmlformats.org/drawingml/2006/main"/>
         </p:blipFill>
         <p:spPr>
@@ -1451,7 +1451,7 @@
           <p:nvPr/>
         </p:nvPicPr>
         <p:blipFill rotWithShape="1">
-          <a:blip xmlns:r="http://schemas.openxmlformats.org/officeDocument/2006/relationships" xmlns:a="http://schemas.openxmlformats.org/drawingml/2006/main" r:embed="Rdbd9670c67ce46eb">
+          <a:blip xmlns:r="http://schemas.openxmlformats.org/officeDocument/2006/relationships" xmlns:a="http://schemas.openxmlformats.org/drawingml/2006/main" r:embed="R6a7357aa9b1e4b04">
             <a:alphaModFix amt="28000"/>
           </a:blip>
           <a:stretch xmlns:a="http://schemas.openxmlformats.org/drawingml/2006/main"/>
@@ -1664,7 +1664,7 @@
           <p:nvPr/>
         </p:nvPicPr>
         <p:blipFill rotWithShape="1">
-          <a:blip xmlns:r="http://schemas.openxmlformats.org/officeDocument/2006/relationships" xmlns:a="http://schemas.openxmlformats.org/drawingml/2006/main" r:embed="Rd6ef514f48434b3a">
+          <a:blip xmlns:r="http://schemas.openxmlformats.org/officeDocument/2006/relationships" xmlns:a="http://schemas.openxmlformats.org/drawingml/2006/main" r:embed="R9508227c45714fee">
             <a:alphaModFix amt="28000"/>
           </a:blip>
           <a:stretch xmlns:a="http://schemas.openxmlformats.org/drawingml/2006/main"/>
@@ -1899,7 +1899,7 @@
           <p:nvPr/>
         </p:nvPicPr>
         <p:blipFill rotWithShape="1">
-          <a:blip xmlns:r="http://schemas.openxmlformats.org/officeDocument/2006/relationships" xmlns:a="http://schemas.openxmlformats.org/drawingml/2006/main" r:embed="Radefd0311f4e48b8">
+          <a:blip xmlns:r="http://schemas.openxmlformats.org/officeDocument/2006/relationships" xmlns:a="http://schemas.openxmlformats.org/drawingml/2006/main" r:embed="R2647725dbe174b40">
             <a:alphaModFix amt="28000"/>
           </a:blip>
           <a:stretch xmlns:a="http://schemas.openxmlformats.org/drawingml/2006/main"/>
@@ -2176,7 +2176,7 @@
           <p:nvPr/>
         </p:nvPicPr>
         <p:blipFill rotWithShape="1">
-          <a:blip xmlns:r="http://schemas.openxmlformats.org/officeDocument/2006/relationships" xmlns:a="http://schemas.openxmlformats.org/drawingml/2006/main" r:embed="R0e046b69e0fc473b">
+          <a:blip xmlns:r="http://schemas.openxmlformats.org/officeDocument/2006/relationships" xmlns:a="http://schemas.openxmlformats.org/drawingml/2006/main" r:embed="R7ba30f10b43d4828">
             <a:alphaModFix amt="28000"/>
           </a:blip>
           <a:stretch xmlns:a="http://schemas.openxmlformats.org/drawingml/2006/main"/>
@@ -2451,7 +2451,7 @@
           <p:nvPr/>
         </p:nvPicPr>
         <p:blipFill rotWithShape="1">
-          <a:blip xmlns:r="http://schemas.openxmlformats.org/officeDocument/2006/relationships" xmlns:a="http://schemas.openxmlformats.org/drawingml/2006/main" r:embed="Re386b16393cf4f2d">
+          <a:blip xmlns:r="http://schemas.openxmlformats.org/officeDocument/2006/relationships" xmlns:a="http://schemas.openxmlformats.org/drawingml/2006/main" r:embed="R0c931f88c57f4f57">
             <a:alphaModFix amt="28000"/>
           </a:blip>
           <a:stretch xmlns:a="http://schemas.openxmlformats.org/drawingml/2006/main"/>
@@ -2875,7 +2875,7 @@
           <p:nvPr/>
         </p:nvPicPr>
         <p:blipFill rotWithShape="1">
-          <a:blip xmlns:r="http://schemas.openxmlformats.org/officeDocument/2006/relationships" xmlns:a="http://schemas.openxmlformats.org/drawingml/2006/main" r:embed="Rae5714e9ed924897">
+          <a:blip xmlns:r="http://schemas.openxmlformats.org/officeDocument/2006/relationships" xmlns:a="http://schemas.openxmlformats.org/drawingml/2006/main" r:embed="R3e1756e8d6bd4d35">
             <a:alphaModFix amt="28000"/>
           </a:blip>
           <a:stretch xmlns:a="http://schemas.openxmlformats.org/drawingml/2006/main"/>
@@ -3016,7 +3016,7 @@
           <p:nvPr/>
         </p:nvPicPr>
         <p:blipFill rotWithShape="1">
-          <a:blip xmlns:r="http://schemas.openxmlformats.org/officeDocument/2006/relationships" xmlns:a="http://schemas.openxmlformats.org/drawingml/2006/main" r:embed="Ra9e6062241b84453">
+          <a:blip xmlns:r="http://schemas.openxmlformats.org/officeDocument/2006/relationships" xmlns:a="http://schemas.openxmlformats.org/drawingml/2006/main" r:embed="R6eb12f767fc54dd1">
             <a:alphaModFix amt="28000"/>
           </a:blip>
           <a:stretch xmlns:a="http://schemas.openxmlformats.org/drawingml/2006/main"/>
@@ -3130,7 +3130,7 @@
           <p:nvPr/>
         </p:nvPicPr>
         <p:blipFill rotWithShape="1">
-          <a:blip xmlns:r="http://schemas.openxmlformats.org/officeDocument/2006/relationships" xmlns:a="http://schemas.openxmlformats.org/drawingml/2006/main" r:embed="Ra01b7054ad874638">
+          <a:blip xmlns:r="http://schemas.openxmlformats.org/officeDocument/2006/relationships" xmlns:a="http://schemas.openxmlformats.org/drawingml/2006/main" r:embed="Rb3285441a01a4a4a">
             <a:alphaModFix amt="28000"/>
           </a:blip>
           <a:stretch xmlns:a="http://schemas.openxmlformats.org/drawingml/2006/main"/>
@@ -3457,7 +3457,7 @@
           <p:nvPr/>
         </p:nvPicPr>
         <p:blipFill rotWithShape="1">
-          <a:blip xmlns:r="http://schemas.openxmlformats.org/officeDocument/2006/relationships" xmlns:a="http://schemas.openxmlformats.org/drawingml/2006/main" r:embed="R7310de7457864610">
+          <a:blip xmlns:r="http://schemas.openxmlformats.org/officeDocument/2006/relationships" xmlns:a="http://schemas.openxmlformats.org/drawingml/2006/main" r:embed="R0af280c7e5b943f4">
             <a:alphaModFix amt="28000"/>
           </a:blip>
           <a:stretch xmlns:a="http://schemas.openxmlformats.org/drawingml/2006/main"/>
@@ -3745,7 +3745,7 @@
           <p:nvPr/>
         </p:nvPicPr>
         <p:blipFill rotWithShape="1">
-          <a:blip xmlns:r="http://schemas.openxmlformats.org/officeDocument/2006/relationships" xmlns:a="http://schemas.openxmlformats.org/drawingml/2006/main" r:embed="Rc09f59acb9fd4f49">
+          <a:blip xmlns:r="http://schemas.openxmlformats.org/officeDocument/2006/relationships" xmlns:a="http://schemas.openxmlformats.org/drawingml/2006/main" r:embed="R5b356e1b4e7c4c13">
             <a:alphaModFix amt="28000"/>
           </a:blip>
           <a:stretch xmlns:a="http://schemas.openxmlformats.org/drawingml/2006/main"/>
@@ -3982,17 +3982,17 @@
   </p:cSld>
   <p:clrMap bg1="lt1" tx1="dk1" bg2="lt2" tx2="dk2" accent1="accent1" accent2="accent2" accent3="accent3" accent4="accent4" accent5="accent5" accent6="accent6" hlink="hlink" folHlink="folHlink"/>
   <p:sldLayoutIdLst>
-    <p:sldLayoutId xmlns:r="http://schemas.openxmlformats.org/officeDocument/2006/relationships" id="2147483649" r:id="R723e8c3e6e5c489a"/>
-    <p:sldLayoutId xmlns:r="http://schemas.openxmlformats.org/officeDocument/2006/relationships" id="2147483650" r:id="Rb6c89d93138540c9"/>
-    <p:sldLayoutId xmlns:r="http://schemas.openxmlformats.org/officeDocument/2006/relationships" id="2147483651" r:id="Ra63a41624e2d474e"/>
-    <p:sldLayoutId xmlns:r="http://schemas.openxmlformats.org/officeDocument/2006/relationships" id="2147483652" r:id="R482d33d58d8440ae"/>
-    <p:sldLayoutId xmlns:r="http://schemas.openxmlformats.org/officeDocument/2006/relationships" id="2147483653" r:id="R7566f02b5d7e4339"/>
-    <p:sldLayoutId xmlns:r="http://schemas.openxmlformats.org/officeDocument/2006/relationships" id="2147483654" r:id="Racb6b2ff0bdb4b07"/>
-    <p:sldLayoutId xmlns:r="http://schemas.openxmlformats.org/officeDocument/2006/relationships" id="2147483655" r:id="R0ba3468ebabe4f65"/>
-    <p:sldLayoutId xmlns:r="http://schemas.openxmlformats.org/officeDocument/2006/relationships" id="2147483656" r:id="R6b6e463be95f46ff"/>
-    <p:sldLayoutId xmlns:r="http://schemas.openxmlformats.org/officeDocument/2006/relationships" id="2147483657" r:id="R22925c2a9c3e4f30"/>
-    <p:sldLayoutId xmlns:r="http://schemas.openxmlformats.org/officeDocument/2006/relationships" id="2147483658" r:id="R456107c399694239"/>
-    <p:sldLayoutId xmlns:r="http://schemas.openxmlformats.org/officeDocument/2006/relationships" id="2147483659" r:id="R88560ef2db094971"/>
+    <p:sldLayoutId xmlns:r="http://schemas.openxmlformats.org/officeDocument/2006/relationships" id="2147483649" r:id="Raa2dc05079f24974"/>
+    <p:sldLayoutId xmlns:r="http://schemas.openxmlformats.org/officeDocument/2006/relationships" id="2147483650" r:id="R704296c22c7444a7"/>
+    <p:sldLayoutId xmlns:r="http://schemas.openxmlformats.org/officeDocument/2006/relationships" id="2147483651" r:id="R51ad389b96984c45"/>
+    <p:sldLayoutId xmlns:r="http://schemas.openxmlformats.org/officeDocument/2006/relationships" id="2147483652" r:id="R45a601dcaa334493"/>
+    <p:sldLayoutId xmlns:r="http://schemas.openxmlformats.org/officeDocument/2006/relationships" id="2147483653" r:id="R32be65ead8c449e4"/>
+    <p:sldLayoutId xmlns:r="http://schemas.openxmlformats.org/officeDocument/2006/relationships" id="2147483654" r:id="R0b2204f724134c7e"/>
+    <p:sldLayoutId xmlns:r="http://schemas.openxmlformats.org/officeDocument/2006/relationships" id="2147483655" r:id="R6793dab2319a4b5f"/>
+    <p:sldLayoutId xmlns:r="http://schemas.openxmlformats.org/officeDocument/2006/relationships" id="2147483656" r:id="R36537b8162df42f8"/>
+    <p:sldLayoutId xmlns:r="http://schemas.openxmlformats.org/officeDocument/2006/relationships" id="2147483657" r:id="Rb50dc9f1118949b5"/>
+    <p:sldLayoutId xmlns:r="http://schemas.openxmlformats.org/officeDocument/2006/relationships" id="2147483658" r:id="Rac73d445c19f43f2"/>
+    <p:sldLayoutId xmlns:r="http://schemas.openxmlformats.org/officeDocument/2006/relationships" id="2147483659" r:id="Rb73c01681da24c21"/>
   </p:sldLayoutIdLst>
   <p:hf hdr="0" ftr="0" dt="0"/>
   <p:txStyles>
@@ -8248,7 +8248,7 @@
         </p:spPr>
         <p:txBody>
           <a:bodyPr xmlns:a="http://schemas.openxmlformats.org/drawingml/2006/main">
-            <a:normAutofit fontScale="88242"/>
+            <a:normAutofit fontScale="100000"/>
           </a:bodyPr>
           <a:lstStyle xmlns:a="http://schemas.openxmlformats.org/drawingml/2006/main"/>
           <a:p xmlns:a="http://schemas.openxmlformats.org/drawingml/2006/main">
@@ -8267,10 +8267,10 @@
                 <a:ea typeface="Calibri"/>
                 <a:cs typeface="Calibri"/>
               </a:rPr>
-              <a:t>When [raining] is </a:t>
-            </a:r>
-            <a:r>
-              <a:rPr sz="2400" b="0">
+              <a:t>Change the inner question in the example to ask for </a:t>
+            </a:r>
+            <a:r>
+              <a:rPr sz="2050" b="0">
                 <a:solidFill>
                   <a:srgbClr val="067D17"/>
                 </a:solidFill>
@@ -8278,7 +8278,7 @@
                 <a:ea typeface="JetBrains Mono"/>
                 <a:cs typeface="JetBrains Mono"/>
               </a:rPr>
-              <a:t>"yes"</a:t>
+              <a:t>"strong"</a:t>
             </a:r>
             <a:r>
               <a:rPr sz="2400" b="0">
@@ -8289,10 +8289,10 @@
                 <a:ea typeface="Calibri"/>
                 <a:cs typeface="Calibri"/>
               </a:rPr>
-              <a:t>, ask whether the wind is strong or light and store the answer in [wind_strength]. Display </a:t>
-            </a:r>
-            <a:r>
-              <a:rPr sz="2400" b="0">
+              <a:t>, </a:t>
+            </a:r>
+            <a:r>
+              <a:rPr sz="2050" b="0">
                 <a:solidFill>
                   <a:srgbClr val="067D17"/>
                 </a:solidFill>
@@ -8300,7 +8300,7 @@
                 <a:ea typeface="JetBrains Mono"/>
                 <a:cs typeface="JetBrains Mono"/>
               </a:rPr>
-              <a:t>"Wear a coat."</a:t>
+              <a:t>"light"</a:t>
             </a:r>
             <a:r>
               <a:rPr sz="2400" b="0">
@@ -8311,10 +8311,10 @@
                 <a:ea typeface="Calibri"/>
                 <a:cs typeface="Calibri"/>
               </a:rPr>
-              <a:t> for </a:t>
-            </a:r>
-            <a:r>
-              <a:rPr sz="2400" b="0">
+              <a:t> or </a:t>
+            </a:r>
+            <a:r>
+              <a:rPr sz="2050" b="0">
                 <a:solidFill>
                   <a:srgbClr val="067D17"/>
                 </a:solidFill>
@@ -8322,7 +8322,7 @@
                 <a:ea typeface="JetBrains Mono"/>
                 <a:cs typeface="JetBrains Mono"/>
               </a:rPr>
-              <a:t>"strong"</a:t>
+              <a:t>"none"</a:t>
             </a:r>
             <a:r>
               <a:rPr sz="2400" b="0">
@@ -8333,18 +8333,21 @@
                 <a:ea typeface="Calibri"/>
                 <a:cs typeface="Calibri"/>
               </a:rPr>
-              <a:t> and </a:t>
-            </a:r>
-            <a:r>
-              <a:rPr sz="2400" b="0">
-                <a:solidFill>
-                  <a:srgbClr val="067D17"/>
-                </a:solidFill>
-                <a:latin typeface="JetBrains Mono"/>
-                <a:ea typeface="JetBrains Mono"/>
-                <a:cs typeface="JetBrains Mono"/>
-              </a:rPr>
-              <a:t>"Take an umbrella."</a:t>
+              <a:t> wind and store the answer in </a:t>
+            </a:r>
+            <a:r>
+              <a:rPr sz="2050" b="0">
+                <a:solidFill>
+                  <a:srgbClr val="6A1B9A"/>
+                </a:solidFill>
+                <a:highlight>
+                  <a:srgbClr val="ECEAF4"/>
+                </a:highlight>
+                <a:latin typeface="JetBrains Mono"/>
+                <a:ea typeface="JetBrains Mono"/>
+                <a:cs typeface="JetBrains Mono"/>
+              </a:rPr>
+              <a:t> wind </a:t>
             </a:r>
             <a:r>
               <a:rPr sz="2400" b="0">
@@ -8355,18 +8358,18 @@
                 <a:ea typeface="Calibri"/>
                 <a:cs typeface="Calibri"/>
               </a:rPr>
-              <a:t> for </a:t>
-            </a:r>
-            <a:r>
-              <a:rPr sz="2400" b="0">
-                <a:solidFill>
-                  <a:srgbClr val="067D17"/>
-                </a:solidFill>
-                <a:latin typeface="JetBrains Mono"/>
-                <a:ea typeface="JetBrains Mono"/>
-                <a:cs typeface="JetBrains Mono"/>
-              </a:rPr>
-              <a:t>"light"</a:t>
+              <a:t>. Use </a:t>
+            </a:r>
+            <a:r>
+              <a:rPr sz="2050" b="0">
+                <a:solidFill>
+                  <a:srgbClr val="1750EB"/>
+                </a:solidFill>
+                <a:latin typeface="JetBrains Mono"/>
+                <a:ea typeface="JetBrains Mono"/>
+                <a:cs typeface="JetBrains Mono"/>
+              </a:rPr>
+              <a:t>if</a:t>
             </a:r>
             <a:r>
               <a:rPr sz="2400" b="0">
@@ -8377,18 +8380,18 @@
                 <a:ea typeface="Calibri"/>
                 <a:cs typeface="Calibri"/>
               </a:rPr>
-              <a:t>. Keep </a:t>
-            </a:r>
-            <a:r>
-              <a:rPr sz="2400" b="0">
-                <a:solidFill>
-                  <a:srgbClr val="067D17"/>
-                </a:solidFill>
-                <a:latin typeface="JetBrains Mono"/>
-                <a:ea typeface="JetBrains Mono"/>
-                <a:cs typeface="JetBrains Mono"/>
-              </a:rPr>
-              <a:t>"No rain gear needed."</a:t>
+              <a:t>, </a:t>
+            </a:r>
+            <a:r>
+              <a:rPr sz="2050" b="0">
+                <a:solidFill>
+                  <a:srgbClr val="1750EB"/>
+                </a:solidFill>
+                <a:latin typeface="JetBrains Mono"/>
+                <a:ea typeface="JetBrains Mono"/>
+                <a:cs typeface="JetBrains Mono"/>
+              </a:rPr>
+              <a:t>elif</a:t>
             </a:r>
             <a:r>
               <a:rPr sz="2400" b="0">
@@ -8399,18 +8402,18 @@
                 <a:ea typeface="Calibri"/>
                 <a:cs typeface="Calibri"/>
               </a:rPr>
-              <a:t> when [raining] is </a:t>
-            </a:r>
-            <a:r>
-              <a:rPr sz="2400" b="0">
-                <a:solidFill>
-                  <a:srgbClr val="067D17"/>
-                </a:solidFill>
-                <a:latin typeface="JetBrains Mono"/>
-                <a:ea typeface="JetBrains Mono"/>
-                <a:cs typeface="JetBrains Mono"/>
-              </a:rPr>
-              <a:t>"no"</a:t>
+              <a:t> and </a:t>
+            </a:r>
+            <a:r>
+              <a:rPr sz="2050" b="0">
+                <a:solidFill>
+                  <a:srgbClr val="1750EB"/>
+                </a:solidFill>
+                <a:latin typeface="JetBrains Mono"/>
+                <a:ea typeface="JetBrains Mono"/>
+                <a:cs typeface="JetBrains Mono"/>
+              </a:rPr>
+              <a:t>else</a:t>
             </a:r>
             <a:r>
               <a:rPr sz="2400" b="0">
@@ -8421,10 +8424,10 @@
                 <a:ea typeface="Calibri"/>
                 <a:cs typeface="Calibri"/>
               </a:rPr>
-              <a:t>. Test </a:t>
-            </a:r>
-            <a:r>
-              <a:rPr sz="2400" b="0">
+              <a:t> inside the rain route to display </a:t>
+            </a:r>
+            <a:r>
+              <a:rPr sz="2050" b="0">
                 <a:solidFill>
                   <a:srgbClr val="067D17"/>
                 </a:solidFill>
@@ -8432,7 +8435,7 @@
                 <a:ea typeface="JetBrains Mono"/>
                 <a:cs typeface="JetBrains Mono"/>
               </a:rPr>
-              <a:t>"yes"</a:t>
+              <a:t>"Wear a coat."</a:t>
             </a:r>
             <a:r>
               <a:rPr sz="2400" b="0">
@@ -8443,10 +8446,10 @@
                 <a:ea typeface="Calibri"/>
                 <a:cs typeface="Calibri"/>
               </a:rPr>
-              <a:t> and </a:t>
-            </a:r>
-            <a:r>
-              <a:rPr sz="2400" b="0">
+              <a:t>, </a:t>
+            </a:r>
+            <a:r>
+              <a:rPr sz="2050" b="0">
                 <a:solidFill>
                   <a:srgbClr val="067D17"/>
                 </a:solidFill>
@@ -8454,7 +8457,7 @@
                 <a:ea typeface="JetBrains Mono"/>
                 <a:cs typeface="JetBrains Mono"/>
               </a:rPr>
-              <a:t>"strong"</a:t>
+              <a:t>"Take an umbrella."</a:t>
             </a:r>
             <a:r>
               <a:rPr sz="2400" b="0">
@@ -8465,10 +8468,10 @@
                 <a:ea typeface="Calibri"/>
                 <a:cs typeface="Calibri"/>
               </a:rPr>
-              <a:t>; display </a:t>
-            </a:r>
-            <a:r>
-              <a:rPr sz="2400" b="0">
+              <a:t> or </a:t>
+            </a:r>
+            <a:r>
+              <a:rPr sz="2050" b="0">
                 <a:solidFill>
                   <a:srgbClr val="067D17"/>
                 </a:solidFill>
@@ -8476,7 +8479,7 @@
                 <a:ea typeface="JetBrains Mono"/>
                 <a:cs typeface="JetBrains Mono"/>
               </a:rPr>
-              <a:t>"Wear a coat."</a:t>
+              <a:t>"A hood will do."</a:t>
             </a:r>
             <a:r>
               <a:rPr sz="2400" b="0">
@@ -8487,40 +8490,7 @@
                 <a:ea typeface="Calibri"/>
                 <a:cs typeface="Calibri"/>
               </a:rPr>
-              <a:t> Test </a:t>
-            </a:r>
-            <a:r>
-              <a:rPr sz="2400" b="0">
-                <a:solidFill>
-                  <a:srgbClr val="067D17"/>
-                </a:solidFill>
-                <a:latin typeface="JetBrains Mono"/>
-                <a:ea typeface="JetBrains Mono"/>
-                <a:cs typeface="JetBrains Mono"/>
-              </a:rPr>
-              <a:t>"no"</a:t>
-            </a:r>
-            <a:r>
-              <a:rPr sz="2400" b="0">
-                <a:solidFill>
-                  <a:srgbClr val="080808"/>
-                </a:solidFill>
-                <a:latin typeface="Calibri"/>
-                <a:ea typeface="Calibri"/>
-                <a:cs typeface="Calibri"/>
-              </a:rPr>
-              <a:t>; display </a:t>
-            </a:r>
-            <a:r>
-              <a:rPr sz="2400" b="0">
-                <a:solidFill>
-                  <a:srgbClr val="067D17"/>
-                </a:solidFill>
-                <a:latin typeface="JetBrains Mono"/>
-                <a:ea typeface="JetBrains Mono"/>
-                <a:cs typeface="JetBrains Mono"/>
-              </a:rPr>
-              <a:t>"No rain gear needed."</a:t>
+              <a:t> Test each answer.</a:t>
             </a:r>
           </a:p>
         </p:txBody>
@@ -9429,7 +9399,7 @@
         </p:spPr>
         <p:txBody>
           <a:bodyPr xmlns:a="http://schemas.openxmlformats.org/drawingml/2006/main">
-            <a:normAutofit fontScale="87835"/>
+            <a:normAutofit fontScale="100000"/>
           </a:bodyPr>
           <a:lstStyle xmlns:a="http://schemas.openxmlformats.org/drawingml/2006/main"/>
           <a:p xmlns:a="http://schemas.openxmlformats.org/drawingml/2006/main">
@@ -9448,18 +9418,18 @@
                 <a:ea typeface="Calibri"/>
                 <a:cs typeface="Calibri"/>
               </a:rPr>
-              <a:t>Change the decision for when [raining] is </a:t>
-            </a:r>
-            <a:r>
-              <a:rPr sz="2400" b="0">
-                <a:solidFill>
-                  <a:srgbClr val="067D17"/>
-                </a:solidFill>
-                <a:latin typeface="JetBrains Mono"/>
-                <a:ea typeface="JetBrains Mono"/>
-                <a:cs typeface="JetBrains Mono"/>
-              </a:rPr>
-              <a:t>"no"</a:t>
+              <a:t>Extend the example's no-rain route. Ask whether it is sunny and use a nested </a:t>
+            </a:r>
+            <a:r>
+              <a:rPr sz="2050" b="0">
+                <a:solidFill>
+                  <a:srgbClr val="1750EB"/>
+                </a:solidFill>
+                <a:latin typeface="JetBrains Mono"/>
+                <a:ea typeface="JetBrains Mono"/>
+                <a:cs typeface="JetBrains Mono"/>
+              </a:rPr>
+              <a:t>if</a:t>
             </a:r>
             <a:r>
               <a:rPr sz="2400" b="0">
@@ -9470,10 +9440,10 @@
                 <a:ea typeface="Calibri"/>
                 <a:cs typeface="Calibri"/>
               </a:rPr>
-              <a:t>. Ask whether it is sunny and store the answer in [sunny]. Display </a:t>
-            </a:r>
-            <a:r>
-              <a:rPr sz="2400" b="0">
+              <a:t> statement to display </a:t>
+            </a:r>
+            <a:r>
+              <a:rPr sz="2050" b="0">
                 <a:solidFill>
                   <a:srgbClr val="067D17"/>
                 </a:solidFill>
@@ -9492,10 +9462,10 @@
                 <a:ea typeface="Calibri"/>
                 <a:cs typeface="Calibri"/>
               </a:rPr>
-              <a:t> when [sunny] is </a:t>
-            </a:r>
-            <a:r>
-              <a:rPr sz="2400" b="0">
+              <a:t> for </a:t>
+            </a:r>
+            <a:r>
+              <a:rPr sz="2050" b="0">
                 <a:solidFill>
                   <a:srgbClr val="067D17"/>
                 </a:solidFill>
@@ -9514,10 +9484,10 @@
                 <a:ea typeface="Calibri"/>
                 <a:cs typeface="Calibri"/>
               </a:rPr>
-              <a:t>; otherwise display </a:t>
-            </a:r>
-            <a:r>
-              <a:rPr sz="2400" b="0">
+              <a:t> and </a:t>
+            </a:r>
+            <a:r>
+              <a:rPr sz="2050" b="0">
                 <a:solidFill>
                   <a:srgbClr val="067D17"/>
                 </a:solidFill>
@@ -9536,10 +9506,10 @@
                 <a:ea typeface="Calibri"/>
                 <a:cs typeface="Calibri"/>
               </a:rPr>
-              <a:t> Keep the two rain outputs unchanged. Test </a:t>
-            </a:r>
-            <a:r>
-              <a:rPr sz="2400" b="0">
+              <a:t> otherwise. Test </a:t>
+            </a:r>
+            <a:r>
+              <a:rPr sz="2050" b="0">
                 <a:solidFill>
                   <a:srgbClr val="067D17"/>
                 </a:solidFill>
@@ -9558,10 +9528,10 @@
                 <a:ea typeface="Calibri"/>
                 <a:cs typeface="Calibri"/>
               </a:rPr>
-              <a:t> and </a:t>
-            </a:r>
-            <a:r>
-              <a:rPr sz="2400" b="0">
+              <a:t> then </a:t>
+            </a:r>
+            <a:r>
+              <a:rPr sz="2050" b="0">
                 <a:solidFill>
                   <a:srgbClr val="067D17"/>
                 </a:solidFill>
@@ -9580,10 +9550,10 @@
                 <a:ea typeface="Calibri"/>
                 <a:cs typeface="Calibri"/>
               </a:rPr>
-              <a:t>; display </a:t>
-            </a:r>
-            <a:r>
-              <a:rPr sz="2400" b="0">
+              <a:t>, and </a:t>
+            </a:r>
+            <a:r>
+              <a:rPr sz="2050" b="0">
                 <a:solidFill>
                   <a:srgbClr val="067D17"/>
                 </a:solidFill>
@@ -9591,7 +9561,7 @@
                 <a:ea typeface="JetBrains Mono"/>
                 <a:cs typeface="JetBrains Mono"/>
               </a:rPr>
-              <a:t>"Take sunglasses."</a:t>
+              <a:t>"no"</a:t>
             </a:r>
             <a:r>
               <a:rPr sz="2400" b="0">
@@ -9602,10 +9572,10 @@
                 <a:ea typeface="Calibri"/>
                 <a:cs typeface="Calibri"/>
               </a:rPr>
-              <a:t> Test </a:t>
-            </a:r>
-            <a:r>
-              <a:rPr sz="2400" b="0">
+              <a:t> then </a:t>
+            </a:r>
+            <a:r>
+              <a:rPr sz="2050" b="0">
                 <a:solidFill>
                   <a:srgbClr val="067D17"/>
                 </a:solidFill>
@@ -9624,40 +9594,7 @@
                 <a:ea typeface="Calibri"/>
                 <a:cs typeface="Calibri"/>
               </a:rPr>
-              <a:t> and </a:t>
-            </a:r>
-            <a:r>
-              <a:rPr sz="2400" b="0">
-                <a:solidFill>
-                  <a:srgbClr val="067D17"/>
-                </a:solidFill>
-                <a:latin typeface="JetBrains Mono"/>
-                <a:ea typeface="JetBrains Mono"/>
-                <a:cs typeface="JetBrains Mono"/>
-              </a:rPr>
-              <a:t>"no"</a:t>
-            </a:r>
-            <a:r>
-              <a:rPr sz="2400" b="0">
-                <a:solidFill>
-                  <a:srgbClr val="080808"/>
-                </a:solidFill>
-                <a:latin typeface="Calibri"/>
-                <a:ea typeface="Calibri"/>
-                <a:cs typeface="Calibri"/>
-              </a:rPr>
-              <a:t>; display </a:t>
-            </a:r>
-            <a:r>
-              <a:rPr sz="2400" b="0">
-                <a:solidFill>
-                  <a:srgbClr val="067D17"/>
-                </a:solidFill>
-                <a:latin typeface="JetBrains Mono"/>
-                <a:ea typeface="JetBrains Mono"/>
-                <a:cs typeface="JetBrains Mono"/>
-              </a:rPr>
-              <a:t>"No weather gear needed."</a:t>
+              <a:t>.</a:t>
             </a:r>
           </a:p>
         </p:txBody>
@@ -10566,7 +10503,7 @@
         </p:spPr>
         <p:txBody>
           <a:bodyPr xmlns:a="http://schemas.openxmlformats.org/drawingml/2006/main">
-            <a:normAutofit fontScale="76855"/>
+            <a:normAutofit fontScale="100000"/>
           </a:bodyPr>
           <a:lstStyle xmlns:a="http://schemas.openxmlformats.org/drawingml/2006/main"/>
           <a:p xmlns:a="http://schemas.openxmlformats.org/drawingml/2006/main">
@@ -10585,10 +10522,10 @@
                 <a:ea typeface="Calibri"/>
                 <a:cs typeface="Calibri"/>
               </a:rPr>
-              <a:t>Ask whether the visitor has a library card and store the answer in [has_card]. Use a nested </a:t>
-            </a:r>
-            <a:r>
-              <a:rPr sz="2400" b="0">
+              <a:t>Create a library program that asks whether the visitor has a card. Use a nested </a:t>
+            </a:r>
+            <a:r>
+              <a:rPr sz="2050" b="0">
                 <a:solidFill>
                   <a:srgbClr val="1750EB"/>
                 </a:solidFill>
@@ -10607,10 +10544,10 @@
                 <a:ea typeface="Calibri"/>
                 <a:cs typeface="Calibri"/>
               </a:rPr>
-              <a:t> statement. When [has_card] is </a:t>
-            </a:r>
-            <a:r>
-              <a:rPr sz="2400" b="0">
+              <a:t> statement so only card holders are asked whether a book is overdue. Display </a:t>
+            </a:r>
+            <a:r>
+              <a:rPr sz="2050" b="0">
                 <a:solidFill>
                   <a:srgbClr val="067D17"/>
                 </a:solidFill>
@@ -10618,7 +10555,7 @@
                 <a:ea typeface="JetBrains Mono"/>
                 <a:cs typeface="JetBrains Mono"/>
               </a:rPr>
-              <a:t>"yes"</a:t>
+              <a:t>"Return the overdue book first."</a:t>
             </a:r>
             <a:r>
               <a:rPr sz="2400" b="0">
@@ -10629,10 +10566,10 @@
                 <a:ea typeface="Calibri"/>
                 <a:cs typeface="Calibri"/>
               </a:rPr>
-              <a:t>, ask whether a book is overdue and store the answer in [overdue]. Display </a:t>
-            </a:r>
-            <a:r>
-              <a:rPr sz="2400" b="0">
+              <a:t>, </a:t>
+            </a:r>
+            <a:r>
+              <a:rPr sz="2050" b="0">
                 <a:solidFill>
                   <a:srgbClr val="067D17"/>
                 </a:solidFill>
@@ -10640,7 +10577,7 @@
                 <a:ea typeface="JetBrains Mono"/>
                 <a:cs typeface="JetBrains Mono"/>
               </a:rPr>
-              <a:t>"Return the overdue book first."</a:t>
+              <a:t>"You may borrow a book."</a:t>
             </a:r>
             <a:r>
               <a:rPr sz="2400" b="0">
@@ -10651,10 +10588,10 @@
                 <a:ea typeface="Calibri"/>
                 <a:cs typeface="Calibri"/>
               </a:rPr>
-              <a:t> when [overdue] is </a:t>
-            </a:r>
-            <a:r>
-              <a:rPr sz="2400" b="0">
+              <a:t> or </a:t>
+            </a:r>
+            <a:r>
+              <a:rPr sz="2050" b="0">
                 <a:solidFill>
                   <a:srgbClr val="067D17"/>
                 </a:solidFill>
@@ -10662,7 +10599,7 @@
                 <a:ea typeface="JetBrains Mono"/>
                 <a:cs typeface="JetBrains Mono"/>
               </a:rPr>
-              <a:t>"yes"</a:t>
+              <a:t>"Apply for a library card."</a:t>
             </a:r>
             <a:r>
               <a:rPr sz="2400" b="0">
@@ -10673,183 +10610,7 @@
                 <a:ea typeface="Calibri"/>
                 <a:cs typeface="Calibri"/>
               </a:rPr>
-              <a:t>; otherwise display </a:t>
-            </a:r>
-            <a:r>
-              <a:rPr sz="2400" b="0">
-                <a:solidFill>
-                  <a:srgbClr val="067D17"/>
-                </a:solidFill>
-                <a:latin typeface="JetBrains Mono"/>
-                <a:ea typeface="JetBrains Mono"/>
-                <a:cs typeface="JetBrains Mono"/>
-              </a:rPr>
-              <a:t>"You may borrow a book."</a:t>
-            </a:r>
-            <a:r>
-              <a:rPr sz="2400" b="0">
-                <a:solidFill>
-                  <a:srgbClr val="080808"/>
-                </a:solidFill>
-                <a:latin typeface="Calibri"/>
-                <a:ea typeface="Calibri"/>
-                <a:cs typeface="Calibri"/>
-              </a:rPr>
-              <a:t> When [has_card] is </a:t>
-            </a:r>
-            <a:r>
-              <a:rPr sz="2400" b="0">
-                <a:solidFill>
-                  <a:srgbClr val="067D17"/>
-                </a:solidFill>
-                <a:latin typeface="JetBrains Mono"/>
-                <a:ea typeface="JetBrains Mono"/>
-                <a:cs typeface="JetBrains Mono"/>
-              </a:rPr>
-              <a:t>"no"</a:t>
-            </a:r>
-            <a:r>
-              <a:rPr sz="2400" b="0">
-                <a:solidFill>
-                  <a:srgbClr val="080808"/>
-                </a:solidFill>
-                <a:latin typeface="Calibri"/>
-                <a:ea typeface="Calibri"/>
-                <a:cs typeface="Calibri"/>
-              </a:rPr>
-              <a:t>, display </a:t>
-            </a:r>
-            <a:r>
-              <a:rPr sz="2400" b="0">
-                <a:solidFill>
-                  <a:srgbClr val="067D17"/>
-                </a:solidFill>
-                <a:latin typeface="JetBrains Mono"/>
-                <a:ea typeface="JetBrains Mono"/>
-                <a:cs typeface="JetBrains Mono"/>
-              </a:rPr>
-              <a:t>"Apply for a library card."</a:t>
-            </a:r>
-            <a:r>
-              <a:rPr sz="2400" b="0">
-                <a:solidFill>
-                  <a:srgbClr val="080808"/>
-                </a:solidFill>
-                <a:latin typeface="Calibri"/>
-                <a:ea typeface="Calibri"/>
-                <a:cs typeface="Calibri"/>
-              </a:rPr>
-              <a:t> Test </a:t>
-            </a:r>
-            <a:r>
-              <a:rPr sz="2400" b="0">
-                <a:solidFill>
-                  <a:srgbClr val="067D17"/>
-                </a:solidFill>
-                <a:latin typeface="JetBrains Mono"/>
-                <a:ea typeface="JetBrains Mono"/>
-                <a:cs typeface="JetBrains Mono"/>
-              </a:rPr>
-              <a:t>"yes"</a:t>
-            </a:r>
-            <a:r>
-              <a:rPr sz="2400" b="0">
-                <a:solidFill>
-                  <a:srgbClr val="080808"/>
-                </a:solidFill>
-                <a:latin typeface="Calibri"/>
-                <a:ea typeface="Calibri"/>
-                <a:cs typeface="Calibri"/>
-              </a:rPr>
-              <a:t> and </a:t>
-            </a:r>
-            <a:r>
-              <a:rPr sz="2400" b="0">
-                <a:solidFill>
-                  <a:srgbClr val="067D17"/>
-                </a:solidFill>
-                <a:latin typeface="JetBrains Mono"/>
-                <a:ea typeface="JetBrains Mono"/>
-                <a:cs typeface="JetBrains Mono"/>
-              </a:rPr>
-              <a:t>"yes"</a:t>
-            </a:r>
-            <a:r>
-              <a:rPr sz="2400" b="0">
-                <a:solidFill>
-                  <a:srgbClr val="080808"/>
-                </a:solidFill>
-                <a:latin typeface="Calibri"/>
-                <a:ea typeface="Calibri"/>
-                <a:cs typeface="Calibri"/>
-              </a:rPr>
-              <a:t>, </a:t>
-            </a:r>
-            <a:r>
-              <a:rPr sz="2400" b="0">
-                <a:solidFill>
-                  <a:srgbClr val="067D17"/>
-                </a:solidFill>
-                <a:latin typeface="JetBrains Mono"/>
-                <a:ea typeface="JetBrains Mono"/>
-                <a:cs typeface="JetBrains Mono"/>
-              </a:rPr>
-              <a:t>"yes"</a:t>
-            </a:r>
-            <a:r>
-              <a:rPr sz="2400" b="0">
-                <a:solidFill>
-                  <a:srgbClr val="080808"/>
-                </a:solidFill>
-                <a:latin typeface="Calibri"/>
-                <a:ea typeface="Calibri"/>
-                <a:cs typeface="Calibri"/>
-              </a:rPr>
-              <a:t> and </a:t>
-            </a:r>
-            <a:r>
-              <a:rPr sz="2400" b="0">
-                <a:solidFill>
-                  <a:srgbClr val="067D17"/>
-                </a:solidFill>
-                <a:latin typeface="JetBrains Mono"/>
-                <a:ea typeface="JetBrains Mono"/>
-                <a:cs typeface="JetBrains Mono"/>
-              </a:rPr>
-              <a:t>"no"</a:t>
-            </a:r>
-            <a:r>
-              <a:rPr sz="2400" b="0">
-                <a:solidFill>
-                  <a:srgbClr val="080808"/>
-                </a:solidFill>
-                <a:latin typeface="Calibri"/>
-                <a:ea typeface="Calibri"/>
-                <a:cs typeface="Calibri"/>
-              </a:rPr>
-              <a:t>, then </a:t>
-            </a:r>
-            <a:r>
-              <a:rPr sz="2400" b="0">
-                <a:solidFill>
-                  <a:srgbClr val="067D17"/>
-                </a:solidFill>
-                <a:latin typeface="JetBrains Mono"/>
-                <a:ea typeface="JetBrains Mono"/>
-                <a:cs typeface="JetBrains Mono"/>
-              </a:rPr>
-              <a:t>"no"</a:t>
-            </a:r>
-            <a:r>
-              <a:rPr sz="2400" b="0">
-                <a:solidFill>
-                  <a:srgbClr val="080808"/>
-                </a:solidFill>
-                <a:latin typeface="Calibri"/>
-                <a:ea typeface="Calibri"/>
-                <a:cs typeface="Calibri"/>
-              </a:rPr>
-              <a:t>; verify all three outputs.</a:t>
+              <a:t> Test all three routes.</a:t>
             </a:r>
           </a:p>
         </p:txBody>

--- a/Mapped Curriculum Lessons/Grade 6/Lesson 07 - Nested Decisions/Nested Decisions - Slides.pptx
+++ b/Mapped Curriculum Lessons/Grade 6/Lesson 07 - Nested Decisions/Nested Decisions - Slides.pptx
@@ -2,28 +2,28 @@
 <file path=ppt/presentation.xml><?xml version="1.0" encoding="utf-8"?>
 <p:presentation xmlns:p="http://schemas.openxmlformats.org/presentationml/2006/main" embedTrueTypeFonts="1" saveSubsetFonts="0">
   <p:sldMasterIdLst>
-    <p:sldMasterId xmlns:r="http://schemas.openxmlformats.org/officeDocument/2006/relationships" id="2147483648" r:id="R2c8d19d8ca2043d3"/>
+    <p:sldMasterId xmlns:r="http://schemas.openxmlformats.org/officeDocument/2006/relationships" id="2147483648" r:id="R0893a79302984c42"/>
   </p:sldMasterIdLst>
   <p:notesMasterIdLst>
-    <p:notesMasterId xmlns:r="http://schemas.openxmlformats.org/officeDocument/2006/relationships" r:id="R8619ebb23d4f4777"/>
+    <p:notesMasterId xmlns:r="http://schemas.openxmlformats.org/officeDocument/2006/relationships" r:id="R39a4418b91954c06"/>
   </p:notesMasterIdLst>
   <p:sldIdLst>
-    <p:sldId xmlns:r="http://schemas.openxmlformats.org/officeDocument/2006/relationships" id="256" r:id="R496f27693c47430d"/>
-    <p:sldId xmlns:r="http://schemas.openxmlformats.org/officeDocument/2006/relationships" id="257" r:id="R658c8d7262284624"/>
-    <p:sldId xmlns:r="http://schemas.openxmlformats.org/officeDocument/2006/relationships" id="258" r:id="R8f4d4d2451bf4810"/>
-    <p:sldId xmlns:r="http://schemas.openxmlformats.org/officeDocument/2006/relationships" id="259" r:id="R75babe3c7525499d"/>
-    <p:sldId xmlns:r="http://schemas.openxmlformats.org/officeDocument/2006/relationships" id="260" r:id="Ra305e9fd48df4028"/>
-    <p:sldId xmlns:r="http://schemas.openxmlformats.org/officeDocument/2006/relationships" id="261" r:id="R1cfe1190011e4260"/>
-    <p:sldId xmlns:r="http://schemas.openxmlformats.org/officeDocument/2006/relationships" id="262" r:id="R1a93871d960a4b5e"/>
-    <p:sldId xmlns:r="http://schemas.openxmlformats.org/officeDocument/2006/relationships" id="263" r:id="Rc67cbb12675c4c11"/>
-    <p:sldId xmlns:r="http://schemas.openxmlformats.org/officeDocument/2006/relationships" id="264" r:id="Rccf1db8607684cb3"/>
+    <p:sldId xmlns:r="http://schemas.openxmlformats.org/officeDocument/2006/relationships" id="256" r:id="Rdf2b4da3da6b498b"/>
+    <p:sldId xmlns:r="http://schemas.openxmlformats.org/officeDocument/2006/relationships" id="257" r:id="R1efb6cd748e24308"/>
+    <p:sldId xmlns:r="http://schemas.openxmlformats.org/officeDocument/2006/relationships" id="258" r:id="Rab9748e637884b41"/>
+    <p:sldId xmlns:r="http://schemas.openxmlformats.org/officeDocument/2006/relationships" id="259" r:id="Rcc9efd7c370e4cd1"/>
+    <p:sldId xmlns:r="http://schemas.openxmlformats.org/officeDocument/2006/relationships" id="260" r:id="R717473a30d6c4f92"/>
+    <p:sldId xmlns:r="http://schemas.openxmlformats.org/officeDocument/2006/relationships" id="261" r:id="Rf6c8be93390b4296"/>
+    <p:sldId xmlns:r="http://schemas.openxmlformats.org/officeDocument/2006/relationships" id="262" r:id="Rd75349408b394fe9"/>
+    <p:sldId xmlns:r="http://schemas.openxmlformats.org/officeDocument/2006/relationships" id="263" r:id="R062989e7e01349ca"/>
+    <p:sldId xmlns:r="http://schemas.openxmlformats.org/officeDocument/2006/relationships" id="264" r:id="R1629c150e5434c5e"/>
   </p:sldIdLst>
   <p:sldSz cx="12192000" cy="6858000"/>
   <p:notesSz cx="6858000" cy="9144000"/>
   <p:embeddedFontLst>
     <p:embeddedFont>
       <p:font typeface="JetBrains Mono"/>
-      <p:regular xmlns:r="http://schemas.openxmlformats.org/officeDocument/2006/relationships" r:id="R2878fb77ad444652"/>
+      <p:regular xmlns:r="http://schemas.openxmlformats.org/officeDocument/2006/relationships" r:id="R31ba55ff11a14f2a"/>
     </p:embeddedFont>
   </p:embeddedFontLst>
 </p:presentation>
@@ -1071,7 +1071,7 @@
           <p:nvPr/>
         </p:nvPicPr>
         <p:blipFill rotWithShape="1">
-          <a:blip xmlns:r="http://schemas.openxmlformats.org/officeDocument/2006/relationships" xmlns:a="http://schemas.openxmlformats.org/drawingml/2006/main" r:embed="Rd16b74fdb83e40ea"/>
+          <a:blip xmlns:r="http://schemas.openxmlformats.org/officeDocument/2006/relationships" xmlns:a="http://schemas.openxmlformats.org/drawingml/2006/main" r:embed="Rc13559aa5bbe4ff1"/>
           <a:stretch xmlns:a="http://schemas.openxmlformats.org/drawingml/2006/main"/>
         </p:blipFill>
         <p:spPr>
@@ -1451,7 +1451,7 @@
           <p:nvPr/>
         </p:nvPicPr>
         <p:blipFill rotWithShape="1">
-          <a:blip xmlns:r="http://schemas.openxmlformats.org/officeDocument/2006/relationships" xmlns:a="http://schemas.openxmlformats.org/drawingml/2006/main" r:embed="R6a7357aa9b1e4b04">
+          <a:blip xmlns:r="http://schemas.openxmlformats.org/officeDocument/2006/relationships" xmlns:a="http://schemas.openxmlformats.org/drawingml/2006/main" r:embed="R3fbf4a9289be40c8">
             <a:alphaModFix amt="28000"/>
           </a:blip>
           <a:stretch xmlns:a="http://schemas.openxmlformats.org/drawingml/2006/main"/>
@@ -1664,7 +1664,7 @@
           <p:nvPr/>
         </p:nvPicPr>
         <p:blipFill rotWithShape="1">
-          <a:blip xmlns:r="http://schemas.openxmlformats.org/officeDocument/2006/relationships" xmlns:a="http://schemas.openxmlformats.org/drawingml/2006/main" r:embed="R9508227c45714fee">
+          <a:blip xmlns:r="http://schemas.openxmlformats.org/officeDocument/2006/relationships" xmlns:a="http://schemas.openxmlformats.org/drawingml/2006/main" r:embed="Rabcc575cea6141b2">
             <a:alphaModFix amt="28000"/>
           </a:blip>
           <a:stretch xmlns:a="http://schemas.openxmlformats.org/drawingml/2006/main"/>
@@ -1899,7 +1899,7 @@
           <p:nvPr/>
         </p:nvPicPr>
         <p:blipFill rotWithShape="1">
-          <a:blip xmlns:r="http://schemas.openxmlformats.org/officeDocument/2006/relationships" xmlns:a="http://schemas.openxmlformats.org/drawingml/2006/main" r:embed="R2647725dbe174b40">
+          <a:blip xmlns:r="http://schemas.openxmlformats.org/officeDocument/2006/relationships" xmlns:a="http://schemas.openxmlformats.org/drawingml/2006/main" r:embed="Rb9b6e61a994748a1">
             <a:alphaModFix amt="28000"/>
           </a:blip>
           <a:stretch xmlns:a="http://schemas.openxmlformats.org/drawingml/2006/main"/>
@@ -2176,7 +2176,7 @@
           <p:nvPr/>
         </p:nvPicPr>
         <p:blipFill rotWithShape="1">
-          <a:blip xmlns:r="http://schemas.openxmlformats.org/officeDocument/2006/relationships" xmlns:a="http://schemas.openxmlformats.org/drawingml/2006/main" r:embed="R7ba30f10b43d4828">
+          <a:blip xmlns:r="http://schemas.openxmlformats.org/officeDocument/2006/relationships" xmlns:a="http://schemas.openxmlformats.org/drawingml/2006/main" r:embed="R46b65a2f5ce748b9">
             <a:alphaModFix amt="28000"/>
           </a:blip>
           <a:stretch xmlns:a="http://schemas.openxmlformats.org/drawingml/2006/main"/>
@@ -2451,7 +2451,7 @@
           <p:nvPr/>
         </p:nvPicPr>
         <p:blipFill rotWithShape="1">
-          <a:blip xmlns:r="http://schemas.openxmlformats.org/officeDocument/2006/relationships" xmlns:a="http://schemas.openxmlformats.org/drawingml/2006/main" r:embed="R0c931f88c57f4f57">
+          <a:blip xmlns:r="http://schemas.openxmlformats.org/officeDocument/2006/relationships" xmlns:a="http://schemas.openxmlformats.org/drawingml/2006/main" r:embed="Rfd0a0298a3a34080">
             <a:alphaModFix amt="28000"/>
           </a:blip>
           <a:stretch xmlns:a="http://schemas.openxmlformats.org/drawingml/2006/main"/>
@@ -2875,7 +2875,7 @@
           <p:nvPr/>
         </p:nvPicPr>
         <p:blipFill rotWithShape="1">
-          <a:blip xmlns:r="http://schemas.openxmlformats.org/officeDocument/2006/relationships" xmlns:a="http://schemas.openxmlformats.org/drawingml/2006/main" r:embed="R3e1756e8d6bd4d35">
+          <a:blip xmlns:r="http://schemas.openxmlformats.org/officeDocument/2006/relationships" xmlns:a="http://schemas.openxmlformats.org/drawingml/2006/main" r:embed="Rb3125d1c70a74605">
             <a:alphaModFix amt="28000"/>
           </a:blip>
           <a:stretch xmlns:a="http://schemas.openxmlformats.org/drawingml/2006/main"/>
@@ -3016,7 +3016,7 @@
           <p:nvPr/>
         </p:nvPicPr>
         <p:blipFill rotWithShape="1">
-          <a:blip xmlns:r="http://schemas.openxmlformats.org/officeDocument/2006/relationships" xmlns:a="http://schemas.openxmlformats.org/drawingml/2006/main" r:embed="R6eb12f767fc54dd1">
+          <a:blip xmlns:r="http://schemas.openxmlformats.org/officeDocument/2006/relationships" xmlns:a="http://schemas.openxmlformats.org/drawingml/2006/main" r:embed="Rb6c12e3ed3b04c74">
             <a:alphaModFix amt="28000"/>
           </a:blip>
           <a:stretch xmlns:a="http://schemas.openxmlformats.org/drawingml/2006/main"/>
@@ -3130,7 +3130,7 @@
           <p:nvPr/>
         </p:nvPicPr>
         <p:blipFill rotWithShape="1">
-          <a:blip xmlns:r="http://schemas.openxmlformats.org/officeDocument/2006/relationships" xmlns:a="http://schemas.openxmlformats.org/drawingml/2006/main" r:embed="Rb3285441a01a4a4a">
+          <a:blip xmlns:r="http://schemas.openxmlformats.org/officeDocument/2006/relationships" xmlns:a="http://schemas.openxmlformats.org/drawingml/2006/main" r:embed="R63d7295991334ad1">
             <a:alphaModFix amt="28000"/>
           </a:blip>
           <a:stretch xmlns:a="http://schemas.openxmlformats.org/drawingml/2006/main"/>
@@ -3457,7 +3457,7 @@
           <p:nvPr/>
         </p:nvPicPr>
         <p:blipFill rotWithShape="1">
-          <a:blip xmlns:r="http://schemas.openxmlformats.org/officeDocument/2006/relationships" xmlns:a="http://schemas.openxmlformats.org/drawingml/2006/main" r:embed="R0af280c7e5b943f4">
+          <a:blip xmlns:r="http://schemas.openxmlformats.org/officeDocument/2006/relationships" xmlns:a="http://schemas.openxmlformats.org/drawingml/2006/main" r:embed="R29c1b139320c4569">
             <a:alphaModFix amt="28000"/>
           </a:blip>
           <a:stretch xmlns:a="http://schemas.openxmlformats.org/drawingml/2006/main"/>
@@ -3745,7 +3745,7 @@
           <p:nvPr/>
         </p:nvPicPr>
         <p:blipFill rotWithShape="1">
-          <a:blip xmlns:r="http://schemas.openxmlformats.org/officeDocument/2006/relationships" xmlns:a="http://schemas.openxmlformats.org/drawingml/2006/main" r:embed="R5b356e1b4e7c4c13">
+          <a:blip xmlns:r="http://schemas.openxmlformats.org/officeDocument/2006/relationships" xmlns:a="http://schemas.openxmlformats.org/drawingml/2006/main" r:embed="R9a595d4083c147d1">
             <a:alphaModFix amt="28000"/>
           </a:blip>
           <a:stretch xmlns:a="http://schemas.openxmlformats.org/drawingml/2006/main"/>
@@ -3982,17 +3982,17 @@
   </p:cSld>
   <p:clrMap bg1="lt1" tx1="dk1" bg2="lt2" tx2="dk2" accent1="accent1" accent2="accent2" accent3="accent3" accent4="accent4" accent5="accent5" accent6="accent6" hlink="hlink" folHlink="folHlink"/>
   <p:sldLayoutIdLst>
-    <p:sldLayoutId xmlns:r="http://schemas.openxmlformats.org/officeDocument/2006/relationships" id="2147483649" r:id="Raa2dc05079f24974"/>
-    <p:sldLayoutId xmlns:r="http://schemas.openxmlformats.org/officeDocument/2006/relationships" id="2147483650" r:id="R704296c22c7444a7"/>
-    <p:sldLayoutId xmlns:r="http://schemas.openxmlformats.org/officeDocument/2006/relationships" id="2147483651" r:id="R51ad389b96984c45"/>
-    <p:sldLayoutId xmlns:r="http://schemas.openxmlformats.org/officeDocument/2006/relationships" id="2147483652" r:id="R45a601dcaa334493"/>
-    <p:sldLayoutId xmlns:r="http://schemas.openxmlformats.org/officeDocument/2006/relationships" id="2147483653" r:id="R32be65ead8c449e4"/>
-    <p:sldLayoutId xmlns:r="http://schemas.openxmlformats.org/officeDocument/2006/relationships" id="2147483654" r:id="R0b2204f724134c7e"/>
-    <p:sldLayoutId xmlns:r="http://schemas.openxmlformats.org/officeDocument/2006/relationships" id="2147483655" r:id="R6793dab2319a4b5f"/>
-    <p:sldLayoutId xmlns:r="http://schemas.openxmlformats.org/officeDocument/2006/relationships" id="2147483656" r:id="R36537b8162df42f8"/>
-    <p:sldLayoutId xmlns:r="http://schemas.openxmlformats.org/officeDocument/2006/relationships" id="2147483657" r:id="Rb50dc9f1118949b5"/>
-    <p:sldLayoutId xmlns:r="http://schemas.openxmlformats.org/officeDocument/2006/relationships" id="2147483658" r:id="Rac73d445c19f43f2"/>
-    <p:sldLayoutId xmlns:r="http://schemas.openxmlformats.org/officeDocument/2006/relationships" id="2147483659" r:id="Rb73c01681da24c21"/>
+    <p:sldLayoutId xmlns:r="http://schemas.openxmlformats.org/officeDocument/2006/relationships" id="2147483649" r:id="R390f8bf7ae9f483c"/>
+    <p:sldLayoutId xmlns:r="http://schemas.openxmlformats.org/officeDocument/2006/relationships" id="2147483650" r:id="Rd452866deb1e4770"/>
+    <p:sldLayoutId xmlns:r="http://schemas.openxmlformats.org/officeDocument/2006/relationships" id="2147483651" r:id="Rbfd1aab1e52a41fa"/>
+    <p:sldLayoutId xmlns:r="http://schemas.openxmlformats.org/officeDocument/2006/relationships" id="2147483652" r:id="Rdeae50f5964246d3"/>
+    <p:sldLayoutId xmlns:r="http://schemas.openxmlformats.org/officeDocument/2006/relationships" id="2147483653" r:id="R93dcbc5a9de54b4b"/>
+    <p:sldLayoutId xmlns:r="http://schemas.openxmlformats.org/officeDocument/2006/relationships" id="2147483654" r:id="R43c2b23c2ce944ce"/>
+    <p:sldLayoutId xmlns:r="http://schemas.openxmlformats.org/officeDocument/2006/relationships" id="2147483655" r:id="R876756c68fdb425f"/>
+    <p:sldLayoutId xmlns:r="http://schemas.openxmlformats.org/officeDocument/2006/relationships" id="2147483656" r:id="R05f156a01d744f33"/>
+    <p:sldLayoutId xmlns:r="http://schemas.openxmlformats.org/officeDocument/2006/relationships" id="2147483657" r:id="R5c1272a891684290"/>
+    <p:sldLayoutId xmlns:r="http://schemas.openxmlformats.org/officeDocument/2006/relationships" id="2147483658" r:id="Rdfa9c71aa9d14355"/>
+    <p:sldLayoutId xmlns:r="http://schemas.openxmlformats.org/officeDocument/2006/relationships" id="2147483659" r:id="R71f0cfe5ef204d63"/>
   </p:sldLayoutIdLst>
   <p:hf hdr="0" ftr="0" dt="0"/>
   <p:txStyles>
@@ -4961,7 +4961,7 @@
             <a:r>
               <a:rPr sz="2400">
                 <a:solidFill>
-                  <a:srgbClr val="1750EB"/>
+                  <a:srgbClr val="C45E00"/>
                 </a:solidFill>
                 <a:latin typeface="JetBrains Mono"/>
                 <a:ea typeface="JetBrains Mono"/>
@@ -5109,7 +5109,7 @@
             <a:r>
               <a:rPr sz="2400">
                 <a:solidFill>
-                  <a:srgbClr val="1750EB"/>
+                  <a:srgbClr val="C45E00"/>
                 </a:solidFill>
                 <a:latin typeface="JetBrains Mono"/>
                 <a:ea typeface="JetBrains Mono"/>
@@ -5257,7 +5257,7 @@
             <a:r>
               <a:rPr sz="2400">
                 <a:solidFill>
-                  <a:srgbClr val="1750EB"/>
+                  <a:srgbClr val="C45E00"/>
                 </a:solidFill>
                 <a:latin typeface="JetBrains Mono"/>
                 <a:ea typeface="JetBrains Mono"/>
@@ -5350,7 +5350,7 @@
             <a:r>
               <a:rPr sz="2400">
                 <a:solidFill>
-                  <a:srgbClr val="1750EB"/>
+                  <a:srgbClr val="C45E00"/>
                 </a:solidFill>
                 <a:latin typeface="JetBrains Mono"/>
                 <a:ea typeface="JetBrains Mono"/>
@@ -5783,7 +5783,7 @@
             <a:r>
               <a:rPr sz="2400">
                 <a:solidFill>
-                  <a:srgbClr val="1750EB"/>
+                  <a:srgbClr val="C45E00"/>
                 </a:solidFill>
                 <a:latin typeface="JetBrains Mono"/>
                 <a:ea typeface="JetBrains Mono"/>
@@ -5931,7 +5931,7 @@
             <a:r>
               <a:rPr sz="2400">
                 <a:solidFill>
-                  <a:srgbClr val="1750EB"/>
+                  <a:srgbClr val="C45E00"/>
                 </a:solidFill>
                 <a:latin typeface="JetBrains Mono"/>
                 <a:ea typeface="JetBrains Mono"/>
@@ -6079,7 +6079,7 @@
             <a:r>
               <a:rPr sz="2400">
                 <a:solidFill>
-                  <a:srgbClr val="1750EB"/>
+                  <a:srgbClr val="C45E00"/>
                 </a:solidFill>
                 <a:latin typeface="JetBrains Mono"/>
                 <a:ea typeface="JetBrains Mono"/>
@@ -6172,7 +6172,7 @@
             <a:r>
               <a:rPr sz="2400">
                 <a:solidFill>
-                  <a:srgbClr val="1750EB"/>
+                  <a:srgbClr val="C45E00"/>
                 </a:solidFill>
                 <a:latin typeface="JetBrains Mono"/>
                 <a:ea typeface="JetBrains Mono"/>
@@ -6605,7 +6605,7 @@
             <a:r>
               <a:rPr sz="2400">
                 <a:solidFill>
-                  <a:srgbClr val="1750EB"/>
+                  <a:srgbClr val="C45E00"/>
                 </a:solidFill>
                 <a:latin typeface="JetBrains Mono"/>
                 <a:ea typeface="JetBrains Mono"/>
@@ -6753,7 +6753,7 @@
             <a:r>
               <a:rPr sz="2400">
                 <a:solidFill>
-                  <a:srgbClr val="1750EB"/>
+                  <a:srgbClr val="C45E00"/>
                 </a:solidFill>
                 <a:latin typeface="JetBrains Mono"/>
                 <a:ea typeface="JetBrains Mono"/>
@@ -6901,7 +6901,7 @@
             <a:r>
               <a:rPr sz="2400">
                 <a:solidFill>
-                  <a:srgbClr val="1750EB"/>
+                  <a:srgbClr val="C45E00"/>
                 </a:solidFill>
                 <a:latin typeface="JetBrains Mono"/>
                 <a:ea typeface="JetBrains Mono"/>
@@ -6994,7 +6994,7 @@
             <a:r>
               <a:rPr sz="2400">
                 <a:solidFill>
-                  <a:srgbClr val="1750EB"/>
+                  <a:srgbClr val="C45E00"/>
                 </a:solidFill>
                 <a:latin typeface="JetBrains Mono"/>
                 <a:ea typeface="JetBrains Mono"/>
@@ -7680,7 +7680,7 @@
             <a:r>
               <a:rPr sz="1200">
                 <a:solidFill>
-                  <a:srgbClr val="1750EB"/>
+                  <a:srgbClr val="C45E00"/>
                 </a:solidFill>
                 <a:latin typeface="JetBrains Mono"/>
                 <a:ea typeface="JetBrains Mono"/>
@@ -7832,7 +7832,7 @@
             <a:r>
               <a:rPr sz="1200">
                 <a:solidFill>
-                  <a:srgbClr val="1750EB"/>
+                  <a:srgbClr val="C45E00"/>
                 </a:solidFill>
                 <a:latin typeface="JetBrains Mono"/>
                 <a:ea typeface="JetBrains Mono"/>
@@ -7984,24 +7984,89 @@
             <a:r>
               <a:rPr sz="1200">
                 <a:solidFill>
+                  <a:srgbClr val="C45E00"/>
+                </a:solidFill>
+                <a:latin typeface="JetBrains Mono"/>
+                <a:ea typeface="JetBrains Mono"/>
+                <a:cs typeface="JetBrains Mono"/>
+              </a:rPr>
+              <a:t>else</a:t>
+            </a:r>
+            <a:r>
+              <a:rPr sz="1200">
+                <a:solidFill>
+                  <a:srgbClr val="080808"/>
+                </a:solidFill>
+                <a:latin typeface="JetBrains Mono"/>
+                <a:ea typeface="JetBrains Mono"/>
+                <a:cs typeface="JetBrains Mono"/>
+              </a:rPr>
+              <a:t>:</a:t>
+            </a:r>
+            <a:br>
+              <a:rPr sz="1200">
+                <a:solidFill>
+                  <a:srgbClr val="080808"/>
+                </a:solidFill>
+                <a:latin typeface="JetBrains Mono"/>
+                <a:ea typeface="JetBrains Mono"/>
+                <a:cs typeface="JetBrains Mono"/>
+              </a:rPr>
+            </a:br>
+            <a:r>
+              <a:rPr sz="1200">
+                <a:solidFill>
+                  <a:srgbClr val="080808"/>
+                </a:solidFill>
+                <a:latin typeface="JetBrains Mono"/>
+                <a:ea typeface="JetBrains Mono"/>
+                <a:cs typeface="JetBrains Mono"/>
+              </a:rPr>
+              <a:t>        </a:t>
+            </a:r>
+            <a:r>
+              <a:rPr sz="1200">
+                <a:solidFill>
                   <a:srgbClr val="1750EB"/>
                 </a:solidFill>
                 <a:latin typeface="JetBrains Mono"/>
                 <a:ea typeface="JetBrains Mono"/>
                 <a:cs typeface="JetBrains Mono"/>
               </a:rPr>
-              <a:t>else</a:t>
-            </a:r>
-            <a:r>
-              <a:rPr sz="1200">
-                <a:solidFill>
-                  <a:srgbClr val="080808"/>
-                </a:solidFill>
-                <a:latin typeface="JetBrains Mono"/>
-                <a:ea typeface="JetBrains Mono"/>
-                <a:cs typeface="JetBrains Mono"/>
-              </a:rPr>
-              <a:t>:</a:t>
+              <a:t>print</a:t>
+            </a:r>
+            <a:r>
+              <a:rPr sz="1200">
+                <a:solidFill>
+                  <a:srgbClr val="080808"/>
+                </a:solidFill>
+                <a:latin typeface="JetBrains Mono"/>
+                <a:ea typeface="JetBrains Mono"/>
+                <a:cs typeface="JetBrains Mono"/>
+              </a:rPr>
+              <a:t>(</a:t>
+            </a:r>
+            <a:r>
+              <a:rPr sz="1200">
+                <a:solidFill>
+                  <a:srgbClr val="067D17"/>
+                </a:solidFill>
+                <a:latin typeface="JetBrains Mono"/>
+                <a:ea typeface="JetBrains Mono"/>
+                <a:cs typeface="JetBrains Mono"/>
+              </a:rPr>
+              <a:t>"Take an umbrella."</a:t>
+            </a:r>
+            <a:r>
+              <a:rPr sz="1200">
+                <a:solidFill>
+                  <a:srgbClr val="080808"/>
+                </a:solidFill>
+                <a:latin typeface="JetBrains Mono"/>
+                <a:ea typeface="JetBrains Mono"/>
+                <a:cs typeface="JetBrains Mono"/>
+              </a:rPr>
+              <a:t>)</a:t>
             </a:r>
             <a:br>
               <a:rPr sz="1200">
@@ -8016,72 +8081,7 @@
             <a:r>
               <a:rPr sz="1200">
                 <a:solidFill>
-                  <a:srgbClr val="080808"/>
-                </a:solidFill>
-                <a:latin typeface="JetBrains Mono"/>
-                <a:ea typeface="JetBrains Mono"/>
-                <a:cs typeface="JetBrains Mono"/>
-              </a:rPr>
-              <a:t>        </a:t>
-            </a:r>
-            <a:r>
-              <a:rPr sz="1200">
-                <a:solidFill>
-                  <a:srgbClr val="1750EB"/>
-                </a:solidFill>
-                <a:latin typeface="JetBrains Mono"/>
-                <a:ea typeface="JetBrains Mono"/>
-                <a:cs typeface="JetBrains Mono"/>
-              </a:rPr>
-              <a:t>print</a:t>
-            </a:r>
-            <a:r>
-              <a:rPr sz="1200">
-                <a:solidFill>
-                  <a:srgbClr val="080808"/>
-                </a:solidFill>
-                <a:latin typeface="JetBrains Mono"/>
-                <a:ea typeface="JetBrains Mono"/>
-                <a:cs typeface="JetBrains Mono"/>
-              </a:rPr>
-              <a:t>(</a:t>
-            </a:r>
-            <a:r>
-              <a:rPr sz="1200">
-                <a:solidFill>
-                  <a:srgbClr val="067D17"/>
-                </a:solidFill>
-                <a:latin typeface="JetBrains Mono"/>
-                <a:ea typeface="JetBrains Mono"/>
-                <a:cs typeface="JetBrains Mono"/>
-              </a:rPr>
-              <a:t>"Take an umbrella."</a:t>
-            </a:r>
-            <a:r>
-              <a:rPr sz="1200">
-                <a:solidFill>
-                  <a:srgbClr val="080808"/>
-                </a:solidFill>
-                <a:latin typeface="JetBrains Mono"/>
-                <a:ea typeface="JetBrains Mono"/>
-                <a:cs typeface="JetBrains Mono"/>
-              </a:rPr>
-              <a:t>)</a:t>
-            </a:r>
-            <a:br>
-              <a:rPr sz="1200">
-                <a:solidFill>
-                  <a:srgbClr val="080808"/>
-                </a:solidFill>
-                <a:latin typeface="JetBrains Mono"/>
-                <a:ea typeface="JetBrains Mono"/>
-                <a:cs typeface="JetBrains Mono"/>
-              </a:rPr>
-            </a:br>
-            <a:r>
-              <a:rPr sz="1200">
-                <a:solidFill>
-                  <a:srgbClr val="1750EB"/>
+                  <a:srgbClr val="C45E00"/>
                 </a:solidFill>
                 <a:latin typeface="JetBrains Mono"/>
                 <a:ea typeface="JetBrains Mono"/>
@@ -8363,7 +8363,7 @@
             <a:r>
               <a:rPr sz="2050" b="0">
                 <a:solidFill>
-                  <a:srgbClr val="1750EB"/>
+                  <a:srgbClr val="C45E00"/>
                 </a:solidFill>
                 <a:latin typeface="JetBrains Mono"/>
                 <a:ea typeface="JetBrains Mono"/>
@@ -8385,7 +8385,7 @@
             <a:r>
               <a:rPr sz="2050" b="0">
                 <a:solidFill>
-                  <a:srgbClr val="1750EB"/>
+                  <a:srgbClr val="C45E00"/>
                 </a:solidFill>
                 <a:latin typeface="JetBrains Mono"/>
                 <a:ea typeface="JetBrains Mono"/>
@@ -8407,7 +8407,7 @@
             <a:r>
               <a:rPr sz="2050" b="0">
                 <a:solidFill>
-                  <a:srgbClr val="1750EB"/>
+                  <a:srgbClr val="C45E00"/>
                 </a:solidFill>
                 <a:latin typeface="JetBrains Mono"/>
                 <a:ea typeface="JetBrains Mono"/>
@@ -8831,7 +8831,7 @@
             <a:r>
               <a:rPr sz="1200">
                 <a:solidFill>
-                  <a:srgbClr val="1750EB"/>
+                  <a:srgbClr val="C45E00"/>
                 </a:solidFill>
                 <a:latin typeface="JetBrains Mono"/>
                 <a:ea typeface="JetBrains Mono"/>
@@ -8983,7 +8983,7 @@
             <a:r>
               <a:rPr sz="1200">
                 <a:solidFill>
-                  <a:srgbClr val="1750EB"/>
+                  <a:srgbClr val="C45E00"/>
                 </a:solidFill>
                 <a:latin typeface="JetBrains Mono"/>
                 <a:ea typeface="JetBrains Mono"/>
@@ -9135,24 +9135,89 @@
             <a:r>
               <a:rPr sz="1200">
                 <a:solidFill>
+                  <a:srgbClr val="C45E00"/>
+                </a:solidFill>
+                <a:latin typeface="JetBrains Mono"/>
+                <a:ea typeface="JetBrains Mono"/>
+                <a:cs typeface="JetBrains Mono"/>
+              </a:rPr>
+              <a:t>else</a:t>
+            </a:r>
+            <a:r>
+              <a:rPr sz="1200">
+                <a:solidFill>
+                  <a:srgbClr val="080808"/>
+                </a:solidFill>
+                <a:latin typeface="JetBrains Mono"/>
+                <a:ea typeface="JetBrains Mono"/>
+                <a:cs typeface="JetBrains Mono"/>
+              </a:rPr>
+              <a:t>:</a:t>
+            </a:r>
+            <a:br>
+              <a:rPr sz="1200">
+                <a:solidFill>
+                  <a:srgbClr val="080808"/>
+                </a:solidFill>
+                <a:latin typeface="JetBrains Mono"/>
+                <a:ea typeface="JetBrains Mono"/>
+                <a:cs typeface="JetBrains Mono"/>
+              </a:rPr>
+            </a:br>
+            <a:r>
+              <a:rPr sz="1200">
+                <a:solidFill>
+                  <a:srgbClr val="080808"/>
+                </a:solidFill>
+                <a:latin typeface="JetBrains Mono"/>
+                <a:ea typeface="JetBrains Mono"/>
+                <a:cs typeface="JetBrains Mono"/>
+              </a:rPr>
+              <a:t>        </a:t>
+            </a:r>
+            <a:r>
+              <a:rPr sz="1200">
+                <a:solidFill>
                   <a:srgbClr val="1750EB"/>
                 </a:solidFill>
                 <a:latin typeface="JetBrains Mono"/>
                 <a:ea typeface="JetBrains Mono"/>
                 <a:cs typeface="JetBrains Mono"/>
               </a:rPr>
-              <a:t>else</a:t>
-            </a:r>
-            <a:r>
-              <a:rPr sz="1200">
-                <a:solidFill>
-                  <a:srgbClr val="080808"/>
-                </a:solidFill>
-                <a:latin typeface="JetBrains Mono"/>
-                <a:ea typeface="JetBrains Mono"/>
-                <a:cs typeface="JetBrains Mono"/>
-              </a:rPr>
-              <a:t>:</a:t>
+              <a:t>print</a:t>
+            </a:r>
+            <a:r>
+              <a:rPr sz="1200">
+                <a:solidFill>
+                  <a:srgbClr val="080808"/>
+                </a:solidFill>
+                <a:latin typeface="JetBrains Mono"/>
+                <a:ea typeface="JetBrains Mono"/>
+                <a:cs typeface="JetBrains Mono"/>
+              </a:rPr>
+              <a:t>(</a:t>
+            </a:r>
+            <a:r>
+              <a:rPr sz="1200">
+                <a:solidFill>
+                  <a:srgbClr val="067D17"/>
+                </a:solidFill>
+                <a:latin typeface="JetBrains Mono"/>
+                <a:ea typeface="JetBrains Mono"/>
+                <a:cs typeface="JetBrains Mono"/>
+              </a:rPr>
+              <a:t>"Take an umbrella."</a:t>
+            </a:r>
+            <a:r>
+              <a:rPr sz="1200">
+                <a:solidFill>
+                  <a:srgbClr val="080808"/>
+                </a:solidFill>
+                <a:latin typeface="JetBrains Mono"/>
+                <a:ea typeface="JetBrains Mono"/>
+                <a:cs typeface="JetBrains Mono"/>
+              </a:rPr>
+              <a:t>)</a:t>
             </a:r>
             <a:br>
               <a:rPr sz="1200">
@@ -9167,72 +9232,7 @@
             <a:r>
               <a:rPr sz="1200">
                 <a:solidFill>
-                  <a:srgbClr val="080808"/>
-                </a:solidFill>
-                <a:latin typeface="JetBrains Mono"/>
-                <a:ea typeface="JetBrains Mono"/>
-                <a:cs typeface="JetBrains Mono"/>
-              </a:rPr>
-              <a:t>        </a:t>
-            </a:r>
-            <a:r>
-              <a:rPr sz="1200">
-                <a:solidFill>
-                  <a:srgbClr val="1750EB"/>
-                </a:solidFill>
-                <a:latin typeface="JetBrains Mono"/>
-                <a:ea typeface="JetBrains Mono"/>
-                <a:cs typeface="JetBrains Mono"/>
-              </a:rPr>
-              <a:t>print</a:t>
-            </a:r>
-            <a:r>
-              <a:rPr sz="1200">
-                <a:solidFill>
-                  <a:srgbClr val="080808"/>
-                </a:solidFill>
-                <a:latin typeface="JetBrains Mono"/>
-                <a:ea typeface="JetBrains Mono"/>
-                <a:cs typeface="JetBrains Mono"/>
-              </a:rPr>
-              <a:t>(</a:t>
-            </a:r>
-            <a:r>
-              <a:rPr sz="1200">
-                <a:solidFill>
-                  <a:srgbClr val="067D17"/>
-                </a:solidFill>
-                <a:latin typeface="JetBrains Mono"/>
-                <a:ea typeface="JetBrains Mono"/>
-                <a:cs typeface="JetBrains Mono"/>
-              </a:rPr>
-              <a:t>"Take an umbrella."</a:t>
-            </a:r>
-            <a:r>
-              <a:rPr sz="1200">
-                <a:solidFill>
-                  <a:srgbClr val="080808"/>
-                </a:solidFill>
-                <a:latin typeface="JetBrains Mono"/>
-                <a:ea typeface="JetBrains Mono"/>
-                <a:cs typeface="JetBrains Mono"/>
-              </a:rPr>
-              <a:t>)</a:t>
-            </a:r>
-            <a:br>
-              <a:rPr sz="1200">
-                <a:solidFill>
-                  <a:srgbClr val="080808"/>
-                </a:solidFill>
-                <a:latin typeface="JetBrains Mono"/>
-                <a:ea typeface="JetBrains Mono"/>
-                <a:cs typeface="JetBrains Mono"/>
-              </a:rPr>
-            </a:br>
-            <a:r>
-              <a:rPr sz="1200">
-                <a:solidFill>
-                  <a:srgbClr val="1750EB"/>
+                  <a:srgbClr val="C45E00"/>
                 </a:solidFill>
                 <a:latin typeface="JetBrains Mono"/>
                 <a:ea typeface="JetBrains Mono"/>
@@ -9423,7 +9423,7 @@
             <a:r>
               <a:rPr sz="2050" b="0">
                 <a:solidFill>
-                  <a:srgbClr val="1750EB"/>
+                  <a:srgbClr val="C45E00"/>
                 </a:solidFill>
                 <a:latin typeface="JetBrains Mono"/>
                 <a:ea typeface="JetBrains Mono"/>
@@ -9935,7 +9935,7 @@
             <a:r>
               <a:rPr sz="1200">
                 <a:solidFill>
-                  <a:srgbClr val="1750EB"/>
+                  <a:srgbClr val="C45E00"/>
                 </a:solidFill>
                 <a:latin typeface="JetBrains Mono"/>
                 <a:ea typeface="JetBrains Mono"/>
@@ -10087,7 +10087,7 @@
             <a:r>
               <a:rPr sz="1200">
                 <a:solidFill>
-                  <a:srgbClr val="1750EB"/>
+                  <a:srgbClr val="C45E00"/>
                 </a:solidFill>
                 <a:latin typeface="JetBrains Mono"/>
                 <a:ea typeface="JetBrains Mono"/>
@@ -10239,24 +10239,89 @@
             <a:r>
               <a:rPr sz="1200">
                 <a:solidFill>
+                  <a:srgbClr val="C45E00"/>
+                </a:solidFill>
+                <a:latin typeface="JetBrains Mono"/>
+                <a:ea typeface="JetBrains Mono"/>
+                <a:cs typeface="JetBrains Mono"/>
+              </a:rPr>
+              <a:t>else</a:t>
+            </a:r>
+            <a:r>
+              <a:rPr sz="1200">
+                <a:solidFill>
+                  <a:srgbClr val="080808"/>
+                </a:solidFill>
+                <a:latin typeface="JetBrains Mono"/>
+                <a:ea typeface="JetBrains Mono"/>
+                <a:cs typeface="JetBrains Mono"/>
+              </a:rPr>
+              <a:t>:</a:t>
+            </a:r>
+            <a:br>
+              <a:rPr sz="1200">
+                <a:solidFill>
+                  <a:srgbClr val="080808"/>
+                </a:solidFill>
+                <a:latin typeface="JetBrains Mono"/>
+                <a:ea typeface="JetBrains Mono"/>
+                <a:cs typeface="JetBrains Mono"/>
+              </a:rPr>
+            </a:br>
+            <a:r>
+              <a:rPr sz="1200">
+                <a:solidFill>
+                  <a:srgbClr val="080808"/>
+                </a:solidFill>
+                <a:latin typeface="JetBrains Mono"/>
+                <a:ea typeface="JetBrains Mono"/>
+                <a:cs typeface="JetBrains Mono"/>
+              </a:rPr>
+              <a:t>        </a:t>
+            </a:r>
+            <a:r>
+              <a:rPr sz="1200">
+                <a:solidFill>
                   <a:srgbClr val="1750EB"/>
                 </a:solidFill>
                 <a:latin typeface="JetBrains Mono"/>
                 <a:ea typeface="JetBrains Mono"/>
                 <a:cs typeface="JetBrains Mono"/>
               </a:rPr>
-              <a:t>else</a:t>
-            </a:r>
-            <a:r>
-              <a:rPr sz="1200">
-                <a:solidFill>
-                  <a:srgbClr val="080808"/>
-                </a:solidFill>
-                <a:latin typeface="JetBrains Mono"/>
-                <a:ea typeface="JetBrains Mono"/>
-                <a:cs typeface="JetBrains Mono"/>
-              </a:rPr>
-              <a:t>:</a:t>
+              <a:t>print</a:t>
+            </a:r>
+            <a:r>
+              <a:rPr sz="1200">
+                <a:solidFill>
+                  <a:srgbClr val="080808"/>
+                </a:solidFill>
+                <a:latin typeface="JetBrains Mono"/>
+                <a:ea typeface="JetBrains Mono"/>
+                <a:cs typeface="JetBrains Mono"/>
+              </a:rPr>
+              <a:t>(</a:t>
+            </a:r>
+            <a:r>
+              <a:rPr sz="1200">
+                <a:solidFill>
+                  <a:srgbClr val="067D17"/>
+                </a:solidFill>
+                <a:latin typeface="JetBrains Mono"/>
+                <a:ea typeface="JetBrains Mono"/>
+                <a:cs typeface="JetBrains Mono"/>
+              </a:rPr>
+              <a:t>"Take an umbrella."</a:t>
+            </a:r>
+            <a:r>
+              <a:rPr sz="1200">
+                <a:solidFill>
+                  <a:srgbClr val="080808"/>
+                </a:solidFill>
+                <a:latin typeface="JetBrains Mono"/>
+                <a:ea typeface="JetBrains Mono"/>
+                <a:cs typeface="JetBrains Mono"/>
+              </a:rPr>
+              <a:t>)</a:t>
             </a:r>
             <a:br>
               <a:rPr sz="1200">
@@ -10271,72 +10336,7 @@
             <a:r>
               <a:rPr sz="1200">
                 <a:solidFill>
-                  <a:srgbClr val="080808"/>
-                </a:solidFill>
-                <a:latin typeface="JetBrains Mono"/>
-                <a:ea typeface="JetBrains Mono"/>
-                <a:cs typeface="JetBrains Mono"/>
-              </a:rPr>
-              <a:t>        </a:t>
-            </a:r>
-            <a:r>
-              <a:rPr sz="1200">
-                <a:solidFill>
-                  <a:srgbClr val="1750EB"/>
-                </a:solidFill>
-                <a:latin typeface="JetBrains Mono"/>
-                <a:ea typeface="JetBrains Mono"/>
-                <a:cs typeface="JetBrains Mono"/>
-              </a:rPr>
-              <a:t>print</a:t>
-            </a:r>
-            <a:r>
-              <a:rPr sz="1200">
-                <a:solidFill>
-                  <a:srgbClr val="080808"/>
-                </a:solidFill>
-                <a:latin typeface="JetBrains Mono"/>
-                <a:ea typeface="JetBrains Mono"/>
-                <a:cs typeface="JetBrains Mono"/>
-              </a:rPr>
-              <a:t>(</a:t>
-            </a:r>
-            <a:r>
-              <a:rPr sz="1200">
-                <a:solidFill>
-                  <a:srgbClr val="067D17"/>
-                </a:solidFill>
-                <a:latin typeface="JetBrains Mono"/>
-                <a:ea typeface="JetBrains Mono"/>
-                <a:cs typeface="JetBrains Mono"/>
-              </a:rPr>
-              <a:t>"Take an umbrella."</a:t>
-            </a:r>
-            <a:r>
-              <a:rPr sz="1200">
-                <a:solidFill>
-                  <a:srgbClr val="080808"/>
-                </a:solidFill>
-                <a:latin typeface="JetBrains Mono"/>
-                <a:ea typeface="JetBrains Mono"/>
-                <a:cs typeface="JetBrains Mono"/>
-              </a:rPr>
-              <a:t>)</a:t>
-            </a:r>
-            <a:br>
-              <a:rPr sz="1200">
-                <a:solidFill>
-                  <a:srgbClr val="080808"/>
-                </a:solidFill>
-                <a:latin typeface="JetBrains Mono"/>
-                <a:ea typeface="JetBrains Mono"/>
-                <a:cs typeface="JetBrains Mono"/>
-              </a:rPr>
-            </a:br>
-            <a:r>
-              <a:rPr sz="1200">
-                <a:solidFill>
-                  <a:srgbClr val="1750EB"/>
+                  <a:srgbClr val="C45E00"/>
                 </a:solidFill>
                 <a:latin typeface="JetBrains Mono"/>
                 <a:ea typeface="JetBrains Mono"/>
@@ -10527,7 +10527,7 @@
             <a:r>
               <a:rPr sz="2050" b="0">
                 <a:solidFill>
-                  <a:srgbClr val="1750EB"/>
+                  <a:srgbClr val="C45E00"/>
                 </a:solidFill>
                 <a:latin typeface="JetBrains Mono"/>
                 <a:ea typeface="JetBrains Mono"/>
@@ -10951,7 +10951,7 @@
             <a:r>
               <a:rPr sz="1200">
                 <a:solidFill>
-                  <a:srgbClr val="1750EB"/>
+                  <a:srgbClr val="C45E00"/>
                 </a:solidFill>
                 <a:latin typeface="JetBrains Mono"/>
                 <a:ea typeface="JetBrains Mono"/>
@@ -11103,7 +11103,7 @@
             <a:r>
               <a:rPr sz="1200">
                 <a:solidFill>
-                  <a:srgbClr val="1750EB"/>
+                  <a:srgbClr val="C45E00"/>
                 </a:solidFill>
                 <a:latin typeface="JetBrains Mono"/>
                 <a:ea typeface="JetBrains Mono"/>
@@ -11255,24 +11255,89 @@
             <a:r>
               <a:rPr sz="1200">
                 <a:solidFill>
+                  <a:srgbClr val="C45E00"/>
+                </a:solidFill>
+                <a:latin typeface="JetBrains Mono"/>
+                <a:ea typeface="JetBrains Mono"/>
+                <a:cs typeface="JetBrains Mono"/>
+              </a:rPr>
+              <a:t>else</a:t>
+            </a:r>
+            <a:r>
+              <a:rPr sz="1200">
+                <a:solidFill>
+                  <a:srgbClr val="080808"/>
+                </a:solidFill>
+                <a:latin typeface="JetBrains Mono"/>
+                <a:ea typeface="JetBrains Mono"/>
+                <a:cs typeface="JetBrains Mono"/>
+              </a:rPr>
+              <a:t>:</a:t>
+            </a:r>
+            <a:br>
+              <a:rPr sz="1200">
+                <a:solidFill>
+                  <a:srgbClr val="080808"/>
+                </a:solidFill>
+                <a:latin typeface="JetBrains Mono"/>
+                <a:ea typeface="JetBrains Mono"/>
+                <a:cs typeface="JetBrains Mono"/>
+              </a:rPr>
+            </a:br>
+            <a:r>
+              <a:rPr sz="1200">
+                <a:solidFill>
+                  <a:srgbClr val="080808"/>
+                </a:solidFill>
+                <a:latin typeface="JetBrains Mono"/>
+                <a:ea typeface="JetBrains Mono"/>
+                <a:cs typeface="JetBrains Mono"/>
+              </a:rPr>
+              <a:t>        </a:t>
+            </a:r>
+            <a:r>
+              <a:rPr sz="1200">
+                <a:solidFill>
                   <a:srgbClr val="1750EB"/>
                 </a:solidFill>
                 <a:latin typeface="JetBrains Mono"/>
                 <a:ea typeface="JetBrains Mono"/>
                 <a:cs typeface="JetBrains Mono"/>
               </a:rPr>
-              <a:t>else</a:t>
-            </a:r>
-            <a:r>
-              <a:rPr sz="1200">
-                <a:solidFill>
-                  <a:srgbClr val="080808"/>
-                </a:solidFill>
-                <a:latin typeface="JetBrains Mono"/>
-                <a:ea typeface="JetBrains Mono"/>
-                <a:cs typeface="JetBrains Mono"/>
-              </a:rPr>
-              <a:t>:</a:t>
+              <a:t>print</a:t>
+            </a:r>
+            <a:r>
+              <a:rPr sz="1200">
+                <a:solidFill>
+                  <a:srgbClr val="080808"/>
+                </a:solidFill>
+                <a:latin typeface="JetBrains Mono"/>
+                <a:ea typeface="JetBrains Mono"/>
+                <a:cs typeface="JetBrains Mono"/>
+              </a:rPr>
+              <a:t>(</a:t>
+            </a:r>
+            <a:r>
+              <a:rPr sz="1200">
+                <a:solidFill>
+                  <a:srgbClr val="067D17"/>
+                </a:solidFill>
+                <a:latin typeface="JetBrains Mono"/>
+                <a:ea typeface="JetBrains Mono"/>
+                <a:cs typeface="JetBrains Mono"/>
+              </a:rPr>
+              <a:t>"Take an umbrella."</a:t>
+            </a:r>
+            <a:r>
+              <a:rPr sz="1200">
+                <a:solidFill>
+                  <a:srgbClr val="080808"/>
+                </a:solidFill>
+                <a:latin typeface="JetBrains Mono"/>
+                <a:ea typeface="JetBrains Mono"/>
+                <a:cs typeface="JetBrains Mono"/>
+              </a:rPr>
+              <a:t>)</a:t>
             </a:r>
             <a:br>
               <a:rPr sz="1200">
@@ -11287,72 +11352,7 @@
             <a:r>
               <a:rPr sz="1200">
                 <a:solidFill>
-                  <a:srgbClr val="080808"/>
-                </a:solidFill>
-                <a:latin typeface="JetBrains Mono"/>
-                <a:ea typeface="JetBrains Mono"/>
-                <a:cs typeface="JetBrains Mono"/>
-              </a:rPr>
-              <a:t>        </a:t>
-            </a:r>
-            <a:r>
-              <a:rPr sz="1200">
-                <a:solidFill>
-                  <a:srgbClr val="1750EB"/>
-                </a:solidFill>
-                <a:latin typeface="JetBrains Mono"/>
-                <a:ea typeface="JetBrains Mono"/>
-                <a:cs typeface="JetBrains Mono"/>
-              </a:rPr>
-              <a:t>print</a:t>
-            </a:r>
-            <a:r>
-              <a:rPr sz="1200">
-                <a:solidFill>
-                  <a:srgbClr val="080808"/>
-                </a:solidFill>
-                <a:latin typeface="JetBrains Mono"/>
-                <a:ea typeface="JetBrains Mono"/>
-                <a:cs typeface="JetBrains Mono"/>
-              </a:rPr>
-              <a:t>(</a:t>
-            </a:r>
-            <a:r>
-              <a:rPr sz="1200">
-                <a:solidFill>
-                  <a:srgbClr val="067D17"/>
-                </a:solidFill>
-                <a:latin typeface="JetBrains Mono"/>
-                <a:ea typeface="JetBrains Mono"/>
-                <a:cs typeface="JetBrains Mono"/>
-              </a:rPr>
-              <a:t>"Take an umbrella."</a:t>
-            </a:r>
-            <a:r>
-              <a:rPr sz="1200">
-                <a:solidFill>
-                  <a:srgbClr val="080808"/>
-                </a:solidFill>
-                <a:latin typeface="JetBrains Mono"/>
-                <a:ea typeface="JetBrains Mono"/>
-                <a:cs typeface="JetBrains Mono"/>
-              </a:rPr>
-              <a:t>)</a:t>
-            </a:r>
-            <a:br>
-              <a:rPr sz="1200">
-                <a:solidFill>
-                  <a:srgbClr val="080808"/>
-                </a:solidFill>
-                <a:latin typeface="JetBrains Mono"/>
-                <a:ea typeface="JetBrains Mono"/>
-                <a:cs typeface="JetBrains Mono"/>
-              </a:rPr>
-            </a:br>
-            <a:r>
-              <a:rPr sz="1200">
-                <a:solidFill>
-                  <a:srgbClr val="1750EB"/>
+                  <a:srgbClr val="C45E00"/>
                 </a:solidFill>
                 <a:latin typeface="JetBrains Mono"/>
                 <a:ea typeface="JetBrains Mono"/>
@@ -11635,7 +11635,7 @@
             <a:r>
               <a:rPr sz="1800">
                 <a:solidFill>
-                  <a:srgbClr val="1750EB"/>
+                  <a:srgbClr val="C45E00"/>
                 </a:solidFill>
                 <a:latin typeface="JetBrains Mono"/>
                 <a:ea typeface="JetBrains Mono"/>
@@ -11783,7 +11783,7 @@
             <a:r>
               <a:rPr sz="1800">
                 <a:solidFill>
-                  <a:srgbClr val="1750EB"/>
+                  <a:srgbClr val="C45E00"/>
                 </a:solidFill>
                 <a:latin typeface="JetBrains Mono"/>
                 <a:ea typeface="JetBrains Mono"/>
@@ -11920,7 +11920,7 @@
             <a:r>
               <a:rPr sz="1800">
                 <a:solidFill>
-                  <a:srgbClr val="1750EB"/>
+                  <a:srgbClr val="C45E00"/>
                 </a:solidFill>
                 <a:latin typeface="JetBrains Mono"/>
                 <a:ea typeface="JetBrains Mono"/>

--- a/Mapped Curriculum Lessons/Grade 6/Lesson 07 - Nested Decisions/Nested Decisions - Slides.pptx
+++ b/Mapped Curriculum Lessons/Grade 6/Lesson 07 - Nested Decisions/Nested Decisions - Slides.pptx
@@ -2,28 +2,28 @@
 <file path=ppt/presentation.xml><?xml version="1.0" encoding="utf-8"?>
 <p:presentation xmlns:p="http://schemas.openxmlformats.org/presentationml/2006/main" embedTrueTypeFonts="1" saveSubsetFonts="0">
   <p:sldMasterIdLst>
-    <p:sldMasterId xmlns:r="http://schemas.openxmlformats.org/officeDocument/2006/relationships" id="2147483648" r:id="R0893a79302984c42"/>
+    <p:sldMasterId xmlns:r="http://schemas.openxmlformats.org/officeDocument/2006/relationships" id="2147483648" r:id="R813baf7bf2fc4241"/>
   </p:sldMasterIdLst>
   <p:notesMasterIdLst>
-    <p:notesMasterId xmlns:r="http://schemas.openxmlformats.org/officeDocument/2006/relationships" r:id="R39a4418b91954c06"/>
+    <p:notesMasterId xmlns:r="http://schemas.openxmlformats.org/officeDocument/2006/relationships" r:id="R7de18248572749b9"/>
   </p:notesMasterIdLst>
   <p:sldIdLst>
-    <p:sldId xmlns:r="http://schemas.openxmlformats.org/officeDocument/2006/relationships" id="256" r:id="Rdf2b4da3da6b498b"/>
-    <p:sldId xmlns:r="http://schemas.openxmlformats.org/officeDocument/2006/relationships" id="257" r:id="R1efb6cd748e24308"/>
-    <p:sldId xmlns:r="http://schemas.openxmlformats.org/officeDocument/2006/relationships" id="258" r:id="Rab9748e637884b41"/>
-    <p:sldId xmlns:r="http://schemas.openxmlformats.org/officeDocument/2006/relationships" id="259" r:id="Rcc9efd7c370e4cd1"/>
-    <p:sldId xmlns:r="http://schemas.openxmlformats.org/officeDocument/2006/relationships" id="260" r:id="R717473a30d6c4f92"/>
-    <p:sldId xmlns:r="http://schemas.openxmlformats.org/officeDocument/2006/relationships" id="261" r:id="Rf6c8be93390b4296"/>
-    <p:sldId xmlns:r="http://schemas.openxmlformats.org/officeDocument/2006/relationships" id="262" r:id="Rd75349408b394fe9"/>
-    <p:sldId xmlns:r="http://schemas.openxmlformats.org/officeDocument/2006/relationships" id="263" r:id="R062989e7e01349ca"/>
-    <p:sldId xmlns:r="http://schemas.openxmlformats.org/officeDocument/2006/relationships" id="264" r:id="R1629c150e5434c5e"/>
+    <p:sldId xmlns:r="http://schemas.openxmlformats.org/officeDocument/2006/relationships" id="256" r:id="R983a26a7c0e74e71"/>
+    <p:sldId xmlns:r="http://schemas.openxmlformats.org/officeDocument/2006/relationships" id="257" r:id="Rdabc6a37c1e24974"/>
+    <p:sldId xmlns:r="http://schemas.openxmlformats.org/officeDocument/2006/relationships" id="258" r:id="Ra9ce0761a3044eb5"/>
+    <p:sldId xmlns:r="http://schemas.openxmlformats.org/officeDocument/2006/relationships" id="259" r:id="Ra59020cf3e804b72"/>
+    <p:sldId xmlns:r="http://schemas.openxmlformats.org/officeDocument/2006/relationships" id="260" r:id="R569f0a836f1e44ce"/>
+    <p:sldId xmlns:r="http://schemas.openxmlformats.org/officeDocument/2006/relationships" id="261" r:id="R8f65a951c59a4e37"/>
+    <p:sldId xmlns:r="http://schemas.openxmlformats.org/officeDocument/2006/relationships" id="262" r:id="Rf69b383108b5486c"/>
+    <p:sldId xmlns:r="http://schemas.openxmlformats.org/officeDocument/2006/relationships" id="263" r:id="Ra235448db20d4d40"/>
+    <p:sldId xmlns:r="http://schemas.openxmlformats.org/officeDocument/2006/relationships" id="264" r:id="R0edb6e6e679f4cf0"/>
   </p:sldIdLst>
   <p:sldSz cx="12192000" cy="6858000"/>
   <p:notesSz cx="6858000" cy="9144000"/>
   <p:embeddedFontLst>
     <p:embeddedFont>
       <p:font typeface="JetBrains Mono"/>
-      <p:regular xmlns:r="http://schemas.openxmlformats.org/officeDocument/2006/relationships" r:id="R31ba55ff11a14f2a"/>
+      <p:regular xmlns:r="http://schemas.openxmlformats.org/officeDocument/2006/relationships" r:id="R12cc283c6e774429"/>
     </p:embeddedFont>
   </p:embeddedFontLst>
 </p:presentation>
@@ -1071,7 +1071,7 @@
           <p:nvPr/>
         </p:nvPicPr>
         <p:blipFill rotWithShape="1">
-          <a:blip xmlns:r="http://schemas.openxmlformats.org/officeDocument/2006/relationships" xmlns:a="http://schemas.openxmlformats.org/drawingml/2006/main" r:embed="Rc13559aa5bbe4ff1"/>
+          <a:blip xmlns:r="http://schemas.openxmlformats.org/officeDocument/2006/relationships" xmlns:a="http://schemas.openxmlformats.org/drawingml/2006/main" r:embed="R6361464008fe4459"/>
           <a:stretch xmlns:a="http://schemas.openxmlformats.org/drawingml/2006/main"/>
         </p:blipFill>
         <p:spPr>
@@ -1451,7 +1451,7 @@
           <p:nvPr/>
         </p:nvPicPr>
         <p:blipFill rotWithShape="1">
-          <a:blip xmlns:r="http://schemas.openxmlformats.org/officeDocument/2006/relationships" xmlns:a="http://schemas.openxmlformats.org/drawingml/2006/main" r:embed="R3fbf4a9289be40c8">
+          <a:blip xmlns:r="http://schemas.openxmlformats.org/officeDocument/2006/relationships" xmlns:a="http://schemas.openxmlformats.org/drawingml/2006/main" r:embed="Rc711ecc5ec4743b6">
             <a:alphaModFix amt="28000"/>
           </a:blip>
           <a:stretch xmlns:a="http://schemas.openxmlformats.org/drawingml/2006/main"/>
@@ -1664,7 +1664,7 @@
           <p:nvPr/>
         </p:nvPicPr>
         <p:blipFill rotWithShape="1">
-          <a:blip xmlns:r="http://schemas.openxmlformats.org/officeDocument/2006/relationships" xmlns:a="http://schemas.openxmlformats.org/drawingml/2006/main" r:embed="Rabcc575cea6141b2">
+          <a:blip xmlns:r="http://schemas.openxmlformats.org/officeDocument/2006/relationships" xmlns:a="http://schemas.openxmlformats.org/drawingml/2006/main" r:embed="R1da9ecbf87294f49">
             <a:alphaModFix amt="28000"/>
           </a:blip>
           <a:stretch xmlns:a="http://schemas.openxmlformats.org/drawingml/2006/main"/>
@@ -1899,7 +1899,7 @@
           <p:nvPr/>
         </p:nvPicPr>
         <p:blipFill rotWithShape="1">
-          <a:blip xmlns:r="http://schemas.openxmlformats.org/officeDocument/2006/relationships" xmlns:a="http://schemas.openxmlformats.org/drawingml/2006/main" r:embed="Rb9b6e61a994748a1">
+          <a:blip xmlns:r="http://schemas.openxmlformats.org/officeDocument/2006/relationships" xmlns:a="http://schemas.openxmlformats.org/drawingml/2006/main" r:embed="Rd40d8d6a455e452d">
             <a:alphaModFix amt="28000"/>
           </a:blip>
           <a:stretch xmlns:a="http://schemas.openxmlformats.org/drawingml/2006/main"/>
@@ -2176,7 +2176,7 @@
           <p:nvPr/>
         </p:nvPicPr>
         <p:blipFill rotWithShape="1">
-          <a:blip xmlns:r="http://schemas.openxmlformats.org/officeDocument/2006/relationships" xmlns:a="http://schemas.openxmlformats.org/drawingml/2006/main" r:embed="R46b65a2f5ce748b9">
+          <a:blip xmlns:r="http://schemas.openxmlformats.org/officeDocument/2006/relationships" xmlns:a="http://schemas.openxmlformats.org/drawingml/2006/main" r:embed="R5120307407594fb0">
             <a:alphaModFix amt="28000"/>
           </a:blip>
           <a:stretch xmlns:a="http://schemas.openxmlformats.org/drawingml/2006/main"/>
@@ -2451,7 +2451,7 @@
           <p:nvPr/>
         </p:nvPicPr>
         <p:blipFill rotWithShape="1">
-          <a:blip xmlns:r="http://schemas.openxmlformats.org/officeDocument/2006/relationships" xmlns:a="http://schemas.openxmlformats.org/drawingml/2006/main" r:embed="Rfd0a0298a3a34080">
+          <a:blip xmlns:r="http://schemas.openxmlformats.org/officeDocument/2006/relationships" xmlns:a="http://schemas.openxmlformats.org/drawingml/2006/main" r:embed="Red14d4b68fa04d11">
             <a:alphaModFix amt="28000"/>
           </a:blip>
           <a:stretch xmlns:a="http://schemas.openxmlformats.org/drawingml/2006/main"/>
@@ -2875,7 +2875,7 @@
           <p:nvPr/>
         </p:nvPicPr>
         <p:blipFill rotWithShape="1">
-          <a:blip xmlns:r="http://schemas.openxmlformats.org/officeDocument/2006/relationships" xmlns:a="http://schemas.openxmlformats.org/drawingml/2006/main" r:embed="Rb3125d1c70a74605">
+          <a:blip xmlns:r="http://schemas.openxmlformats.org/officeDocument/2006/relationships" xmlns:a="http://schemas.openxmlformats.org/drawingml/2006/main" r:embed="R74b099d19ff44c49">
             <a:alphaModFix amt="28000"/>
           </a:blip>
           <a:stretch xmlns:a="http://schemas.openxmlformats.org/drawingml/2006/main"/>
@@ -3016,7 +3016,7 @@
           <p:nvPr/>
         </p:nvPicPr>
         <p:blipFill rotWithShape="1">
-          <a:blip xmlns:r="http://schemas.openxmlformats.org/officeDocument/2006/relationships" xmlns:a="http://schemas.openxmlformats.org/drawingml/2006/main" r:embed="Rb6c12e3ed3b04c74">
+          <a:blip xmlns:r="http://schemas.openxmlformats.org/officeDocument/2006/relationships" xmlns:a="http://schemas.openxmlformats.org/drawingml/2006/main" r:embed="R25888017881240d7">
             <a:alphaModFix amt="28000"/>
           </a:blip>
           <a:stretch xmlns:a="http://schemas.openxmlformats.org/drawingml/2006/main"/>
@@ -3130,7 +3130,7 @@
           <p:nvPr/>
         </p:nvPicPr>
         <p:blipFill rotWithShape="1">
-          <a:blip xmlns:r="http://schemas.openxmlformats.org/officeDocument/2006/relationships" xmlns:a="http://schemas.openxmlformats.org/drawingml/2006/main" r:embed="R63d7295991334ad1">
+          <a:blip xmlns:r="http://schemas.openxmlformats.org/officeDocument/2006/relationships" xmlns:a="http://schemas.openxmlformats.org/drawingml/2006/main" r:embed="R12d1996a457e4178">
             <a:alphaModFix amt="28000"/>
           </a:blip>
           <a:stretch xmlns:a="http://schemas.openxmlformats.org/drawingml/2006/main"/>
@@ -3457,7 +3457,7 @@
           <p:nvPr/>
         </p:nvPicPr>
         <p:blipFill rotWithShape="1">
-          <a:blip xmlns:r="http://schemas.openxmlformats.org/officeDocument/2006/relationships" xmlns:a="http://schemas.openxmlformats.org/drawingml/2006/main" r:embed="R29c1b139320c4569">
+          <a:blip xmlns:r="http://schemas.openxmlformats.org/officeDocument/2006/relationships" xmlns:a="http://schemas.openxmlformats.org/drawingml/2006/main" r:embed="Re7aadb799b8f4795">
             <a:alphaModFix amt="28000"/>
           </a:blip>
           <a:stretch xmlns:a="http://schemas.openxmlformats.org/drawingml/2006/main"/>
@@ -3745,7 +3745,7 @@
           <p:nvPr/>
         </p:nvPicPr>
         <p:blipFill rotWithShape="1">
-          <a:blip xmlns:r="http://schemas.openxmlformats.org/officeDocument/2006/relationships" xmlns:a="http://schemas.openxmlformats.org/drawingml/2006/main" r:embed="R9a595d4083c147d1">
+          <a:blip xmlns:r="http://schemas.openxmlformats.org/officeDocument/2006/relationships" xmlns:a="http://schemas.openxmlformats.org/drawingml/2006/main" r:embed="R42b72825d167484a">
             <a:alphaModFix amt="28000"/>
           </a:blip>
           <a:stretch xmlns:a="http://schemas.openxmlformats.org/drawingml/2006/main"/>
@@ -3982,17 +3982,17 @@
   </p:cSld>
   <p:clrMap bg1="lt1" tx1="dk1" bg2="lt2" tx2="dk2" accent1="accent1" accent2="accent2" accent3="accent3" accent4="accent4" accent5="accent5" accent6="accent6" hlink="hlink" folHlink="folHlink"/>
   <p:sldLayoutIdLst>
-    <p:sldLayoutId xmlns:r="http://schemas.openxmlformats.org/officeDocument/2006/relationships" id="2147483649" r:id="R390f8bf7ae9f483c"/>
-    <p:sldLayoutId xmlns:r="http://schemas.openxmlformats.org/officeDocument/2006/relationships" id="2147483650" r:id="Rd452866deb1e4770"/>
-    <p:sldLayoutId xmlns:r="http://schemas.openxmlformats.org/officeDocument/2006/relationships" id="2147483651" r:id="Rbfd1aab1e52a41fa"/>
-    <p:sldLayoutId xmlns:r="http://schemas.openxmlformats.org/officeDocument/2006/relationships" id="2147483652" r:id="Rdeae50f5964246d3"/>
-    <p:sldLayoutId xmlns:r="http://schemas.openxmlformats.org/officeDocument/2006/relationships" id="2147483653" r:id="R93dcbc5a9de54b4b"/>
-    <p:sldLayoutId xmlns:r="http://schemas.openxmlformats.org/officeDocument/2006/relationships" id="2147483654" r:id="R43c2b23c2ce944ce"/>
-    <p:sldLayoutId xmlns:r="http://schemas.openxmlformats.org/officeDocument/2006/relationships" id="2147483655" r:id="R876756c68fdb425f"/>
-    <p:sldLayoutId xmlns:r="http://schemas.openxmlformats.org/officeDocument/2006/relationships" id="2147483656" r:id="R05f156a01d744f33"/>
-    <p:sldLayoutId xmlns:r="http://schemas.openxmlformats.org/officeDocument/2006/relationships" id="2147483657" r:id="R5c1272a891684290"/>
-    <p:sldLayoutId xmlns:r="http://schemas.openxmlformats.org/officeDocument/2006/relationships" id="2147483658" r:id="Rdfa9c71aa9d14355"/>
-    <p:sldLayoutId xmlns:r="http://schemas.openxmlformats.org/officeDocument/2006/relationships" id="2147483659" r:id="R71f0cfe5ef204d63"/>
+    <p:sldLayoutId xmlns:r="http://schemas.openxmlformats.org/officeDocument/2006/relationships" id="2147483649" r:id="R10059eab3d6640cd"/>
+    <p:sldLayoutId xmlns:r="http://schemas.openxmlformats.org/officeDocument/2006/relationships" id="2147483650" r:id="Rf5bc373b09b04035"/>
+    <p:sldLayoutId xmlns:r="http://schemas.openxmlformats.org/officeDocument/2006/relationships" id="2147483651" r:id="R44f9f11305ec4592"/>
+    <p:sldLayoutId xmlns:r="http://schemas.openxmlformats.org/officeDocument/2006/relationships" id="2147483652" r:id="Rb72526fcdde544b6"/>
+    <p:sldLayoutId xmlns:r="http://schemas.openxmlformats.org/officeDocument/2006/relationships" id="2147483653" r:id="Re6e65cbace9f4399"/>
+    <p:sldLayoutId xmlns:r="http://schemas.openxmlformats.org/officeDocument/2006/relationships" id="2147483654" r:id="R9e0a3b959990430e"/>
+    <p:sldLayoutId xmlns:r="http://schemas.openxmlformats.org/officeDocument/2006/relationships" id="2147483655" r:id="Re8c7e4cf106b4b3e"/>
+    <p:sldLayoutId xmlns:r="http://schemas.openxmlformats.org/officeDocument/2006/relationships" id="2147483656" r:id="R98fb430e357d4dd4"/>
+    <p:sldLayoutId xmlns:r="http://schemas.openxmlformats.org/officeDocument/2006/relationships" id="2147483657" r:id="R786c7a0333cb46ad"/>
+    <p:sldLayoutId xmlns:r="http://schemas.openxmlformats.org/officeDocument/2006/relationships" id="2147483658" r:id="Rb21cc7c4610b4145"/>
+    <p:sldLayoutId xmlns:r="http://schemas.openxmlformats.org/officeDocument/2006/relationships" id="2147483659" r:id="R138d54d840224435"/>
   </p:sldLayoutIdLst>
   <p:hf hdr="0" ftr="0" dt="0"/>
   <p:txStyles>

--- a/Mapped Curriculum Lessons/Grade 6/Lesson 07 - Nested Decisions/Nested Decisions - Slides.pptx
+++ b/Mapped Curriculum Lessons/Grade 6/Lesson 07 - Nested Decisions/Nested Decisions - Slides.pptx
@@ -2,28 +2,28 @@
 <file path=ppt/presentation.xml><?xml version="1.0" encoding="utf-8"?>
 <p:presentation xmlns:p="http://schemas.openxmlformats.org/presentationml/2006/main" embedTrueTypeFonts="1" saveSubsetFonts="0">
   <p:sldMasterIdLst>
-    <p:sldMasterId xmlns:r="http://schemas.openxmlformats.org/officeDocument/2006/relationships" id="2147483648" r:id="R813baf7bf2fc4241"/>
+    <p:sldMasterId xmlns:r="http://schemas.openxmlformats.org/officeDocument/2006/relationships" id="2147483648" r:id="R846e8ebd760b4413"/>
   </p:sldMasterIdLst>
   <p:notesMasterIdLst>
-    <p:notesMasterId xmlns:r="http://schemas.openxmlformats.org/officeDocument/2006/relationships" r:id="R7de18248572749b9"/>
+    <p:notesMasterId xmlns:r="http://schemas.openxmlformats.org/officeDocument/2006/relationships" r:id="R1bb3f8dda0b34635"/>
   </p:notesMasterIdLst>
   <p:sldIdLst>
-    <p:sldId xmlns:r="http://schemas.openxmlformats.org/officeDocument/2006/relationships" id="256" r:id="R983a26a7c0e74e71"/>
-    <p:sldId xmlns:r="http://schemas.openxmlformats.org/officeDocument/2006/relationships" id="257" r:id="Rdabc6a37c1e24974"/>
-    <p:sldId xmlns:r="http://schemas.openxmlformats.org/officeDocument/2006/relationships" id="258" r:id="Ra9ce0761a3044eb5"/>
-    <p:sldId xmlns:r="http://schemas.openxmlformats.org/officeDocument/2006/relationships" id="259" r:id="Ra59020cf3e804b72"/>
-    <p:sldId xmlns:r="http://schemas.openxmlformats.org/officeDocument/2006/relationships" id="260" r:id="R569f0a836f1e44ce"/>
-    <p:sldId xmlns:r="http://schemas.openxmlformats.org/officeDocument/2006/relationships" id="261" r:id="R8f65a951c59a4e37"/>
-    <p:sldId xmlns:r="http://schemas.openxmlformats.org/officeDocument/2006/relationships" id="262" r:id="Rf69b383108b5486c"/>
-    <p:sldId xmlns:r="http://schemas.openxmlformats.org/officeDocument/2006/relationships" id="263" r:id="Ra235448db20d4d40"/>
-    <p:sldId xmlns:r="http://schemas.openxmlformats.org/officeDocument/2006/relationships" id="264" r:id="R0edb6e6e679f4cf0"/>
+    <p:sldId xmlns:r="http://schemas.openxmlformats.org/officeDocument/2006/relationships" id="256" r:id="R5b1ce49249cf487c"/>
+    <p:sldId xmlns:r="http://schemas.openxmlformats.org/officeDocument/2006/relationships" id="257" r:id="Rd8fa011e9dc447c6"/>
+    <p:sldId xmlns:r="http://schemas.openxmlformats.org/officeDocument/2006/relationships" id="258" r:id="Ra4eff7877f62488f"/>
+    <p:sldId xmlns:r="http://schemas.openxmlformats.org/officeDocument/2006/relationships" id="259" r:id="R104307a72c654bef"/>
+    <p:sldId xmlns:r="http://schemas.openxmlformats.org/officeDocument/2006/relationships" id="260" r:id="Rddd80ab5edb64509"/>
+    <p:sldId xmlns:r="http://schemas.openxmlformats.org/officeDocument/2006/relationships" id="261" r:id="R7b5755b7bfd44b37"/>
+    <p:sldId xmlns:r="http://schemas.openxmlformats.org/officeDocument/2006/relationships" id="262" r:id="R4ecc8266bdf54e83"/>
+    <p:sldId xmlns:r="http://schemas.openxmlformats.org/officeDocument/2006/relationships" id="263" r:id="Rb09a50fe61314d02"/>
+    <p:sldId xmlns:r="http://schemas.openxmlformats.org/officeDocument/2006/relationships" id="264" r:id="R858a1cacf28d4e3e"/>
   </p:sldIdLst>
   <p:sldSz cx="12192000" cy="6858000"/>
   <p:notesSz cx="6858000" cy="9144000"/>
   <p:embeddedFontLst>
     <p:embeddedFont>
       <p:font typeface="JetBrains Mono"/>
-      <p:regular xmlns:r="http://schemas.openxmlformats.org/officeDocument/2006/relationships" r:id="R12cc283c6e774429"/>
+      <p:regular xmlns:r="http://schemas.openxmlformats.org/officeDocument/2006/relationships" r:id="R5c8224a2639b4444"/>
     </p:embeddedFont>
   </p:embeddedFontLst>
 </p:presentation>
@@ -1071,7 +1071,7 @@
           <p:nvPr/>
         </p:nvPicPr>
         <p:blipFill rotWithShape="1">
-          <a:blip xmlns:r="http://schemas.openxmlformats.org/officeDocument/2006/relationships" xmlns:a="http://schemas.openxmlformats.org/drawingml/2006/main" r:embed="R6361464008fe4459"/>
+          <a:blip xmlns:r="http://schemas.openxmlformats.org/officeDocument/2006/relationships" xmlns:a="http://schemas.openxmlformats.org/drawingml/2006/main" r:embed="R4ee46eda6ebe461f"/>
           <a:stretch xmlns:a="http://schemas.openxmlformats.org/drawingml/2006/main"/>
         </p:blipFill>
         <p:spPr>
@@ -1451,7 +1451,7 @@
           <p:nvPr/>
         </p:nvPicPr>
         <p:blipFill rotWithShape="1">
-          <a:blip xmlns:r="http://schemas.openxmlformats.org/officeDocument/2006/relationships" xmlns:a="http://schemas.openxmlformats.org/drawingml/2006/main" r:embed="Rc711ecc5ec4743b6">
+          <a:blip xmlns:r="http://schemas.openxmlformats.org/officeDocument/2006/relationships" xmlns:a="http://schemas.openxmlformats.org/drawingml/2006/main" r:embed="R3fe07ffc32ab4f41">
             <a:alphaModFix amt="28000"/>
           </a:blip>
           <a:stretch xmlns:a="http://schemas.openxmlformats.org/drawingml/2006/main"/>
@@ -1664,7 +1664,7 @@
           <p:nvPr/>
         </p:nvPicPr>
         <p:blipFill rotWithShape="1">
-          <a:blip xmlns:r="http://schemas.openxmlformats.org/officeDocument/2006/relationships" xmlns:a="http://schemas.openxmlformats.org/drawingml/2006/main" r:embed="R1da9ecbf87294f49">
+          <a:blip xmlns:r="http://schemas.openxmlformats.org/officeDocument/2006/relationships" xmlns:a="http://schemas.openxmlformats.org/drawingml/2006/main" r:embed="R0648cccf50ce4901">
             <a:alphaModFix amt="28000"/>
           </a:blip>
           <a:stretch xmlns:a="http://schemas.openxmlformats.org/drawingml/2006/main"/>
@@ -1899,7 +1899,7 @@
           <p:nvPr/>
         </p:nvPicPr>
         <p:blipFill rotWithShape="1">
-          <a:blip xmlns:r="http://schemas.openxmlformats.org/officeDocument/2006/relationships" xmlns:a="http://schemas.openxmlformats.org/drawingml/2006/main" r:embed="Rd40d8d6a455e452d">
+          <a:blip xmlns:r="http://schemas.openxmlformats.org/officeDocument/2006/relationships" xmlns:a="http://schemas.openxmlformats.org/drawingml/2006/main" r:embed="Rbe75d99c496144c1">
             <a:alphaModFix amt="28000"/>
           </a:blip>
           <a:stretch xmlns:a="http://schemas.openxmlformats.org/drawingml/2006/main"/>
@@ -2176,7 +2176,7 @@
           <p:nvPr/>
         </p:nvPicPr>
         <p:blipFill rotWithShape="1">
-          <a:blip xmlns:r="http://schemas.openxmlformats.org/officeDocument/2006/relationships" xmlns:a="http://schemas.openxmlformats.org/drawingml/2006/main" r:embed="R5120307407594fb0">
+          <a:blip xmlns:r="http://schemas.openxmlformats.org/officeDocument/2006/relationships" xmlns:a="http://schemas.openxmlformats.org/drawingml/2006/main" r:embed="Rc75fc5707b98403d">
             <a:alphaModFix amt="28000"/>
           </a:blip>
           <a:stretch xmlns:a="http://schemas.openxmlformats.org/drawingml/2006/main"/>
@@ -2451,7 +2451,7 @@
           <p:nvPr/>
         </p:nvPicPr>
         <p:blipFill rotWithShape="1">
-          <a:blip xmlns:r="http://schemas.openxmlformats.org/officeDocument/2006/relationships" xmlns:a="http://schemas.openxmlformats.org/drawingml/2006/main" r:embed="Red14d4b68fa04d11">
+          <a:blip xmlns:r="http://schemas.openxmlformats.org/officeDocument/2006/relationships" xmlns:a="http://schemas.openxmlformats.org/drawingml/2006/main" r:embed="R34761ad69e344682">
             <a:alphaModFix amt="28000"/>
           </a:blip>
           <a:stretch xmlns:a="http://schemas.openxmlformats.org/drawingml/2006/main"/>
@@ -2875,7 +2875,7 @@
           <p:nvPr/>
         </p:nvPicPr>
         <p:blipFill rotWithShape="1">
-          <a:blip xmlns:r="http://schemas.openxmlformats.org/officeDocument/2006/relationships" xmlns:a="http://schemas.openxmlformats.org/drawingml/2006/main" r:embed="R74b099d19ff44c49">
+          <a:blip xmlns:r="http://schemas.openxmlformats.org/officeDocument/2006/relationships" xmlns:a="http://schemas.openxmlformats.org/drawingml/2006/main" r:embed="Rac404ac95ca342fc">
             <a:alphaModFix amt="28000"/>
           </a:blip>
           <a:stretch xmlns:a="http://schemas.openxmlformats.org/drawingml/2006/main"/>
@@ -3016,7 +3016,7 @@
           <p:nvPr/>
         </p:nvPicPr>
         <p:blipFill rotWithShape="1">
-          <a:blip xmlns:r="http://schemas.openxmlformats.org/officeDocument/2006/relationships" xmlns:a="http://schemas.openxmlformats.org/drawingml/2006/main" r:embed="R25888017881240d7">
+          <a:blip xmlns:r="http://schemas.openxmlformats.org/officeDocument/2006/relationships" xmlns:a="http://schemas.openxmlformats.org/drawingml/2006/main" r:embed="R0e4bc4a0f5814ee6">
             <a:alphaModFix amt="28000"/>
           </a:blip>
           <a:stretch xmlns:a="http://schemas.openxmlformats.org/drawingml/2006/main"/>
@@ -3130,7 +3130,7 @@
           <p:nvPr/>
         </p:nvPicPr>
         <p:blipFill rotWithShape="1">
-          <a:blip xmlns:r="http://schemas.openxmlformats.org/officeDocument/2006/relationships" xmlns:a="http://schemas.openxmlformats.org/drawingml/2006/main" r:embed="R12d1996a457e4178">
+          <a:blip xmlns:r="http://schemas.openxmlformats.org/officeDocument/2006/relationships" xmlns:a="http://schemas.openxmlformats.org/drawingml/2006/main" r:embed="Rbae43aff1c6f450e">
             <a:alphaModFix amt="28000"/>
           </a:blip>
           <a:stretch xmlns:a="http://schemas.openxmlformats.org/drawingml/2006/main"/>
@@ -3457,7 +3457,7 @@
           <p:nvPr/>
         </p:nvPicPr>
         <p:blipFill rotWithShape="1">
-          <a:blip xmlns:r="http://schemas.openxmlformats.org/officeDocument/2006/relationships" xmlns:a="http://schemas.openxmlformats.org/drawingml/2006/main" r:embed="Re7aadb799b8f4795">
+          <a:blip xmlns:r="http://schemas.openxmlformats.org/officeDocument/2006/relationships" xmlns:a="http://schemas.openxmlformats.org/drawingml/2006/main" r:embed="Re478c27a9fa442ac">
             <a:alphaModFix amt="28000"/>
           </a:blip>
           <a:stretch xmlns:a="http://schemas.openxmlformats.org/drawingml/2006/main"/>
@@ -3745,7 +3745,7 @@
           <p:nvPr/>
         </p:nvPicPr>
         <p:blipFill rotWithShape="1">
-          <a:blip xmlns:r="http://schemas.openxmlformats.org/officeDocument/2006/relationships" xmlns:a="http://schemas.openxmlformats.org/drawingml/2006/main" r:embed="R42b72825d167484a">
+          <a:blip xmlns:r="http://schemas.openxmlformats.org/officeDocument/2006/relationships" xmlns:a="http://schemas.openxmlformats.org/drawingml/2006/main" r:embed="Rf6dd71659dd04d91">
             <a:alphaModFix amt="28000"/>
           </a:blip>
           <a:stretch xmlns:a="http://schemas.openxmlformats.org/drawingml/2006/main"/>
@@ -3982,17 +3982,17 @@
   </p:cSld>
   <p:clrMap bg1="lt1" tx1="dk1" bg2="lt2" tx2="dk2" accent1="accent1" accent2="accent2" accent3="accent3" accent4="accent4" accent5="accent5" accent6="accent6" hlink="hlink" folHlink="folHlink"/>
   <p:sldLayoutIdLst>
-    <p:sldLayoutId xmlns:r="http://schemas.openxmlformats.org/officeDocument/2006/relationships" id="2147483649" r:id="R10059eab3d6640cd"/>
-    <p:sldLayoutId xmlns:r="http://schemas.openxmlformats.org/officeDocument/2006/relationships" id="2147483650" r:id="Rf5bc373b09b04035"/>
-    <p:sldLayoutId xmlns:r="http://schemas.openxmlformats.org/officeDocument/2006/relationships" id="2147483651" r:id="R44f9f11305ec4592"/>
-    <p:sldLayoutId xmlns:r="http://schemas.openxmlformats.org/officeDocument/2006/relationships" id="2147483652" r:id="Rb72526fcdde544b6"/>
-    <p:sldLayoutId xmlns:r="http://schemas.openxmlformats.org/officeDocument/2006/relationships" id="2147483653" r:id="Re6e65cbace9f4399"/>
-    <p:sldLayoutId xmlns:r="http://schemas.openxmlformats.org/officeDocument/2006/relationships" id="2147483654" r:id="R9e0a3b959990430e"/>
-    <p:sldLayoutId xmlns:r="http://schemas.openxmlformats.org/officeDocument/2006/relationships" id="2147483655" r:id="Re8c7e4cf106b4b3e"/>
-    <p:sldLayoutId xmlns:r="http://schemas.openxmlformats.org/officeDocument/2006/relationships" id="2147483656" r:id="R98fb430e357d4dd4"/>
-    <p:sldLayoutId xmlns:r="http://schemas.openxmlformats.org/officeDocument/2006/relationships" id="2147483657" r:id="R786c7a0333cb46ad"/>
-    <p:sldLayoutId xmlns:r="http://schemas.openxmlformats.org/officeDocument/2006/relationships" id="2147483658" r:id="Rb21cc7c4610b4145"/>
-    <p:sldLayoutId xmlns:r="http://schemas.openxmlformats.org/officeDocument/2006/relationships" id="2147483659" r:id="R138d54d840224435"/>
+    <p:sldLayoutId xmlns:r="http://schemas.openxmlformats.org/officeDocument/2006/relationships" id="2147483649" r:id="Redc3df3d958c44f0"/>
+    <p:sldLayoutId xmlns:r="http://schemas.openxmlformats.org/officeDocument/2006/relationships" id="2147483650" r:id="R21d2644be9a5422c"/>
+    <p:sldLayoutId xmlns:r="http://schemas.openxmlformats.org/officeDocument/2006/relationships" id="2147483651" r:id="Re54b42466bca415c"/>
+    <p:sldLayoutId xmlns:r="http://schemas.openxmlformats.org/officeDocument/2006/relationships" id="2147483652" r:id="Rf53fec2d5fca4968"/>
+    <p:sldLayoutId xmlns:r="http://schemas.openxmlformats.org/officeDocument/2006/relationships" id="2147483653" r:id="R6cb4dbf259c64e3c"/>
+    <p:sldLayoutId xmlns:r="http://schemas.openxmlformats.org/officeDocument/2006/relationships" id="2147483654" r:id="Rdfac8b7f45c444d9"/>
+    <p:sldLayoutId xmlns:r="http://schemas.openxmlformats.org/officeDocument/2006/relationships" id="2147483655" r:id="R4e546eff52b74847"/>
+    <p:sldLayoutId xmlns:r="http://schemas.openxmlformats.org/officeDocument/2006/relationships" id="2147483656" r:id="R8e8d9793128e4344"/>
+    <p:sldLayoutId xmlns:r="http://schemas.openxmlformats.org/officeDocument/2006/relationships" id="2147483657" r:id="R7c8c51a8ac824b65"/>
+    <p:sldLayoutId xmlns:r="http://schemas.openxmlformats.org/officeDocument/2006/relationships" id="2147483658" r:id="R279658992d324a09"/>
+    <p:sldLayoutId xmlns:r="http://schemas.openxmlformats.org/officeDocument/2006/relationships" id="2147483659" r:id="Rb28972553631460f"/>
   </p:sldLayoutIdLst>
   <p:hf hdr="0" ftr="0" dt="0"/>
   <p:txStyles>
@@ -4994,24 +4994,13 @@
             <a:r>
               <a:rPr sz="2400">
                 <a:solidFill>
-                  <a:srgbClr val="080808"/>
-                </a:solidFill>
-                <a:latin typeface="JetBrains Mono"/>
-                <a:ea typeface="JetBrains Mono"/>
-                <a:cs typeface="JetBrains Mono"/>
-              </a:rPr>
-              <a:t> </a:t>
-            </a:r>
-            <a:r>
-              <a:rPr sz="2400">
-                <a:solidFill>
                   <a:srgbClr val="067D17"/>
                 </a:solidFill>
                 <a:latin typeface="JetBrains Mono"/>
                 <a:ea typeface="JetBrains Mono"/>
                 <a:cs typeface="JetBrains Mono"/>
               </a:rPr>
-              <a:t>"yes"</a:t>
+              <a:t> "yes"</a:t>
             </a:r>
             <a:r>
               <a:rPr sz="2400">
@@ -5098,24 +5087,13 @@
             <a:r>
               <a:rPr sz="2400">
                 <a:solidFill>
-                  <a:srgbClr val="080808"/>
-                </a:solidFill>
-                <a:latin typeface="JetBrains Mono"/>
-                <a:ea typeface="JetBrains Mono"/>
-                <a:cs typeface="JetBrains Mono"/>
-              </a:rPr>
-              <a:t>    </a:t>
-            </a:r>
-            <a:r>
-              <a:rPr sz="2400">
-                <a:solidFill>
                   <a:srgbClr val="C45E00"/>
                 </a:solidFill>
                 <a:latin typeface="JetBrains Mono"/>
                 <a:ea typeface="JetBrains Mono"/>
                 <a:cs typeface="JetBrains Mono"/>
               </a:rPr>
-              <a:t>if</a:t>
+              <a:t>    if</a:t>
             </a:r>
             <a:r>
               <a:rPr sz="2400">
@@ -5142,24 +5120,13 @@
             <a:r>
               <a:rPr sz="2400">
                 <a:solidFill>
-                  <a:srgbClr val="080808"/>
-                </a:solidFill>
-                <a:latin typeface="JetBrains Mono"/>
-                <a:ea typeface="JetBrains Mono"/>
-                <a:cs typeface="JetBrains Mono"/>
-              </a:rPr>
-              <a:t> </a:t>
-            </a:r>
-            <a:r>
-              <a:rPr sz="2400">
-                <a:solidFill>
                   <a:srgbClr val="067D17"/>
                 </a:solidFill>
                 <a:latin typeface="JetBrains Mono"/>
                 <a:ea typeface="JetBrains Mono"/>
                 <a:cs typeface="JetBrains Mono"/>
               </a:rPr>
-              <a:t>"yes"</a:t>
+              <a:t> "yes"</a:t>
             </a:r>
             <a:r>
               <a:rPr sz="2400">
@@ -5183,24 +5150,13 @@
             <a:r>
               <a:rPr sz="2400">
                 <a:solidFill>
-                  <a:srgbClr val="080808"/>
-                </a:solidFill>
-                <a:latin typeface="JetBrains Mono"/>
-                <a:ea typeface="JetBrains Mono"/>
-                <a:cs typeface="JetBrains Mono"/>
-              </a:rPr>
-              <a:t>        </a:t>
-            </a:r>
-            <a:r>
-              <a:rPr sz="2400">
-                <a:solidFill>
                   <a:srgbClr val="1750EB"/>
                 </a:solidFill>
                 <a:latin typeface="JetBrains Mono"/>
                 <a:ea typeface="JetBrains Mono"/>
                 <a:cs typeface="JetBrains Mono"/>
               </a:rPr>
-              <a:t>print</a:t>
+              <a:t>        print</a:t>
             </a:r>
             <a:r>
               <a:rPr sz="2400">
@@ -5246,24 +5202,13 @@
             <a:r>
               <a:rPr sz="2400">
                 <a:solidFill>
-                  <a:srgbClr val="080808"/>
-                </a:solidFill>
-                <a:latin typeface="JetBrains Mono"/>
-                <a:ea typeface="JetBrains Mono"/>
-                <a:cs typeface="JetBrains Mono"/>
-              </a:rPr>
-              <a:t>    </a:t>
-            </a:r>
-            <a:r>
-              <a:rPr sz="2400">
-                <a:solidFill>
                   <a:srgbClr val="C45E00"/>
                 </a:solidFill>
                 <a:latin typeface="JetBrains Mono"/>
                 <a:ea typeface="JetBrains Mono"/>
                 <a:cs typeface="JetBrains Mono"/>
               </a:rPr>
-              <a:t>else</a:t>
+              <a:t>    else</a:t>
             </a:r>
             <a:r>
               <a:rPr sz="2400">
@@ -5287,24 +5232,13 @@
             <a:r>
               <a:rPr sz="2400">
                 <a:solidFill>
-                  <a:srgbClr val="080808"/>
-                </a:solidFill>
-                <a:latin typeface="JetBrains Mono"/>
-                <a:ea typeface="JetBrains Mono"/>
-                <a:cs typeface="JetBrains Mono"/>
-              </a:rPr>
-              <a:t>        </a:t>
-            </a:r>
-            <a:r>
-              <a:rPr sz="2400">
-                <a:solidFill>
                   <a:srgbClr val="1750EB"/>
                 </a:solidFill>
                 <a:latin typeface="JetBrains Mono"/>
                 <a:ea typeface="JetBrains Mono"/>
                 <a:cs typeface="JetBrains Mono"/>
               </a:rPr>
-              <a:t>print</a:t>
+              <a:t>        print</a:t>
             </a:r>
             <a:r>
               <a:rPr sz="2400">
@@ -5380,24 +5314,13 @@
             <a:r>
               <a:rPr sz="2400">
                 <a:solidFill>
-                  <a:srgbClr val="080808"/>
-                </a:solidFill>
-                <a:latin typeface="JetBrains Mono"/>
-                <a:ea typeface="JetBrains Mono"/>
-                <a:cs typeface="JetBrains Mono"/>
-              </a:rPr>
-              <a:t>    </a:t>
-            </a:r>
-            <a:r>
-              <a:rPr sz="2400">
-                <a:solidFill>
                   <a:srgbClr val="1750EB"/>
                 </a:solidFill>
                 <a:latin typeface="JetBrains Mono"/>
                 <a:ea typeface="JetBrains Mono"/>
                 <a:cs typeface="JetBrains Mono"/>
               </a:rPr>
-              <a:t>print</a:t>
+              <a:t>    print</a:t>
             </a:r>
             <a:r>
               <a:rPr sz="2400">
@@ -5816,24 +5739,13 @@
             <a:r>
               <a:rPr sz="2400">
                 <a:solidFill>
-                  <a:srgbClr val="080808"/>
-                </a:solidFill>
-                <a:latin typeface="JetBrains Mono"/>
-                <a:ea typeface="JetBrains Mono"/>
-                <a:cs typeface="JetBrains Mono"/>
-              </a:rPr>
-              <a:t> </a:t>
-            </a:r>
-            <a:r>
-              <a:rPr sz="2400">
-                <a:solidFill>
                   <a:srgbClr val="067D17"/>
                 </a:solidFill>
                 <a:latin typeface="JetBrains Mono"/>
                 <a:ea typeface="JetBrains Mono"/>
                 <a:cs typeface="JetBrains Mono"/>
               </a:rPr>
-              <a:t>"yes"</a:t>
+              <a:t> "yes"</a:t>
             </a:r>
             <a:r>
               <a:rPr sz="2400">
@@ -5920,24 +5832,13 @@
             <a:r>
               <a:rPr sz="2400">
                 <a:solidFill>
-                  <a:srgbClr val="080808"/>
-                </a:solidFill>
-                <a:latin typeface="JetBrains Mono"/>
-                <a:ea typeface="JetBrains Mono"/>
-                <a:cs typeface="JetBrains Mono"/>
-              </a:rPr>
-              <a:t>    </a:t>
-            </a:r>
-            <a:r>
-              <a:rPr sz="2400">
-                <a:solidFill>
                   <a:srgbClr val="C45E00"/>
                 </a:solidFill>
                 <a:latin typeface="JetBrains Mono"/>
                 <a:ea typeface="JetBrains Mono"/>
                 <a:cs typeface="JetBrains Mono"/>
               </a:rPr>
-              <a:t>if</a:t>
+              <a:t>    if</a:t>
             </a:r>
             <a:r>
               <a:rPr sz="2400">
@@ -5964,24 +5865,13 @@
             <a:r>
               <a:rPr sz="2400">
                 <a:solidFill>
-                  <a:srgbClr val="080808"/>
-                </a:solidFill>
-                <a:latin typeface="JetBrains Mono"/>
-                <a:ea typeface="JetBrains Mono"/>
-                <a:cs typeface="JetBrains Mono"/>
-              </a:rPr>
-              <a:t> </a:t>
-            </a:r>
-            <a:r>
-              <a:rPr sz="2400">
-                <a:solidFill>
                   <a:srgbClr val="067D17"/>
                 </a:solidFill>
                 <a:latin typeface="JetBrains Mono"/>
                 <a:ea typeface="JetBrains Mono"/>
                 <a:cs typeface="JetBrains Mono"/>
               </a:rPr>
-              <a:t>"yes"</a:t>
+              <a:t> "yes"</a:t>
             </a:r>
             <a:r>
               <a:rPr sz="2400">
@@ -6005,24 +5895,13 @@
             <a:r>
               <a:rPr sz="2400">
                 <a:solidFill>
-                  <a:srgbClr val="080808"/>
-                </a:solidFill>
-                <a:latin typeface="JetBrains Mono"/>
-                <a:ea typeface="JetBrains Mono"/>
-                <a:cs typeface="JetBrains Mono"/>
-              </a:rPr>
-              <a:t>        </a:t>
-            </a:r>
-            <a:r>
-              <a:rPr sz="2400">
-                <a:solidFill>
                   <a:srgbClr val="1750EB"/>
                 </a:solidFill>
                 <a:latin typeface="JetBrains Mono"/>
                 <a:ea typeface="JetBrains Mono"/>
                 <a:cs typeface="JetBrains Mono"/>
               </a:rPr>
-              <a:t>print</a:t>
+              <a:t>        print</a:t>
             </a:r>
             <a:r>
               <a:rPr sz="2400">
@@ -6068,24 +5947,13 @@
             <a:r>
               <a:rPr sz="2400">
                 <a:solidFill>
-                  <a:srgbClr val="080808"/>
-                </a:solidFill>
-                <a:latin typeface="JetBrains Mono"/>
-                <a:ea typeface="JetBrains Mono"/>
-                <a:cs typeface="JetBrains Mono"/>
-              </a:rPr>
-              <a:t>    </a:t>
-            </a:r>
-            <a:r>
-              <a:rPr sz="2400">
-                <a:solidFill>
                   <a:srgbClr val="C45E00"/>
                 </a:solidFill>
                 <a:latin typeface="JetBrains Mono"/>
                 <a:ea typeface="JetBrains Mono"/>
                 <a:cs typeface="JetBrains Mono"/>
               </a:rPr>
-              <a:t>else</a:t>
+              <a:t>    else</a:t>
             </a:r>
             <a:r>
               <a:rPr sz="2400">
@@ -6109,24 +5977,13 @@
             <a:r>
               <a:rPr sz="2400">
                 <a:solidFill>
-                  <a:srgbClr val="080808"/>
-                </a:solidFill>
-                <a:latin typeface="JetBrains Mono"/>
-                <a:ea typeface="JetBrains Mono"/>
-                <a:cs typeface="JetBrains Mono"/>
-              </a:rPr>
-              <a:t>        </a:t>
-            </a:r>
-            <a:r>
-              <a:rPr sz="2400">
-                <a:solidFill>
                   <a:srgbClr val="1750EB"/>
                 </a:solidFill>
                 <a:latin typeface="JetBrains Mono"/>
                 <a:ea typeface="JetBrains Mono"/>
                 <a:cs typeface="JetBrains Mono"/>
               </a:rPr>
-              <a:t>print</a:t>
+              <a:t>        print</a:t>
             </a:r>
             <a:r>
               <a:rPr sz="2400">
@@ -6202,24 +6059,13 @@
             <a:r>
               <a:rPr sz="2400">
                 <a:solidFill>
-                  <a:srgbClr val="080808"/>
-                </a:solidFill>
-                <a:latin typeface="JetBrains Mono"/>
-                <a:ea typeface="JetBrains Mono"/>
-                <a:cs typeface="JetBrains Mono"/>
-              </a:rPr>
-              <a:t>    </a:t>
-            </a:r>
-            <a:r>
-              <a:rPr sz="2400">
-                <a:solidFill>
                   <a:srgbClr val="1750EB"/>
                 </a:solidFill>
                 <a:latin typeface="JetBrains Mono"/>
                 <a:ea typeface="JetBrains Mono"/>
                 <a:cs typeface="JetBrains Mono"/>
               </a:rPr>
-              <a:t>print</a:t>
+              <a:t>    print</a:t>
             </a:r>
             <a:r>
               <a:rPr sz="2400">
@@ -6638,24 +6484,13 @@
             <a:r>
               <a:rPr sz="2400">
                 <a:solidFill>
-                  <a:srgbClr val="080808"/>
-                </a:solidFill>
-                <a:latin typeface="JetBrains Mono"/>
-                <a:ea typeface="JetBrains Mono"/>
-                <a:cs typeface="JetBrains Mono"/>
-              </a:rPr>
-              <a:t> </a:t>
-            </a:r>
-            <a:r>
-              <a:rPr sz="2400">
-                <a:solidFill>
                   <a:srgbClr val="067D17"/>
                 </a:solidFill>
                 <a:latin typeface="JetBrains Mono"/>
                 <a:ea typeface="JetBrains Mono"/>
                 <a:cs typeface="JetBrains Mono"/>
               </a:rPr>
-              <a:t>"yes"</a:t>
+              <a:t> "yes"</a:t>
             </a:r>
             <a:r>
               <a:rPr sz="2400">
@@ -6742,24 +6577,13 @@
             <a:r>
               <a:rPr sz="2400">
                 <a:solidFill>
-                  <a:srgbClr val="080808"/>
-                </a:solidFill>
-                <a:latin typeface="JetBrains Mono"/>
-                <a:ea typeface="JetBrains Mono"/>
-                <a:cs typeface="JetBrains Mono"/>
-              </a:rPr>
-              <a:t>    </a:t>
-            </a:r>
-            <a:r>
-              <a:rPr sz="2400">
-                <a:solidFill>
                   <a:srgbClr val="C45E00"/>
                 </a:solidFill>
                 <a:latin typeface="JetBrains Mono"/>
                 <a:ea typeface="JetBrains Mono"/>
                 <a:cs typeface="JetBrains Mono"/>
               </a:rPr>
-              <a:t>if</a:t>
+              <a:t>    if</a:t>
             </a:r>
             <a:r>
               <a:rPr sz="2400">
@@ -6786,24 +6610,13 @@
             <a:r>
               <a:rPr sz="2400">
                 <a:solidFill>
-                  <a:srgbClr val="080808"/>
-                </a:solidFill>
-                <a:latin typeface="JetBrains Mono"/>
-                <a:ea typeface="JetBrains Mono"/>
-                <a:cs typeface="JetBrains Mono"/>
-              </a:rPr>
-              <a:t> </a:t>
-            </a:r>
-            <a:r>
-              <a:rPr sz="2400">
-                <a:solidFill>
                   <a:srgbClr val="067D17"/>
                 </a:solidFill>
                 <a:latin typeface="JetBrains Mono"/>
                 <a:ea typeface="JetBrains Mono"/>
                 <a:cs typeface="JetBrains Mono"/>
               </a:rPr>
-              <a:t>"yes"</a:t>
+              <a:t> "yes"</a:t>
             </a:r>
             <a:r>
               <a:rPr sz="2400">
@@ -6827,24 +6640,13 @@
             <a:r>
               <a:rPr sz="2400">
                 <a:solidFill>
-                  <a:srgbClr val="080808"/>
-                </a:solidFill>
-                <a:latin typeface="JetBrains Mono"/>
-                <a:ea typeface="JetBrains Mono"/>
-                <a:cs typeface="JetBrains Mono"/>
-              </a:rPr>
-              <a:t>        </a:t>
-            </a:r>
-            <a:r>
-              <a:rPr sz="2400">
-                <a:solidFill>
                   <a:srgbClr val="1750EB"/>
                 </a:solidFill>
                 <a:latin typeface="JetBrains Mono"/>
                 <a:ea typeface="JetBrains Mono"/>
                 <a:cs typeface="JetBrains Mono"/>
               </a:rPr>
-              <a:t>print</a:t>
+              <a:t>        print</a:t>
             </a:r>
             <a:r>
               <a:rPr sz="2400">
@@ -6890,24 +6692,13 @@
             <a:r>
               <a:rPr sz="2400">
                 <a:solidFill>
-                  <a:srgbClr val="080808"/>
-                </a:solidFill>
-                <a:latin typeface="JetBrains Mono"/>
-                <a:ea typeface="JetBrains Mono"/>
-                <a:cs typeface="JetBrains Mono"/>
-              </a:rPr>
-              <a:t>    </a:t>
-            </a:r>
-            <a:r>
-              <a:rPr sz="2400">
-                <a:solidFill>
                   <a:srgbClr val="C45E00"/>
                 </a:solidFill>
                 <a:latin typeface="JetBrains Mono"/>
                 <a:ea typeface="JetBrains Mono"/>
                 <a:cs typeface="JetBrains Mono"/>
               </a:rPr>
-              <a:t>else</a:t>
+              <a:t>    else</a:t>
             </a:r>
             <a:r>
               <a:rPr sz="2400">
@@ -6931,24 +6722,13 @@
             <a:r>
               <a:rPr sz="2400">
                 <a:solidFill>
-                  <a:srgbClr val="080808"/>
-                </a:solidFill>
-                <a:latin typeface="JetBrains Mono"/>
-                <a:ea typeface="JetBrains Mono"/>
-                <a:cs typeface="JetBrains Mono"/>
-              </a:rPr>
-              <a:t>        </a:t>
-            </a:r>
-            <a:r>
-              <a:rPr sz="2400">
-                <a:solidFill>
                   <a:srgbClr val="1750EB"/>
                 </a:solidFill>
                 <a:latin typeface="JetBrains Mono"/>
                 <a:ea typeface="JetBrains Mono"/>
                 <a:cs typeface="JetBrains Mono"/>
               </a:rPr>
-              <a:t>print</a:t>
+              <a:t>        print</a:t>
             </a:r>
             <a:r>
               <a:rPr sz="2400">
@@ -7024,24 +6804,13 @@
             <a:r>
               <a:rPr sz="2400">
                 <a:solidFill>
-                  <a:srgbClr val="080808"/>
-                </a:solidFill>
-                <a:latin typeface="JetBrains Mono"/>
-                <a:ea typeface="JetBrains Mono"/>
-                <a:cs typeface="JetBrains Mono"/>
-              </a:rPr>
-              <a:t>    </a:t>
-            </a:r>
-            <a:r>
-              <a:rPr sz="2400">
-                <a:solidFill>
                   <a:srgbClr val="1750EB"/>
                 </a:solidFill>
                 <a:latin typeface="JetBrains Mono"/>
                 <a:ea typeface="JetBrains Mono"/>
                 <a:cs typeface="JetBrains Mono"/>
               </a:rPr>
-              <a:t>print</a:t>
+              <a:t>    print</a:t>
             </a:r>
             <a:r>
               <a:rPr sz="2400">
@@ -7713,24 +7482,13 @@
             <a:r>
               <a:rPr sz="1200">
                 <a:solidFill>
-                  <a:srgbClr val="080808"/>
-                </a:solidFill>
-                <a:latin typeface="JetBrains Mono"/>
-                <a:ea typeface="JetBrains Mono"/>
-                <a:cs typeface="JetBrains Mono"/>
-              </a:rPr>
-              <a:t> </a:t>
-            </a:r>
-            <a:r>
-              <a:rPr sz="1200">
-                <a:solidFill>
                   <a:srgbClr val="067D17"/>
                 </a:solidFill>
                 <a:latin typeface="JetBrains Mono"/>
                 <a:ea typeface="JetBrains Mono"/>
                 <a:cs typeface="JetBrains Mono"/>
               </a:rPr>
-              <a:t>"yes"</a:t>
+              <a:t> "yes"</a:t>
             </a:r>
             <a:r>
               <a:rPr sz="1200">
@@ -7821,24 +7579,13 @@
             <a:r>
               <a:rPr sz="1200">
                 <a:solidFill>
-                  <a:srgbClr val="080808"/>
-                </a:solidFill>
-                <a:latin typeface="JetBrains Mono"/>
-                <a:ea typeface="JetBrains Mono"/>
-                <a:cs typeface="JetBrains Mono"/>
-              </a:rPr>
-              <a:t>    </a:t>
-            </a:r>
-            <a:r>
-              <a:rPr sz="1200">
-                <a:solidFill>
                   <a:srgbClr val="C45E00"/>
                 </a:solidFill>
                 <a:latin typeface="JetBrains Mono"/>
                 <a:ea typeface="JetBrains Mono"/>
                 <a:cs typeface="JetBrains Mono"/>
               </a:rPr>
-              <a:t>if</a:t>
+              <a:t>    if</a:t>
             </a:r>
             <a:r>
               <a:rPr sz="1200">
@@ -7865,24 +7612,13 @@
             <a:r>
               <a:rPr sz="1200">
                 <a:solidFill>
-                  <a:srgbClr val="080808"/>
-                </a:solidFill>
-                <a:latin typeface="JetBrains Mono"/>
-                <a:ea typeface="JetBrains Mono"/>
-                <a:cs typeface="JetBrains Mono"/>
-              </a:rPr>
-              <a:t> </a:t>
-            </a:r>
-            <a:r>
-              <a:rPr sz="1200">
-                <a:solidFill>
                   <a:srgbClr val="067D17"/>
                 </a:solidFill>
                 <a:latin typeface="JetBrains Mono"/>
                 <a:ea typeface="JetBrains Mono"/>
                 <a:cs typeface="JetBrains Mono"/>
               </a:rPr>
-              <a:t>"yes"</a:t>
+              <a:t> "yes"</a:t>
             </a:r>
             <a:r>
               <a:rPr sz="1200">
@@ -7908,24 +7644,13 @@
             <a:r>
               <a:rPr sz="1200">
                 <a:solidFill>
-                  <a:srgbClr val="080808"/>
-                </a:solidFill>
-                <a:latin typeface="JetBrains Mono"/>
-                <a:ea typeface="JetBrains Mono"/>
-                <a:cs typeface="JetBrains Mono"/>
-              </a:rPr>
-              <a:t>        </a:t>
-            </a:r>
-            <a:r>
-              <a:rPr sz="1200">
-                <a:solidFill>
                   <a:srgbClr val="1750EB"/>
                 </a:solidFill>
                 <a:latin typeface="JetBrains Mono"/>
                 <a:ea typeface="JetBrains Mono"/>
                 <a:cs typeface="JetBrains Mono"/>
               </a:rPr>
-              <a:t>print</a:t>
+              <a:t>        print</a:t>
             </a:r>
             <a:r>
               <a:rPr sz="1200">
@@ -7973,23 +7698,98 @@
             <a:r>
               <a:rPr sz="1200">
                 <a:solidFill>
-                  <a:srgbClr val="080808"/>
-                </a:solidFill>
-                <a:latin typeface="JetBrains Mono"/>
-                <a:ea typeface="JetBrains Mono"/>
-                <a:cs typeface="JetBrains Mono"/>
-              </a:rPr>
-              <a:t>    </a:t>
-            </a:r>
-            <a:r>
-              <a:rPr sz="1200">
-                <a:solidFill>
                   <a:srgbClr val="C45E00"/>
                 </a:solidFill>
                 <a:latin typeface="JetBrains Mono"/>
                 <a:ea typeface="JetBrains Mono"/>
                 <a:cs typeface="JetBrains Mono"/>
               </a:rPr>
+              <a:t>    else</a:t>
+            </a:r>
+            <a:r>
+              <a:rPr sz="1200">
+                <a:solidFill>
+                  <a:srgbClr val="080808"/>
+                </a:solidFill>
+                <a:latin typeface="JetBrains Mono"/>
+                <a:ea typeface="JetBrains Mono"/>
+                <a:cs typeface="JetBrains Mono"/>
+              </a:rPr>
+              <a:t>:</a:t>
+            </a:r>
+            <a:br>
+              <a:rPr sz="1200">
+                <a:solidFill>
+                  <a:srgbClr val="080808"/>
+                </a:solidFill>
+                <a:latin typeface="JetBrains Mono"/>
+                <a:ea typeface="JetBrains Mono"/>
+                <a:cs typeface="JetBrains Mono"/>
+              </a:rPr>
+            </a:br>
+            <a:r>
+              <a:rPr sz="1200">
+                <a:solidFill>
+                  <a:srgbClr val="1750EB"/>
+                </a:solidFill>
+                <a:latin typeface="JetBrains Mono"/>
+                <a:ea typeface="JetBrains Mono"/>
+                <a:cs typeface="JetBrains Mono"/>
+              </a:rPr>
+              <a:t>        print</a:t>
+            </a:r>
+            <a:r>
+              <a:rPr sz="1200">
+                <a:solidFill>
+                  <a:srgbClr val="080808"/>
+                </a:solidFill>
+                <a:latin typeface="JetBrains Mono"/>
+                <a:ea typeface="JetBrains Mono"/>
+                <a:cs typeface="JetBrains Mono"/>
+              </a:rPr>
+              <a:t>(</a:t>
+            </a:r>
+            <a:r>
+              <a:rPr sz="1200">
+                <a:solidFill>
+                  <a:srgbClr val="067D17"/>
+                </a:solidFill>
+                <a:latin typeface="JetBrains Mono"/>
+                <a:ea typeface="JetBrains Mono"/>
+                <a:cs typeface="JetBrains Mono"/>
+              </a:rPr>
+              <a:t>"Take an umbrella."</a:t>
+            </a:r>
+            <a:r>
+              <a:rPr sz="1200">
+                <a:solidFill>
+                  <a:srgbClr val="080808"/>
+                </a:solidFill>
+                <a:latin typeface="JetBrains Mono"/>
+                <a:ea typeface="JetBrains Mono"/>
+                <a:cs typeface="JetBrains Mono"/>
+              </a:rPr>
+              <a:t>)</a:t>
+            </a:r>
+            <a:br>
+              <a:rPr sz="1200">
+                <a:solidFill>
+                  <a:srgbClr val="080808"/>
+                </a:solidFill>
+                <a:latin typeface="JetBrains Mono"/>
+                <a:ea typeface="JetBrains Mono"/>
+                <a:cs typeface="JetBrains Mono"/>
+              </a:rPr>
+            </a:br>
+            <a:r>
+              <a:rPr sz="1200">
+                <a:solidFill>
+                  <a:srgbClr val="C45E00"/>
+                </a:solidFill>
+                <a:latin typeface="JetBrains Mono"/>
+                <a:ea typeface="JetBrains Mono"/>
+                <a:cs typeface="JetBrains Mono"/>
+              </a:rPr>
               <a:t>else</a:t>
             </a:r>
             <a:r>
@@ -8016,121 +7816,13 @@
             <a:r>
               <a:rPr sz="1200">
                 <a:solidFill>
-                  <a:srgbClr val="080808"/>
-                </a:solidFill>
-                <a:latin typeface="JetBrains Mono"/>
-                <a:ea typeface="JetBrains Mono"/>
-                <a:cs typeface="JetBrains Mono"/>
-              </a:rPr>
-              <a:t>        </a:t>
-            </a:r>
-            <a:r>
-              <a:rPr sz="1200">
-                <a:solidFill>
                   <a:srgbClr val="1750EB"/>
                 </a:solidFill>
                 <a:latin typeface="JetBrains Mono"/>
                 <a:ea typeface="JetBrains Mono"/>
                 <a:cs typeface="JetBrains Mono"/>
               </a:rPr>
-              <a:t>print</a:t>
-            </a:r>
-            <a:r>
-              <a:rPr sz="1200">
-                <a:solidFill>
-                  <a:srgbClr val="080808"/>
-                </a:solidFill>
-                <a:latin typeface="JetBrains Mono"/>
-                <a:ea typeface="JetBrains Mono"/>
-                <a:cs typeface="JetBrains Mono"/>
-              </a:rPr>
-              <a:t>(</a:t>
-            </a:r>
-            <a:r>
-              <a:rPr sz="1200">
-                <a:solidFill>
-                  <a:srgbClr val="067D17"/>
-                </a:solidFill>
-                <a:latin typeface="JetBrains Mono"/>
-                <a:ea typeface="JetBrains Mono"/>
-                <a:cs typeface="JetBrains Mono"/>
-              </a:rPr>
-              <a:t>"Take an umbrella."</a:t>
-            </a:r>
-            <a:r>
-              <a:rPr sz="1200">
-                <a:solidFill>
-                  <a:srgbClr val="080808"/>
-                </a:solidFill>
-                <a:latin typeface="JetBrains Mono"/>
-                <a:ea typeface="JetBrains Mono"/>
-                <a:cs typeface="JetBrains Mono"/>
-              </a:rPr>
-              <a:t>)</a:t>
-            </a:r>
-            <a:br>
-              <a:rPr sz="1200">
-                <a:solidFill>
-                  <a:srgbClr val="080808"/>
-                </a:solidFill>
-                <a:latin typeface="JetBrains Mono"/>
-                <a:ea typeface="JetBrains Mono"/>
-                <a:cs typeface="JetBrains Mono"/>
-              </a:rPr>
-            </a:br>
-            <a:r>
-              <a:rPr sz="1200">
-                <a:solidFill>
-                  <a:srgbClr val="C45E00"/>
-                </a:solidFill>
-                <a:latin typeface="JetBrains Mono"/>
-                <a:ea typeface="JetBrains Mono"/>
-                <a:cs typeface="JetBrains Mono"/>
-              </a:rPr>
-              <a:t>else</a:t>
-            </a:r>
-            <a:r>
-              <a:rPr sz="1200">
-                <a:solidFill>
-                  <a:srgbClr val="080808"/>
-                </a:solidFill>
-                <a:latin typeface="JetBrains Mono"/>
-                <a:ea typeface="JetBrains Mono"/>
-                <a:cs typeface="JetBrains Mono"/>
-              </a:rPr>
-              <a:t>:</a:t>
-            </a:r>
-            <a:br>
-              <a:rPr sz="1200">
-                <a:solidFill>
-                  <a:srgbClr val="080808"/>
-                </a:solidFill>
-                <a:latin typeface="JetBrains Mono"/>
-                <a:ea typeface="JetBrains Mono"/>
-                <a:cs typeface="JetBrains Mono"/>
-              </a:rPr>
-            </a:br>
-            <a:r>
-              <a:rPr sz="1200">
-                <a:solidFill>
-                  <a:srgbClr val="080808"/>
-                </a:solidFill>
-                <a:latin typeface="JetBrains Mono"/>
-                <a:ea typeface="JetBrains Mono"/>
-                <a:cs typeface="JetBrains Mono"/>
-              </a:rPr>
-              <a:t>    </a:t>
-            </a:r>
-            <a:r>
-              <a:rPr sz="1200">
-                <a:solidFill>
-                  <a:srgbClr val="1750EB"/>
-                </a:solidFill>
-                <a:latin typeface="JetBrains Mono"/>
-                <a:ea typeface="JetBrains Mono"/>
-                <a:cs typeface="JetBrains Mono"/>
-              </a:rPr>
-              <a:t>print</a:t>
+              <a:t>    print</a:t>
             </a:r>
             <a:r>
               <a:rPr sz="1200">
@@ -8864,24 +8556,13 @@
             <a:r>
               <a:rPr sz="1200">
                 <a:solidFill>
-                  <a:srgbClr val="080808"/>
-                </a:solidFill>
-                <a:latin typeface="JetBrains Mono"/>
-                <a:ea typeface="JetBrains Mono"/>
-                <a:cs typeface="JetBrains Mono"/>
-              </a:rPr>
-              <a:t> </a:t>
-            </a:r>
-            <a:r>
-              <a:rPr sz="1200">
-                <a:solidFill>
                   <a:srgbClr val="067D17"/>
                 </a:solidFill>
                 <a:latin typeface="JetBrains Mono"/>
                 <a:ea typeface="JetBrains Mono"/>
                 <a:cs typeface="JetBrains Mono"/>
               </a:rPr>
-              <a:t>"yes"</a:t>
+              <a:t> "yes"</a:t>
             </a:r>
             <a:r>
               <a:rPr sz="1200">
@@ -8972,24 +8653,13 @@
             <a:r>
               <a:rPr sz="1200">
                 <a:solidFill>
-                  <a:srgbClr val="080808"/>
-                </a:solidFill>
-                <a:latin typeface="JetBrains Mono"/>
-                <a:ea typeface="JetBrains Mono"/>
-                <a:cs typeface="JetBrains Mono"/>
-              </a:rPr>
-              <a:t>    </a:t>
-            </a:r>
-            <a:r>
-              <a:rPr sz="1200">
-                <a:solidFill>
                   <a:srgbClr val="C45E00"/>
                 </a:solidFill>
                 <a:latin typeface="JetBrains Mono"/>
                 <a:ea typeface="JetBrains Mono"/>
                 <a:cs typeface="JetBrains Mono"/>
               </a:rPr>
-              <a:t>if</a:t>
+              <a:t>    if</a:t>
             </a:r>
             <a:r>
               <a:rPr sz="1200">
@@ -9016,24 +8686,13 @@
             <a:r>
               <a:rPr sz="1200">
                 <a:solidFill>
-                  <a:srgbClr val="080808"/>
-                </a:solidFill>
-                <a:latin typeface="JetBrains Mono"/>
-                <a:ea typeface="JetBrains Mono"/>
-                <a:cs typeface="JetBrains Mono"/>
-              </a:rPr>
-              <a:t> </a:t>
-            </a:r>
-            <a:r>
-              <a:rPr sz="1200">
-                <a:solidFill>
                   <a:srgbClr val="067D17"/>
                 </a:solidFill>
                 <a:latin typeface="JetBrains Mono"/>
                 <a:ea typeface="JetBrains Mono"/>
                 <a:cs typeface="JetBrains Mono"/>
               </a:rPr>
-              <a:t>"yes"</a:t>
+              <a:t> "yes"</a:t>
             </a:r>
             <a:r>
               <a:rPr sz="1200">
@@ -9059,24 +8718,13 @@
             <a:r>
               <a:rPr sz="1200">
                 <a:solidFill>
-                  <a:srgbClr val="080808"/>
-                </a:solidFill>
-                <a:latin typeface="JetBrains Mono"/>
-                <a:ea typeface="JetBrains Mono"/>
-                <a:cs typeface="JetBrains Mono"/>
-              </a:rPr>
-              <a:t>        </a:t>
-            </a:r>
-            <a:r>
-              <a:rPr sz="1200">
-                <a:solidFill>
                   <a:srgbClr val="1750EB"/>
                 </a:solidFill>
                 <a:latin typeface="JetBrains Mono"/>
                 <a:ea typeface="JetBrains Mono"/>
                 <a:cs typeface="JetBrains Mono"/>
               </a:rPr>
-              <a:t>print</a:t>
+              <a:t>        print</a:t>
             </a:r>
             <a:r>
               <a:rPr sz="1200">
@@ -9124,23 +8772,98 @@
             <a:r>
               <a:rPr sz="1200">
                 <a:solidFill>
-                  <a:srgbClr val="080808"/>
-                </a:solidFill>
-                <a:latin typeface="JetBrains Mono"/>
-                <a:ea typeface="JetBrains Mono"/>
-                <a:cs typeface="JetBrains Mono"/>
-              </a:rPr>
-              <a:t>    </a:t>
-            </a:r>
-            <a:r>
-              <a:rPr sz="1200">
-                <a:solidFill>
                   <a:srgbClr val="C45E00"/>
                 </a:solidFill>
                 <a:latin typeface="JetBrains Mono"/>
                 <a:ea typeface="JetBrains Mono"/>
                 <a:cs typeface="JetBrains Mono"/>
               </a:rPr>
+              <a:t>    else</a:t>
+            </a:r>
+            <a:r>
+              <a:rPr sz="1200">
+                <a:solidFill>
+                  <a:srgbClr val="080808"/>
+                </a:solidFill>
+                <a:latin typeface="JetBrains Mono"/>
+                <a:ea typeface="JetBrains Mono"/>
+                <a:cs typeface="JetBrains Mono"/>
+              </a:rPr>
+              <a:t>:</a:t>
+            </a:r>
+            <a:br>
+              <a:rPr sz="1200">
+                <a:solidFill>
+                  <a:srgbClr val="080808"/>
+                </a:solidFill>
+                <a:latin typeface="JetBrains Mono"/>
+                <a:ea typeface="JetBrains Mono"/>
+                <a:cs typeface="JetBrains Mono"/>
+              </a:rPr>
+            </a:br>
+            <a:r>
+              <a:rPr sz="1200">
+                <a:solidFill>
+                  <a:srgbClr val="1750EB"/>
+                </a:solidFill>
+                <a:latin typeface="JetBrains Mono"/>
+                <a:ea typeface="JetBrains Mono"/>
+                <a:cs typeface="JetBrains Mono"/>
+              </a:rPr>
+              <a:t>        print</a:t>
+            </a:r>
+            <a:r>
+              <a:rPr sz="1200">
+                <a:solidFill>
+                  <a:srgbClr val="080808"/>
+                </a:solidFill>
+                <a:latin typeface="JetBrains Mono"/>
+                <a:ea typeface="JetBrains Mono"/>
+                <a:cs typeface="JetBrains Mono"/>
+              </a:rPr>
+              <a:t>(</a:t>
+            </a:r>
+            <a:r>
+              <a:rPr sz="1200">
+                <a:solidFill>
+                  <a:srgbClr val="067D17"/>
+                </a:solidFill>
+                <a:latin typeface="JetBrains Mono"/>
+                <a:ea typeface="JetBrains Mono"/>
+                <a:cs typeface="JetBrains Mono"/>
+              </a:rPr>
+              <a:t>"Take an umbrella."</a:t>
+            </a:r>
+            <a:r>
+              <a:rPr sz="1200">
+                <a:solidFill>
+                  <a:srgbClr val="080808"/>
+                </a:solidFill>
+                <a:latin typeface="JetBrains Mono"/>
+                <a:ea typeface="JetBrains Mono"/>
+                <a:cs typeface="JetBrains Mono"/>
+              </a:rPr>
+              <a:t>)</a:t>
+            </a:r>
+            <a:br>
+              <a:rPr sz="1200">
+                <a:solidFill>
+                  <a:srgbClr val="080808"/>
+                </a:solidFill>
+                <a:latin typeface="JetBrains Mono"/>
+                <a:ea typeface="JetBrains Mono"/>
+                <a:cs typeface="JetBrains Mono"/>
+              </a:rPr>
+            </a:br>
+            <a:r>
+              <a:rPr sz="1200">
+                <a:solidFill>
+                  <a:srgbClr val="C45E00"/>
+                </a:solidFill>
+                <a:latin typeface="JetBrains Mono"/>
+                <a:ea typeface="JetBrains Mono"/>
+                <a:cs typeface="JetBrains Mono"/>
+              </a:rPr>
               <a:t>else</a:t>
             </a:r>
             <a:r>
@@ -9167,121 +8890,13 @@
             <a:r>
               <a:rPr sz="1200">
                 <a:solidFill>
-                  <a:srgbClr val="080808"/>
-                </a:solidFill>
-                <a:latin typeface="JetBrains Mono"/>
-                <a:ea typeface="JetBrains Mono"/>
-                <a:cs typeface="JetBrains Mono"/>
-              </a:rPr>
-              <a:t>        </a:t>
-            </a:r>
-            <a:r>
-              <a:rPr sz="1200">
-                <a:solidFill>
                   <a:srgbClr val="1750EB"/>
                 </a:solidFill>
                 <a:latin typeface="JetBrains Mono"/>
                 <a:ea typeface="JetBrains Mono"/>
                 <a:cs typeface="JetBrains Mono"/>
               </a:rPr>
-              <a:t>print</a:t>
-            </a:r>
-            <a:r>
-              <a:rPr sz="1200">
-                <a:solidFill>
-                  <a:srgbClr val="080808"/>
-                </a:solidFill>
-                <a:latin typeface="JetBrains Mono"/>
-                <a:ea typeface="JetBrains Mono"/>
-                <a:cs typeface="JetBrains Mono"/>
-              </a:rPr>
-              <a:t>(</a:t>
-            </a:r>
-            <a:r>
-              <a:rPr sz="1200">
-                <a:solidFill>
-                  <a:srgbClr val="067D17"/>
-                </a:solidFill>
-                <a:latin typeface="JetBrains Mono"/>
-                <a:ea typeface="JetBrains Mono"/>
-                <a:cs typeface="JetBrains Mono"/>
-              </a:rPr>
-              <a:t>"Take an umbrella."</a:t>
-            </a:r>
-            <a:r>
-              <a:rPr sz="1200">
-                <a:solidFill>
-                  <a:srgbClr val="080808"/>
-                </a:solidFill>
-                <a:latin typeface="JetBrains Mono"/>
-                <a:ea typeface="JetBrains Mono"/>
-                <a:cs typeface="JetBrains Mono"/>
-              </a:rPr>
-              <a:t>)</a:t>
-            </a:r>
-            <a:br>
-              <a:rPr sz="1200">
-                <a:solidFill>
-                  <a:srgbClr val="080808"/>
-                </a:solidFill>
-                <a:latin typeface="JetBrains Mono"/>
-                <a:ea typeface="JetBrains Mono"/>
-                <a:cs typeface="JetBrains Mono"/>
-              </a:rPr>
-            </a:br>
-            <a:r>
-              <a:rPr sz="1200">
-                <a:solidFill>
-                  <a:srgbClr val="C45E00"/>
-                </a:solidFill>
-                <a:latin typeface="JetBrains Mono"/>
-                <a:ea typeface="JetBrains Mono"/>
-                <a:cs typeface="JetBrains Mono"/>
-              </a:rPr>
-              <a:t>else</a:t>
-            </a:r>
-            <a:r>
-              <a:rPr sz="1200">
-                <a:solidFill>
-                  <a:srgbClr val="080808"/>
-                </a:solidFill>
-                <a:latin typeface="JetBrains Mono"/>
-                <a:ea typeface="JetBrains Mono"/>
-                <a:cs typeface="JetBrains Mono"/>
-              </a:rPr>
-              <a:t>:</a:t>
-            </a:r>
-            <a:br>
-              <a:rPr sz="1200">
-                <a:solidFill>
-                  <a:srgbClr val="080808"/>
-                </a:solidFill>
-                <a:latin typeface="JetBrains Mono"/>
-                <a:ea typeface="JetBrains Mono"/>
-                <a:cs typeface="JetBrains Mono"/>
-              </a:rPr>
-            </a:br>
-            <a:r>
-              <a:rPr sz="1200">
-                <a:solidFill>
-                  <a:srgbClr val="080808"/>
-                </a:solidFill>
-                <a:latin typeface="JetBrains Mono"/>
-                <a:ea typeface="JetBrains Mono"/>
-                <a:cs typeface="JetBrains Mono"/>
-              </a:rPr>
-              <a:t>    </a:t>
-            </a:r>
-            <a:r>
-              <a:rPr sz="1200">
-                <a:solidFill>
-                  <a:srgbClr val="1750EB"/>
-                </a:solidFill>
-                <a:latin typeface="JetBrains Mono"/>
-                <a:ea typeface="JetBrains Mono"/>
-                <a:cs typeface="JetBrains Mono"/>
-              </a:rPr>
-              <a:t>print</a:t>
+              <a:t>    print</a:t>
             </a:r>
             <a:r>
               <a:rPr sz="1200">
@@ -9968,24 +9583,13 @@
             <a:r>
               <a:rPr sz="1200">
                 <a:solidFill>
-                  <a:srgbClr val="080808"/>
-                </a:solidFill>
-                <a:latin typeface="JetBrains Mono"/>
-                <a:ea typeface="JetBrains Mono"/>
-                <a:cs typeface="JetBrains Mono"/>
-              </a:rPr>
-              <a:t> </a:t>
-            </a:r>
-            <a:r>
-              <a:rPr sz="1200">
-                <a:solidFill>
                   <a:srgbClr val="067D17"/>
                 </a:solidFill>
                 <a:latin typeface="JetBrains Mono"/>
                 <a:ea typeface="JetBrains Mono"/>
                 <a:cs typeface="JetBrains Mono"/>
               </a:rPr>
-              <a:t>"yes"</a:t>
+              <a:t> "yes"</a:t>
             </a:r>
             <a:r>
               <a:rPr sz="1200">
@@ -10076,24 +9680,13 @@
             <a:r>
               <a:rPr sz="1200">
                 <a:solidFill>
-                  <a:srgbClr val="080808"/>
-                </a:solidFill>
-                <a:latin typeface="JetBrains Mono"/>
-                <a:ea typeface="JetBrains Mono"/>
-                <a:cs typeface="JetBrains Mono"/>
-              </a:rPr>
-              <a:t>    </a:t>
-            </a:r>
-            <a:r>
-              <a:rPr sz="1200">
-                <a:solidFill>
                   <a:srgbClr val="C45E00"/>
                 </a:solidFill>
                 <a:latin typeface="JetBrains Mono"/>
                 <a:ea typeface="JetBrains Mono"/>
                 <a:cs typeface="JetBrains Mono"/>
               </a:rPr>
-              <a:t>if</a:t>
+              <a:t>    if</a:t>
             </a:r>
             <a:r>
               <a:rPr sz="1200">
@@ -10120,24 +9713,13 @@
             <a:r>
               <a:rPr sz="1200">
                 <a:solidFill>
-                  <a:srgbClr val="080808"/>
-                </a:solidFill>
-                <a:latin typeface="JetBrains Mono"/>
-                <a:ea typeface="JetBrains Mono"/>
-                <a:cs typeface="JetBrains Mono"/>
-              </a:rPr>
-              <a:t> </a:t>
-            </a:r>
-            <a:r>
-              <a:rPr sz="1200">
-                <a:solidFill>
                   <a:srgbClr val="067D17"/>
                 </a:solidFill>
                 <a:latin typeface="JetBrains Mono"/>
                 <a:ea typeface="JetBrains Mono"/>
                 <a:cs typeface="JetBrains Mono"/>
               </a:rPr>
-              <a:t>"yes"</a:t>
+              <a:t> "yes"</a:t>
             </a:r>
             <a:r>
               <a:rPr sz="1200">
@@ -10163,24 +9745,13 @@
             <a:r>
               <a:rPr sz="1200">
                 <a:solidFill>
-                  <a:srgbClr val="080808"/>
-                </a:solidFill>
-                <a:latin typeface="JetBrains Mono"/>
-                <a:ea typeface="JetBrains Mono"/>
-                <a:cs typeface="JetBrains Mono"/>
-              </a:rPr>
-              <a:t>        </a:t>
-            </a:r>
-            <a:r>
-              <a:rPr sz="1200">
-                <a:solidFill>
                   <a:srgbClr val="1750EB"/>
                 </a:solidFill>
                 <a:latin typeface="JetBrains Mono"/>
                 <a:ea typeface="JetBrains Mono"/>
                 <a:cs typeface="JetBrains Mono"/>
               </a:rPr>
-              <a:t>print</a:t>
+              <a:t>        print</a:t>
             </a:r>
             <a:r>
               <a:rPr sz="1200">
@@ -10228,23 +9799,98 @@
             <a:r>
               <a:rPr sz="1200">
                 <a:solidFill>
-                  <a:srgbClr val="080808"/>
-                </a:solidFill>
-                <a:latin typeface="JetBrains Mono"/>
-                <a:ea typeface="JetBrains Mono"/>
-                <a:cs typeface="JetBrains Mono"/>
-              </a:rPr>
-              <a:t>    </a:t>
-            </a:r>
-            <a:r>
-              <a:rPr sz="1200">
-                <a:solidFill>
                   <a:srgbClr val="C45E00"/>
                 </a:solidFill>
                 <a:latin typeface="JetBrains Mono"/>
                 <a:ea typeface="JetBrains Mono"/>
                 <a:cs typeface="JetBrains Mono"/>
               </a:rPr>
+              <a:t>    else</a:t>
+            </a:r>
+            <a:r>
+              <a:rPr sz="1200">
+                <a:solidFill>
+                  <a:srgbClr val="080808"/>
+                </a:solidFill>
+                <a:latin typeface="JetBrains Mono"/>
+                <a:ea typeface="JetBrains Mono"/>
+                <a:cs typeface="JetBrains Mono"/>
+              </a:rPr>
+              <a:t>:</a:t>
+            </a:r>
+            <a:br>
+              <a:rPr sz="1200">
+                <a:solidFill>
+                  <a:srgbClr val="080808"/>
+                </a:solidFill>
+                <a:latin typeface="JetBrains Mono"/>
+                <a:ea typeface="JetBrains Mono"/>
+                <a:cs typeface="JetBrains Mono"/>
+              </a:rPr>
+            </a:br>
+            <a:r>
+              <a:rPr sz="1200">
+                <a:solidFill>
+                  <a:srgbClr val="1750EB"/>
+                </a:solidFill>
+                <a:latin typeface="JetBrains Mono"/>
+                <a:ea typeface="JetBrains Mono"/>
+                <a:cs typeface="JetBrains Mono"/>
+              </a:rPr>
+              <a:t>        print</a:t>
+            </a:r>
+            <a:r>
+              <a:rPr sz="1200">
+                <a:solidFill>
+                  <a:srgbClr val="080808"/>
+                </a:solidFill>
+                <a:latin typeface="JetBrains Mono"/>
+                <a:ea typeface="JetBrains Mono"/>
+                <a:cs typeface="JetBrains Mono"/>
+              </a:rPr>
+              <a:t>(</a:t>
+            </a:r>
+            <a:r>
+              <a:rPr sz="1200">
+                <a:solidFill>
+                  <a:srgbClr val="067D17"/>
+                </a:solidFill>
+                <a:latin typeface="JetBrains Mono"/>
+                <a:ea typeface="JetBrains Mono"/>
+                <a:cs typeface="JetBrains Mono"/>
+              </a:rPr>
+              <a:t>"Take an umbrella."</a:t>
+            </a:r>
+            <a:r>
+              <a:rPr sz="1200">
+                <a:solidFill>
+                  <a:srgbClr val="080808"/>
+                </a:solidFill>
+                <a:latin typeface="JetBrains Mono"/>
+                <a:ea typeface="JetBrains Mono"/>
+                <a:cs typeface="JetBrains Mono"/>
+              </a:rPr>
+              <a:t>)</a:t>
+            </a:r>
+            <a:br>
+              <a:rPr sz="1200">
+                <a:solidFill>
+                  <a:srgbClr val="080808"/>
+                </a:solidFill>
+                <a:latin typeface="JetBrains Mono"/>
+                <a:ea typeface="JetBrains Mono"/>
+                <a:cs typeface="JetBrains Mono"/>
+              </a:rPr>
+            </a:br>
+            <a:r>
+              <a:rPr sz="1200">
+                <a:solidFill>
+                  <a:srgbClr val="C45E00"/>
+                </a:solidFill>
+                <a:latin typeface="JetBrains Mono"/>
+                <a:ea typeface="JetBrains Mono"/>
+                <a:cs typeface="JetBrains Mono"/>
+              </a:rPr>
               <a:t>else</a:t>
             </a:r>
             <a:r>
@@ -10271,121 +9917,13 @@
             <a:r>
               <a:rPr sz="1200">
                 <a:solidFill>
-                  <a:srgbClr val="080808"/>
-                </a:solidFill>
-                <a:latin typeface="JetBrains Mono"/>
-                <a:ea typeface="JetBrains Mono"/>
-                <a:cs typeface="JetBrains Mono"/>
-              </a:rPr>
-              <a:t>        </a:t>
-            </a:r>
-            <a:r>
-              <a:rPr sz="1200">
-                <a:solidFill>
                   <a:srgbClr val="1750EB"/>
                 </a:solidFill>
                 <a:latin typeface="JetBrains Mono"/>
                 <a:ea typeface="JetBrains Mono"/>
                 <a:cs typeface="JetBrains Mono"/>
               </a:rPr>
-              <a:t>print</a:t>
-            </a:r>
-            <a:r>
-              <a:rPr sz="1200">
-                <a:solidFill>
-                  <a:srgbClr val="080808"/>
-                </a:solidFill>
-                <a:latin typeface="JetBrains Mono"/>
-                <a:ea typeface="JetBrains Mono"/>
-                <a:cs typeface="JetBrains Mono"/>
-              </a:rPr>
-              <a:t>(</a:t>
-            </a:r>
-            <a:r>
-              <a:rPr sz="1200">
-                <a:solidFill>
-                  <a:srgbClr val="067D17"/>
-                </a:solidFill>
-                <a:latin typeface="JetBrains Mono"/>
-                <a:ea typeface="JetBrains Mono"/>
-                <a:cs typeface="JetBrains Mono"/>
-              </a:rPr>
-              <a:t>"Take an umbrella."</a:t>
-            </a:r>
-            <a:r>
-              <a:rPr sz="1200">
-                <a:solidFill>
-                  <a:srgbClr val="080808"/>
-                </a:solidFill>
-                <a:latin typeface="JetBrains Mono"/>
-                <a:ea typeface="JetBrains Mono"/>
-                <a:cs typeface="JetBrains Mono"/>
-              </a:rPr>
-              <a:t>)</a:t>
-            </a:r>
-            <a:br>
-              <a:rPr sz="1200">
-                <a:solidFill>
-                  <a:srgbClr val="080808"/>
-                </a:solidFill>
-                <a:latin typeface="JetBrains Mono"/>
-                <a:ea typeface="JetBrains Mono"/>
-                <a:cs typeface="JetBrains Mono"/>
-              </a:rPr>
-            </a:br>
-            <a:r>
-              <a:rPr sz="1200">
-                <a:solidFill>
-                  <a:srgbClr val="C45E00"/>
-                </a:solidFill>
-                <a:latin typeface="JetBrains Mono"/>
-                <a:ea typeface="JetBrains Mono"/>
-                <a:cs typeface="JetBrains Mono"/>
-              </a:rPr>
-              <a:t>else</a:t>
-            </a:r>
-            <a:r>
-              <a:rPr sz="1200">
-                <a:solidFill>
-                  <a:srgbClr val="080808"/>
-                </a:solidFill>
-                <a:latin typeface="JetBrains Mono"/>
-                <a:ea typeface="JetBrains Mono"/>
-                <a:cs typeface="JetBrains Mono"/>
-              </a:rPr>
-              <a:t>:</a:t>
-            </a:r>
-            <a:br>
-              <a:rPr sz="1200">
-                <a:solidFill>
-                  <a:srgbClr val="080808"/>
-                </a:solidFill>
-                <a:latin typeface="JetBrains Mono"/>
-                <a:ea typeface="JetBrains Mono"/>
-                <a:cs typeface="JetBrains Mono"/>
-              </a:rPr>
-            </a:br>
-            <a:r>
-              <a:rPr sz="1200">
-                <a:solidFill>
-                  <a:srgbClr val="080808"/>
-                </a:solidFill>
-                <a:latin typeface="JetBrains Mono"/>
-                <a:ea typeface="JetBrains Mono"/>
-                <a:cs typeface="JetBrains Mono"/>
-              </a:rPr>
-              <a:t>    </a:t>
-            </a:r>
-            <a:r>
-              <a:rPr sz="1200">
-                <a:solidFill>
-                  <a:srgbClr val="1750EB"/>
-                </a:solidFill>
-                <a:latin typeface="JetBrains Mono"/>
-                <a:ea typeface="JetBrains Mono"/>
-                <a:cs typeface="JetBrains Mono"/>
-              </a:rPr>
-              <a:t>print</a:t>
+              <a:t>    print</a:t>
             </a:r>
             <a:r>
               <a:rPr sz="1200">
@@ -10984,24 +10522,13 @@
             <a:r>
               <a:rPr sz="1200">
                 <a:solidFill>
-                  <a:srgbClr val="080808"/>
-                </a:solidFill>
-                <a:latin typeface="JetBrains Mono"/>
-                <a:ea typeface="JetBrains Mono"/>
-                <a:cs typeface="JetBrains Mono"/>
-              </a:rPr>
-              <a:t> </a:t>
-            </a:r>
-            <a:r>
-              <a:rPr sz="1200">
-                <a:solidFill>
                   <a:srgbClr val="067D17"/>
                 </a:solidFill>
                 <a:latin typeface="JetBrains Mono"/>
                 <a:ea typeface="JetBrains Mono"/>
                 <a:cs typeface="JetBrains Mono"/>
               </a:rPr>
-              <a:t>"yes"</a:t>
+              <a:t> "yes"</a:t>
             </a:r>
             <a:r>
               <a:rPr sz="1200">
@@ -11092,24 +10619,13 @@
             <a:r>
               <a:rPr sz="1200">
                 <a:solidFill>
-                  <a:srgbClr val="080808"/>
-                </a:solidFill>
-                <a:latin typeface="JetBrains Mono"/>
-                <a:ea typeface="JetBrains Mono"/>
-                <a:cs typeface="JetBrains Mono"/>
-              </a:rPr>
-              <a:t>    </a:t>
-            </a:r>
-            <a:r>
-              <a:rPr sz="1200">
-                <a:solidFill>
                   <a:srgbClr val="C45E00"/>
                 </a:solidFill>
                 <a:latin typeface="JetBrains Mono"/>
                 <a:ea typeface="JetBrains Mono"/>
                 <a:cs typeface="JetBrains Mono"/>
               </a:rPr>
-              <a:t>if</a:t>
+              <a:t>    if</a:t>
             </a:r>
             <a:r>
               <a:rPr sz="1200">
@@ -11136,24 +10652,13 @@
             <a:r>
               <a:rPr sz="1200">
                 <a:solidFill>
-                  <a:srgbClr val="080808"/>
-                </a:solidFill>
-                <a:latin typeface="JetBrains Mono"/>
-                <a:ea typeface="JetBrains Mono"/>
-                <a:cs typeface="JetBrains Mono"/>
-              </a:rPr>
-              <a:t> </a:t>
-            </a:r>
-            <a:r>
-              <a:rPr sz="1200">
-                <a:solidFill>
                   <a:srgbClr val="067D17"/>
                 </a:solidFill>
                 <a:latin typeface="JetBrains Mono"/>
                 <a:ea typeface="JetBrains Mono"/>
                 <a:cs typeface="JetBrains Mono"/>
               </a:rPr>
-              <a:t>"yes"</a:t>
+              <a:t> "yes"</a:t>
             </a:r>
             <a:r>
               <a:rPr sz="1200">
@@ -11179,24 +10684,13 @@
             <a:r>
               <a:rPr sz="1200">
                 <a:solidFill>
-                  <a:srgbClr val="080808"/>
-                </a:solidFill>
-                <a:latin typeface="JetBrains Mono"/>
-                <a:ea typeface="JetBrains Mono"/>
-                <a:cs typeface="JetBrains Mono"/>
-              </a:rPr>
-              <a:t>        </a:t>
-            </a:r>
-            <a:r>
-              <a:rPr sz="1200">
-                <a:solidFill>
                   <a:srgbClr val="1750EB"/>
                 </a:solidFill>
                 <a:latin typeface="JetBrains Mono"/>
                 <a:ea typeface="JetBrains Mono"/>
                 <a:cs typeface="JetBrains Mono"/>
               </a:rPr>
-              <a:t>print</a:t>
+              <a:t>        print</a:t>
             </a:r>
             <a:r>
               <a:rPr sz="1200">
@@ -11244,23 +10738,98 @@
             <a:r>
               <a:rPr sz="1200">
                 <a:solidFill>
-                  <a:srgbClr val="080808"/>
-                </a:solidFill>
-                <a:latin typeface="JetBrains Mono"/>
-                <a:ea typeface="JetBrains Mono"/>
-                <a:cs typeface="JetBrains Mono"/>
-              </a:rPr>
-              <a:t>    </a:t>
-            </a:r>
-            <a:r>
-              <a:rPr sz="1200">
-                <a:solidFill>
                   <a:srgbClr val="C45E00"/>
                 </a:solidFill>
                 <a:latin typeface="JetBrains Mono"/>
                 <a:ea typeface="JetBrains Mono"/>
                 <a:cs typeface="JetBrains Mono"/>
               </a:rPr>
+              <a:t>    else</a:t>
+            </a:r>
+            <a:r>
+              <a:rPr sz="1200">
+                <a:solidFill>
+                  <a:srgbClr val="080808"/>
+                </a:solidFill>
+                <a:latin typeface="JetBrains Mono"/>
+                <a:ea typeface="JetBrains Mono"/>
+                <a:cs typeface="JetBrains Mono"/>
+              </a:rPr>
+              <a:t>:</a:t>
+            </a:r>
+            <a:br>
+              <a:rPr sz="1200">
+                <a:solidFill>
+                  <a:srgbClr val="080808"/>
+                </a:solidFill>
+                <a:latin typeface="JetBrains Mono"/>
+                <a:ea typeface="JetBrains Mono"/>
+                <a:cs typeface="JetBrains Mono"/>
+              </a:rPr>
+            </a:br>
+            <a:r>
+              <a:rPr sz="1200">
+                <a:solidFill>
+                  <a:srgbClr val="1750EB"/>
+                </a:solidFill>
+                <a:latin typeface="JetBrains Mono"/>
+                <a:ea typeface="JetBrains Mono"/>
+                <a:cs typeface="JetBrains Mono"/>
+              </a:rPr>
+              <a:t>        print</a:t>
+            </a:r>
+            <a:r>
+              <a:rPr sz="1200">
+                <a:solidFill>
+                  <a:srgbClr val="080808"/>
+                </a:solidFill>
+                <a:latin typeface="JetBrains Mono"/>
+                <a:ea typeface="JetBrains Mono"/>
+                <a:cs typeface="JetBrains Mono"/>
+              </a:rPr>
+              <a:t>(</a:t>
+            </a:r>
+            <a:r>
+              <a:rPr sz="1200">
+                <a:solidFill>
+                  <a:srgbClr val="067D17"/>
+                </a:solidFill>
+                <a:latin typeface="JetBrains Mono"/>
+                <a:ea typeface="JetBrains Mono"/>
+                <a:cs typeface="JetBrains Mono"/>
+              </a:rPr>
+              <a:t>"Take an umbrella."</a:t>
+            </a:r>
+            <a:r>
+              <a:rPr sz="1200">
+                <a:solidFill>
+                  <a:srgbClr val="080808"/>
+                </a:solidFill>
+                <a:latin typeface="JetBrains Mono"/>
+                <a:ea typeface="JetBrains Mono"/>
+                <a:cs typeface="JetBrains Mono"/>
+              </a:rPr>
+              <a:t>)</a:t>
+            </a:r>
+            <a:br>
+              <a:rPr sz="1200">
+                <a:solidFill>
+                  <a:srgbClr val="080808"/>
+                </a:solidFill>
+                <a:latin typeface="JetBrains Mono"/>
+                <a:ea typeface="JetBrains Mono"/>
+                <a:cs typeface="JetBrains Mono"/>
+              </a:rPr>
+            </a:br>
+            <a:r>
+              <a:rPr sz="1200">
+                <a:solidFill>
+                  <a:srgbClr val="C45E00"/>
+                </a:solidFill>
+                <a:latin typeface="JetBrains Mono"/>
+                <a:ea typeface="JetBrains Mono"/>
+                <a:cs typeface="JetBrains Mono"/>
+              </a:rPr>
               <a:t>else</a:t>
             </a:r>
             <a:r>
@@ -11287,121 +10856,13 @@
             <a:r>
               <a:rPr sz="1200">
                 <a:solidFill>
-                  <a:srgbClr val="080808"/>
-                </a:solidFill>
-                <a:latin typeface="JetBrains Mono"/>
-                <a:ea typeface="JetBrains Mono"/>
-                <a:cs typeface="JetBrains Mono"/>
-              </a:rPr>
-              <a:t>        </a:t>
-            </a:r>
-            <a:r>
-              <a:rPr sz="1200">
-                <a:solidFill>
                   <a:srgbClr val="1750EB"/>
                 </a:solidFill>
                 <a:latin typeface="JetBrains Mono"/>
                 <a:ea typeface="JetBrains Mono"/>
                 <a:cs typeface="JetBrains Mono"/>
               </a:rPr>
-              <a:t>print</a:t>
-            </a:r>
-            <a:r>
-              <a:rPr sz="1200">
-                <a:solidFill>
-                  <a:srgbClr val="080808"/>
-                </a:solidFill>
-                <a:latin typeface="JetBrains Mono"/>
-                <a:ea typeface="JetBrains Mono"/>
-                <a:cs typeface="JetBrains Mono"/>
-              </a:rPr>
-              <a:t>(</a:t>
-            </a:r>
-            <a:r>
-              <a:rPr sz="1200">
-                <a:solidFill>
-                  <a:srgbClr val="067D17"/>
-                </a:solidFill>
-                <a:latin typeface="JetBrains Mono"/>
-                <a:ea typeface="JetBrains Mono"/>
-                <a:cs typeface="JetBrains Mono"/>
-              </a:rPr>
-              <a:t>"Take an umbrella."</a:t>
-            </a:r>
-            <a:r>
-              <a:rPr sz="1200">
-                <a:solidFill>
-                  <a:srgbClr val="080808"/>
-                </a:solidFill>
-                <a:latin typeface="JetBrains Mono"/>
-                <a:ea typeface="JetBrains Mono"/>
-                <a:cs typeface="JetBrains Mono"/>
-              </a:rPr>
-              <a:t>)</a:t>
-            </a:r>
-            <a:br>
-              <a:rPr sz="1200">
-                <a:solidFill>
-                  <a:srgbClr val="080808"/>
-                </a:solidFill>
-                <a:latin typeface="JetBrains Mono"/>
-                <a:ea typeface="JetBrains Mono"/>
-                <a:cs typeface="JetBrains Mono"/>
-              </a:rPr>
-            </a:br>
-            <a:r>
-              <a:rPr sz="1200">
-                <a:solidFill>
-                  <a:srgbClr val="C45E00"/>
-                </a:solidFill>
-                <a:latin typeface="JetBrains Mono"/>
-                <a:ea typeface="JetBrains Mono"/>
-                <a:cs typeface="JetBrains Mono"/>
-              </a:rPr>
-              <a:t>else</a:t>
-            </a:r>
-            <a:r>
-              <a:rPr sz="1200">
-                <a:solidFill>
-                  <a:srgbClr val="080808"/>
-                </a:solidFill>
-                <a:latin typeface="JetBrains Mono"/>
-                <a:ea typeface="JetBrains Mono"/>
-                <a:cs typeface="JetBrains Mono"/>
-              </a:rPr>
-              <a:t>:</a:t>
-            </a:r>
-            <a:br>
-              <a:rPr sz="1200">
-                <a:solidFill>
-                  <a:srgbClr val="080808"/>
-                </a:solidFill>
-                <a:latin typeface="JetBrains Mono"/>
-                <a:ea typeface="JetBrains Mono"/>
-                <a:cs typeface="JetBrains Mono"/>
-              </a:rPr>
-            </a:br>
-            <a:r>
-              <a:rPr sz="1200">
-                <a:solidFill>
-                  <a:srgbClr val="080808"/>
-                </a:solidFill>
-                <a:latin typeface="JetBrains Mono"/>
-                <a:ea typeface="JetBrains Mono"/>
-                <a:cs typeface="JetBrains Mono"/>
-              </a:rPr>
-              <a:t>    </a:t>
-            </a:r>
-            <a:r>
-              <a:rPr sz="1200">
-                <a:solidFill>
-                  <a:srgbClr val="1750EB"/>
-                </a:solidFill>
-                <a:latin typeface="JetBrains Mono"/>
-                <a:ea typeface="JetBrains Mono"/>
-                <a:cs typeface="JetBrains Mono"/>
-              </a:rPr>
-              <a:t>print</a:t>
+              <a:t>    print</a:t>
             </a:r>
             <a:r>
               <a:rPr sz="1200">
@@ -11668,24 +11129,13 @@
             <a:r>
               <a:rPr sz="1800">
                 <a:solidFill>
-                  <a:srgbClr val="080808"/>
-                </a:solidFill>
-                <a:latin typeface="JetBrains Mono"/>
-                <a:ea typeface="JetBrains Mono"/>
-                <a:cs typeface="JetBrains Mono"/>
-              </a:rPr>
-              <a:t> </a:t>
-            </a:r>
-            <a:r>
-              <a:rPr sz="1800">
-                <a:solidFill>
                   <a:srgbClr val="067D17"/>
                 </a:solidFill>
                 <a:latin typeface="JetBrains Mono"/>
                 <a:ea typeface="JetBrains Mono"/>
                 <a:cs typeface="JetBrains Mono"/>
               </a:rPr>
-              <a:t>"yes"</a:t>
+              <a:t> "yes"</a:t>
             </a:r>
             <a:r>
               <a:rPr sz="1800">
@@ -11772,24 +11222,13 @@
             <a:r>
               <a:rPr sz="1800">
                 <a:solidFill>
-                  <a:srgbClr val="080808"/>
-                </a:solidFill>
-                <a:latin typeface="JetBrains Mono"/>
-                <a:ea typeface="JetBrains Mono"/>
-                <a:cs typeface="JetBrains Mono"/>
-              </a:rPr>
-              <a:t>    </a:t>
-            </a:r>
-            <a:r>
-              <a:rPr sz="1800">
-                <a:solidFill>
                   <a:srgbClr val="C45E00"/>
                 </a:solidFill>
                 <a:latin typeface="JetBrains Mono"/>
                 <a:ea typeface="JetBrains Mono"/>
                 <a:cs typeface="JetBrains Mono"/>
               </a:rPr>
-              <a:t>if</a:t>
+              <a:t>    if</a:t>
             </a:r>
             <a:r>
               <a:rPr sz="1800">
@@ -11816,24 +11255,13 @@
             <a:r>
               <a:rPr sz="1800">
                 <a:solidFill>
-                  <a:srgbClr val="080808"/>
-                </a:solidFill>
-                <a:latin typeface="JetBrains Mono"/>
-                <a:ea typeface="JetBrains Mono"/>
-                <a:cs typeface="JetBrains Mono"/>
-              </a:rPr>
-              <a:t> </a:t>
-            </a:r>
-            <a:r>
-              <a:rPr sz="1800">
-                <a:solidFill>
                   <a:srgbClr val="067D17"/>
                 </a:solidFill>
                 <a:latin typeface="JetBrains Mono"/>
                 <a:ea typeface="JetBrains Mono"/>
                 <a:cs typeface="JetBrains Mono"/>
               </a:rPr>
-              <a:t>"yes"</a:t>
+              <a:t> "yes"</a:t>
             </a:r>
           </a:p>
           <a:p xmlns:a="http://schemas.openxmlformats.org/drawingml/2006/main">
@@ -11846,24 +11274,13 @@
             <a:r>
               <a:rPr sz="1800">
                 <a:solidFill>
-                  <a:srgbClr val="080808"/>
-                </a:solidFill>
-                <a:latin typeface="JetBrains Mono"/>
-                <a:ea typeface="JetBrains Mono"/>
-                <a:cs typeface="JetBrains Mono"/>
-              </a:rPr>
-              <a:t>        </a:t>
-            </a:r>
-            <a:r>
-              <a:rPr sz="1800">
-                <a:solidFill>
                   <a:srgbClr val="1750EB"/>
                 </a:solidFill>
                 <a:latin typeface="JetBrains Mono"/>
                 <a:ea typeface="JetBrains Mono"/>
                 <a:cs typeface="JetBrains Mono"/>
               </a:rPr>
-              <a:t>print</a:t>
+              <a:t>        print</a:t>
             </a:r>
             <a:r>
               <a:rPr sz="1800">
@@ -11909,24 +11326,13 @@
             <a:r>
               <a:rPr sz="1800">
                 <a:solidFill>
-                  <a:srgbClr val="080808"/>
-                </a:solidFill>
-                <a:latin typeface="JetBrains Mono"/>
-                <a:ea typeface="JetBrains Mono"/>
-                <a:cs typeface="JetBrains Mono"/>
-              </a:rPr>
-              <a:t>    </a:t>
-            </a:r>
-            <a:r>
-              <a:rPr sz="1800">
-                <a:solidFill>
                   <a:srgbClr val="C45E00"/>
                 </a:solidFill>
                 <a:latin typeface="JetBrains Mono"/>
                 <a:ea typeface="JetBrains Mono"/>
                 <a:cs typeface="JetBrains Mono"/>
               </a:rPr>
-              <a:t>else</a:t>
+              <a:t>    else</a:t>
             </a:r>
             <a:r>
               <a:rPr sz="1800">
@@ -11950,24 +11356,13 @@
             <a:r>
               <a:rPr sz="1800">
                 <a:solidFill>
-                  <a:srgbClr val="080808"/>
-                </a:solidFill>
-                <a:latin typeface="JetBrains Mono"/>
-                <a:ea typeface="JetBrains Mono"/>
-                <a:cs typeface="JetBrains Mono"/>
-              </a:rPr>
-              <a:t>        </a:t>
-            </a:r>
-            <a:r>
-              <a:rPr sz="1800">
-                <a:solidFill>
                   <a:srgbClr val="1750EB"/>
                 </a:solidFill>
                 <a:latin typeface="JetBrains Mono"/>
                 <a:ea typeface="JetBrains Mono"/>
                 <a:cs typeface="JetBrains Mono"/>
               </a:rPr>
-              <a:t>print</a:t>
+              <a:t>        print</a:t>
             </a:r>
             <a:r>
               <a:rPr sz="1800">
